--- a/dist/초4/수학/도형/초4_수학_도형_07_평면도형의이동_학생용.pptx
+++ b/dist/초4/수학/도형/초4_수학_도형_07_평면도형의이동_학생용.pptx
@@ -120,13 +120,13 @@
   <p:extLst>
     <p:ext uri="{521415D9-36F7-43E2-AB2F-B90AF26B5E84}">
       <p14:sectionLst xmlns:p14="http://schemas.microsoft.com/office/powerpoint/2010/main">
-        <p14:section name="도입" id="{94ba0e07-c368-b0da-2032-9f0dd8fefdf1}">
+        <p14:section name="도입" id="{1549f165-a964-0ad2-4856-8749bf128ab5}">
           <p14:sldIdLst>
             <p14:sldId id="256"/>
             <p14:sldId id="257"/>
           </p14:sldIdLst>
         </p14:section>
-        <p14:section name="개념" id="{eeaf7c8e-7127-b9b6-49ec-58120a0d78a3}">
+        <p14:section name="개념" id="{362cdaee-b4d8-55e4-8b7f-bd072937eb88}">
           <p14:sldIdLst>
             <p14:sldId id="258"/>
             <p14:sldId id="259"/>
@@ -134,7 +134,7 @@
             <p14:sldId id="263"/>
           </p14:sldIdLst>
         </p14:section>
-        <p14:section name="연습" id="{0740cc9b-b08f-3131-7a38-ac0c15598a56}">
+        <p14:section name="연습" id="{cbd56eda-df55-711e-fdf1-82b09fc15ac2}">
           <p14:sldIdLst>
             <p14:sldId id="260"/>
             <p14:sldId id="261"/>
@@ -142,24 +142,24 @@
             <p14:sldId id="265"/>
           </p14:sldIdLst>
         </p14:section>
-        <p14:section name="개념" id="{5dc2120d-f9f8-f123-fbdc-49cc4317388c}">
+        <p14:section name="개념" id="{1aa0b97d-ec48-864f-94fa-97dfa48a11ae}">
           <p14:sldIdLst/>
         </p14:section>
-        <p14:section name="연습" id="{11932bed-9e96-cf70-95ae-be0f0870b3f9}">
+        <p14:section name="연습" id="{d130d902-66b4-3290-ed8f-18008f747103}">
           <p14:sldIdLst/>
         </p14:section>
-        <p14:section name="확인" id="{370a2dcb-c023-5db8-2aad-662e54e8ce4f}">
+        <p14:section name="확인" id="{138802f0-eccd-3e83-080c-55cfa29b16c1}">
           <p14:sldIdLst>
             <p14:sldId id="266"/>
             <p14:sldId id="267"/>
           </p14:sldIdLst>
         </p14:section>
-        <p14:section name="정리" id="{ef041e01-cabd-c01d-e67a-90ff9a0d1489}">
+        <p14:section name="정리" id="{fd9ab534-8870-5e3c-2839-d78362bfd825}">
           <p14:sldIdLst>
             <p14:sldId id="268"/>
           </p14:sldIdLst>
         </p14:section>
-        <p14:section name="보충" id="{027b667a-fb91-a891-b8b9-a56782be188d}">
+        <p14:section name="보충" id="{a74a092e-77d6-7cab-309f-ea882816661b}">
           <p14:sldIdLst>
             <p14:sldId id="269"/>
           </p14:sldIdLst>

--- a/dist/초4/수학/도형/초4_수학_도형_07_평면도형의이동_학생용.pptx
+++ b/dist/초4/수학/도형/초4_수학_도형_07_평면도형의이동_학생용.pptx
@@ -120,13 +120,13 @@
   <p:extLst>
     <p:ext uri="{521415D9-36F7-43E2-AB2F-B90AF26B5E84}">
       <p14:sectionLst xmlns:p14="http://schemas.microsoft.com/office/powerpoint/2010/main">
-        <p14:section name="도입" id="{1549f165-a964-0ad2-4856-8749bf128ab5}">
+        <p14:section name="도입" id="{ed77f817-4994-5887-eac4-05ab1d43ff69}">
           <p14:sldIdLst>
             <p14:sldId id="256"/>
             <p14:sldId id="257"/>
           </p14:sldIdLst>
         </p14:section>
-        <p14:section name="개념" id="{362cdaee-b4d8-55e4-8b7f-bd072937eb88}">
+        <p14:section name="개념" id="{34e8a86b-c2d3-a251-ff2a-f3674c543979}">
           <p14:sldIdLst>
             <p14:sldId id="258"/>
             <p14:sldId id="259"/>
@@ -134,7 +134,7 @@
             <p14:sldId id="263"/>
           </p14:sldIdLst>
         </p14:section>
-        <p14:section name="연습" id="{cbd56eda-df55-711e-fdf1-82b09fc15ac2}">
+        <p14:section name="연습" id="{ad0cae81-c31d-4f81-74ec-818d254888fc}">
           <p14:sldIdLst>
             <p14:sldId id="260"/>
             <p14:sldId id="261"/>
@@ -142,24 +142,24 @@
             <p14:sldId id="265"/>
           </p14:sldIdLst>
         </p14:section>
-        <p14:section name="개념" id="{1aa0b97d-ec48-864f-94fa-97dfa48a11ae}">
+        <p14:section name="개념" id="{d5b7c279-bb7f-d5bc-f7d9-4854f1aea9c5}">
           <p14:sldIdLst/>
         </p14:section>
-        <p14:section name="연습" id="{d130d902-66b4-3290-ed8f-18008f747103}">
+        <p14:section name="연습" id="{da8c4265-a91e-b086-bba9-bd280a23c846}">
           <p14:sldIdLst/>
         </p14:section>
-        <p14:section name="확인" id="{138802f0-eccd-3e83-080c-55cfa29b16c1}">
+        <p14:section name="확인" id="{7d26a964-1df8-ff16-24dd-ff90729e098e}">
           <p14:sldIdLst>
             <p14:sldId id="266"/>
             <p14:sldId id="267"/>
           </p14:sldIdLst>
         </p14:section>
-        <p14:section name="정리" id="{fd9ab534-8870-5e3c-2839-d78362bfd825}">
+        <p14:section name="정리" id="{cbc429b5-4175-d574-3843-9f5ae9f0db5a}">
           <p14:sldIdLst>
             <p14:sldId id="268"/>
           </p14:sldIdLst>
         </p14:section>
-        <p14:section name="보충" id="{a74a092e-77d6-7cab-309f-ea882816661b}">
+        <p14:section name="보충" id="{b9e88c81-d98d-83ed-d4e1-69e02cf02c47}">
           <p14:sldIdLst>
             <p14:sldId id="269"/>
           </p14:sldIdLst>
@@ -3708,7 +3708,7 @@
       </p:sp>
       <p:sp>
         <p:nvSpPr>
-          <p:cNvPr id="3" name="S10-card339"/>
+          <p:cNvPr id="3" name="S10-card335"/>
           <p:cNvSpPr/>
           <p:nvPr/>
         </p:nvSpPr>
@@ -3735,7 +3735,7 @@
       </p:sp>
       <p:sp>
         <p:nvSpPr>
-          <p:cNvPr id="4" name="S10-cardtext340"/>
+          <p:cNvPr id="4" name="S10-cardtext336"/>
           <p:cNvSpPr txBox="1"/>
           <p:nvPr/>
         </p:nvSpPr>
@@ -3777,7 +3777,7 @@
       </p:sp>
       <p:sp>
         <p:nvSpPr>
-          <p:cNvPr id="5" name="S10-chip341"/>
+          <p:cNvPr id="5" name="S10-chip337"/>
           <p:cNvSpPr txBox="1"/>
           <p:nvPr/>
         </p:nvSpPr>
@@ -3824,7 +3824,7 @@
       </p:sp>
       <p:sp>
         <p:nvSpPr>
-          <p:cNvPr id="6" name="S10-mark342"/>
+          <p:cNvPr id="6" name="S10-mark338"/>
           <p:cNvSpPr/>
           <p:nvPr/>
         </p:nvSpPr>
@@ -3871,7 +3871,7 @@
       </p:sp>
       <p:sp>
         <p:nvSpPr>
-          <p:cNvPr id="7" name="S10-mark343"/>
+          <p:cNvPr id="7" name="S10-mark339"/>
           <p:cNvSpPr/>
           <p:nvPr/>
         </p:nvSpPr>
@@ -3894,7 +3894,7 @@
       </p:sp>
       <p:sp>
         <p:nvSpPr>
-          <p:cNvPr id="8" name="S10-mark344"/>
+          <p:cNvPr id="8" name="S10-mark340"/>
           <p:cNvSpPr/>
           <p:nvPr/>
         </p:nvSpPr>
@@ -3917,7 +3917,7 @@
       </p:sp>
       <p:sp>
         <p:nvSpPr>
-          <p:cNvPr id="9" name="S10-mark345"/>
+          <p:cNvPr id="9" name="S10-mark341"/>
           <p:cNvSpPr/>
           <p:nvPr/>
         </p:nvSpPr>
@@ -3940,7 +3940,7 @@
       </p:sp>
       <p:sp>
         <p:nvSpPr>
-          <p:cNvPr id="10" name="S10-mark346"/>
+          <p:cNvPr id="10" name="S10-mark342"/>
           <p:cNvSpPr/>
           <p:nvPr/>
         </p:nvSpPr>
@@ -3963,7 +3963,7 @@
       </p:sp>
       <p:sp>
         <p:nvSpPr>
-          <p:cNvPr id="11" name="S10-mark347"/>
+          <p:cNvPr id="11" name="S10-mark343"/>
           <p:cNvSpPr/>
           <p:nvPr/>
         </p:nvSpPr>
@@ -3986,7 +3986,7 @@
       </p:sp>
       <p:sp>
         <p:nvSpPr>
-          <p:cNvPr id="12" name="S10-mark348"/>
+          <p:cNvPr id="12" name="S10-mark344"/>
           <p:cNvSpPr/>
           <p:nvPr/>
         </p:nvSpPr>
@@ -4009,7 +4009,7 @@
       </p:sp>
       <p:sp>
         <p:nvSpPr>
-          <p:cNvPr id="13" name="S10-mark349"/>
+          <p:cNvPr id="13" name="S10-mark345"/>
           <p:cNvSpPr/>
           <p:nvPr/>
         </p:nvSpPr>
@@ -4032,7 +4032,7 @@
       </p:sp>
       <p:sp>
         <p:nvSpPr>
-          <p:cNvPr id="14" name="S10-mark350"/>
+          <p:cNvPr id="14" name="S10-mark346"/>
           <p:cNvSpPr/>
           <p:nvPr/>
         </p:nvSpPr>
@@ -4055,7 +4055,7 @@
       </p:sp>
       <p:sp>
         <p:nvSpPr>
-          <p:cNvPr id="15" name="S10-figure351" descr="처음 깃발: 깃대는 위를 향하고 깃발은 오른쪽을 가리킴"/>
+          <p:cNvPr id="15" name="S10-figure347" descr="처음 깃발: 깃대는 위를 향하고 깃발은 오른쪽을 가리킴"/>
           <p:cNvSpPr/>
           <p:nvPr/>
         </p:nvSpPr>
@@ -4105,7 +4105,7 @@
       </p:sp>
       <p:sp>
         <p:nvSpPr>
-          <p:cNvPr id="16" name="S10-label352"/>
+          <p:cNvPr id="16" name="S10-label348"/>
           <p:cNvSpPr txBox="1"/>
           <p:nvPr/>
         </p:nvSpPr>
@@ -4144,7 +4144,7 @@
       </p:sp>
       <p:sp>
         <p:nvSpPr>
-          <p:cNvPr id="17" name="S10-chip353"/>
+          <p:cNvPr id="17" name="S10-chip349"/>
           <p:cNvSpPr txBox="1"/>
           <p:nvPr/>
         </p:nvSpPr>
@@ -4191,7 +4191,7 @@
       </p:sp>
       <p:sp>
         <p:nvSpPr>
-          <p:cNvPr id="18" name="S10-mark354"/>
+          <p:cNvPr id="18" name="S10-mark350"/>
           <p:cNvSpPr/>
           <p:nvPr/>
         </p:nvSpPr>
@@ -4238,7 +4238,7 @@
       </p:sp>
       <p:sp>
         <p:nvSpPr>
-          <p:cNvPr id="19" name="S10-mark355"/>
+          <p:cNvPr id="19" name="S10-mark351"/>
           <p:cNvSpPr/>
           <p:nvPr/>
         </p:nvSpPr>
@@ -4261,7 +4261,7 @@
       </p:sp>
       <p:sp>
         <p:nvSpPr>
-          <p:cNvPr id="20" name="S10-mark356"/>
+          <p:cNvPr id="20" name="S10-mark352"/>
           <p:cNvSpPr/>
           <p:nvPr/>
         </p:nvSpPr>
@@ -4284,7 +4284,7 @@
       </p:sp>
       <p:sp>
         <p:nvSpPr>
-          <p:cNvPr id="21" name="S10-mark357"/>
+          <p:cNvPr id="21" name="S10-mark353"/>
           <p:cNvSpPr/>
           <p:nvPr/>
         </p:nvSpPr>
@@ -4307,7 +4307,7 @@
       </p:sp>
       <p:sp>
         <p:nvSpPr>
-          <p:cNvPr id="22" name="S10-mark358"/>
+          <p:cNvPr id="22" name="S10-mark354"/>
           <p:cNvSpPr/>
           <p:nvPr/>
         </p:nvSpPr>
@@ -4330,7 +4330,7 @@
       </p:sp>
       <p:sp>
         <p:nvSpPr>
-          <p:cNvPr id="23" name="S10-mark359"/>
+          <p:cNvPr id="23" name="S10-mark355"/>
           <p:cNvSpPr/>
           <p:nvPr/>
         </p:nvSpPr>
@@ -4353,7 +4353,7 @@
       </p:sp>
       <p:sp>
         <p:nvSpPr>
-          <p:cNvPr id="24" name="S10-mark360"/>
+          <p:cNvPr id="24" name="S10-mark356"/>
           <p:cNvSpPr/>
           <p:nvPr/>
         </p:nvSpPr>
@@ -4376,7 +4376,7 @@
       </p:sp>
       <p:sp>
         <p:nvSpPr>
-          <p:cNvPr id="25" name="S10-mark361"/>
+          <p:cNvPr id="25" name="S10-mark357"/>
           <p:cNvSpPr/>
           <p:nvPr/>
         </p:nvSpPr>
@@ -4399,7 +4399,7 @@
       </p:sp>
       <p:sp>
         <p:nvSpPr>
-          <p:cNvPr id="26" name="S10-mark362"/>
+          <p:cNvPr id="26" name="S10-mark358"/>
           <p:cNvSpPr/>
           <p:nvPr/>
         </p:nvSpPr>
@@ -4422,7 +4422,7 @@
       </p:sp>
       <p:sp>
         <p:nvSpPr>
-          <p:cNvPr id="27" name="S10-figure363" descr="가: 깃대가 왼쪽을 향하고 깃발이 위쪽을 가리킴"/>
+          <p:cNvPr id="27" name="S10-figure359" descr="가: 깃대가 왼쪽을 향하고 깃발이 위쪽을 가리킴"/>
           <p:cNvSpPr/>
           <p:nvPr/>
         </p:nvSpPr>
@@ -4472,7 +4472,7 @@
       </p:sp>
       <p:sp>
         <p:nvSpPr>
-          <p:cNvPr id="28" name="S10-label364"/>
+          <p:cNvPr id="28" name="S10-label360"/>
           <p:cNvSpPr txBox="1"/>
           <p:nvPr/>
         </p:nvSpPr>
@@ -4511,7 +4511,7 @@
       </p:sp>
       <p:sp>
         <p:nvSpPr>
-          <p:cNvPr id="29" name="S10-chip365"/>
+          <p:cNvPr id="29" name="S10-chip361"/>
           <p:cNvSpPr txBox="1"/>
           <p:nvPr/>
         </p:nvSpPr>
@@ -4558,7 +4558,7 @@
       </p:sp>
       <p:sp>
         <p:nvSpPr>
-          <p:cNvPr id="30" name="S10-mark366"/>
+          <p:cNvPr id="30" name="S10-mark362"/>
           <p:cNvSpPr/>
           <p:nvPr/>
         </p:nvSpPr>
@@ -4605,7 +4605,7 @@
       </p:sp>
       <p:sp>
         <p:nvSpPr>
-          <p:cNvPr id="31" name="S10-mark367"/>
+          <p:cNvPr id="31" name="S10-mark363"/>
           <p:cNvSpPr/>
           <p:nvPr/>
         </p:nvSpPr>
@@ -4628,7 +4628,7 @@
       </p:sp>
       <p:sp>
         <p:nvSpPr>
-          <p:cNvPr id="32" name="S10-mark368"/>
+          <p:cNvPr id="32" name="S10-mark364"/>
           <p:cNvSpPr/>
           <p:nvPr/>
         </p:nvSpPr>
@@ -4651,7 +4651,7 @@
       </p:sp>
       <p:sp>
         <p:nvSpPr>
-          <p:cNvPr id="33" name="S10-mark369"/>
+          <p:cNvPr id="33" name="S10-mark365"/>
           <p:cNvSpPr/>
           <p:nvPr/>
         </p:nvSpPr>
@@ -4674,7 +4674,7 @@
       </p:sp>
       <p:sp>
         <p:nvSpPr>
-          <p:cNvPr id="34" name="S10-mark370"/>
+          <p:cNvPr id="34" name="S10-mark366"/>
           <p:cNvSpPr/>
           <p:nvPr/>
         </p:nvSpPr>
@@ -4697,7 +4697,7 @@
       </p:sp>
       <p:sp>
         <p:nvSpPr>
-          <p:cNvPr id="35" name="S10-mark371"/>
+          <p:cNvPr id="35" name="S10-mark367"/>
           <p:cNvSpPr/>
           <p:nvPr/>
         </p:nvSpPr>
@@ -4720,7 +4720,7 @@
       </p:sp>
       <p:sp>
         <p:nvSpPr>
-          <p:cNvPr id="36" name="S10-mark372"/>
+          <p:cNvPr id="36" name="S10-mark368"/>
           <p:cNvSpPr/>
           <p:nvPr/>
         </p:nvSpPr>
@@ -4743,7 +4743,7 @@
       </p:sp>
       <p:sp>
         <p:nvSpPr>
-          <p:cNvPr id="37" name="S10-mark373"/>
+          <p:cNvPr id="37" name="S10-mark369"/>
           <p:cNvSpPr/>
           <p:nvPr/>
         </p:nvSpPr>
@@ -4766,7 +4766,7 @@
       </p:sp>
       <p:sp>
         <p:nvSpPr>
-          <p:cNvPr id="38" name="S10-mark374"/>
+          <p:cNvPr id="38" name="S10-mark370"/>
           <p:cNvSpPr/>
           <p:nvPr/>
         </p:nvSpPr>
@@ -4789,7 +4789,7 @@
       </p:sp>
       <p:sp>
         <p:nvSpPr>
-          <p:cNvPr id="39" name="S10-figure375" descr="나: 깃대가 오른쪽을 향하고 깃발이 아래쪽을 가리킴"/>
+          <p:cNvPr id="39" name="S10-figure371" descr="나: 깃대가 오른쪽을 향하고 깃발이 아래쪽을 가리킴"/>
           <p:cNvSpPr/>
           <p:nvPr/>
         </p:nvSpPr>
@@ -4839,7 +4839,7 @@
       </p:sp>
       <p:sp>
         <p:nvSpPr>
-          <p:cNvPr id="40" name="S10-label376"/>
+          <p:cNvPr id="40" name="S10-label372"/>
           <p:cNvSpPr txBox="1"/>
           <p:nvPr/>
         </p:nvSpPr>
@@ -4878,7 +4878,7 @@
       </p:sp>
       <p:sp>
         <p:nvSpPr>
-          <p:cNvPr id="41" name="S10-chip377"/>
+          <p:cNvPr id="41" name="S10-chip373"/>
           <p:cNvSpPr txBox="1"/>
           <p:nvPr/>
         </p:nvSpPr>
@@ -4925,7 +4925,7 @@
       </p:sp>
       <p:sp>
         <p:nvSpPr>
-          <p:cNvPr id="42" name="S10-mark378"/>
+          <p:cNvPr id="42" name="S10-mark374"/>
           <p:cNvSpPr/>
           <p:nvPr/>
         </p:nvSpPr>
@@ -4972,7 +4972,7 @@
       </p:sp>
       <p:sp>
         <p:nvSpPr>
-          <p:cNvPr id="43" name="S10-mark379"/>
+          <p:cNvPr id="43" name="S10-mark375"/>
           <p:cNvSpPr/>
           <p:nvPr/>
         </p:nvSpPr>
@@ -4995,7 +4995,7 @@
       </p:sp>
       <p:sp>
         <p:nvSpPr>
-          <p:cNvPr id="44" name="S10-mark380"/>
+          <p:cNvPr id="44" name="S10-mark376"/>
           <p:cNvSpPr/>
           <p:nvPr/>
         </p:nvSpPr>
@@ -5018,7 +5018,7 @@
       </p:sp>
       <p:sp>
         <p:nvSpPr>
-          <p:cNvPr id="45" name="S10-mark381"/>
+          <p:cNvPr id="45" name="S10-mark377"/>
           <p:cNvSpPr/>
           <p:nvPr/>
         </p:nvSpPr>
@@ -5041,7 +5041,7 @@
       </p:sp>
       <p:sp>
         <p:nvSpPr>
-          <p:cNvPr id="46" name="S10-mark382"/>
+          <p:cNvPr id="46" name="S10-mark378"/>
           <p:cNvSpPr/>
           <p:nvPr/>
         </p:nvSpPr>
@@ -5064,7 +5064,7 @@
       </p:sp>
       <p:sp>
         <p:nvSpPr>
-          <p:cNvPr id="47" name="S10-mark383"/>
+          <p:cNvPr id="47" name="S10-mark379"/>
           <p:cNvSpPr/>
           <p:nvPr/>
         </p:nvSpPr>
@@ -5087,7 +5087,7 @@
       </p:sp>
       <p:sp>
         <p:nvSpPr>
-          <p:cNvPr id="48" name="S10-mark384"/>
+          <p:cNvPr id="48" name="S10-mark380"/>
           <p:cNvSpPr/>
           <p:nvPr/>
         </p:nvSpPr>
@@ -5110,7 +5110,7 @@
       </p:sp>
       <p:sp>
         <p:nvSpPr>
-          <p:cNvPr id="49" name="S10-mark385"/>
+          <p:cNvPr id="49" name="S10-mark381"/>
           <p:cNvSpPr/>
           <p:nvPr/>
         </p:nvSpPr>
@@ -5133,7 +5133,7 @@
       </p:sp>
       <p:sp>
         <p:nvSpPr>
-          <p:cNvPr id="50" name="S10-mark386"/>
+          <p:cNvPr id="50" name="S10-mark382"/>
           <p:cNvSpPr/>
           <p:nvPr/>
         </p:nvSpPr>
@@ -5156,7 +5156,7 @@
       </p:sp>
       <p:sp>
         <p:nvSpPr>
-          <p:cNvPr id="51" name="S10-figure387" descr="다: 깃대가 아래를 향하고 깃발이 왼쪽을 가리킴"/>
+          <p:cNvPr id="51" name="S10-figure383" descr="다: 깃대가 아래를 향하고 깃발이 왼쪽을 가리킴"/>
           <p:cNvSpPr/>
           <p:nvPr/>
         </p:nvSpPr>
@@ -5206,7 +5206,7 @@
       </p:sp>
       <p:sp>
         <p:nvSpPr>
-          <p:cNvPr id="52" name="S10-label388"/>
+          <p:cNvPr id="52" name="S10-label384"/>
           <p:cNvSpPr txBox="1"/>
           <p:nvPr/>
         </p:nvSpPr>
@@ -5359,7 +5359,7 @@
       </p:sp>
       <p:sp>
         <p:nvSpPr>
-          <p:cNvPr id="3" name="S11-text389"/>
+          <p:cNvPr id="3" name="S11-text385"/>
           <p:cNvSpPr txBox="1"/>
           <p:nvPr/>
         </p:nvSpPr>
@@ -5398,13 +5398,13 @@
       </p:sp>
       <p:sp>
         <p:nvSpPr>
-          <p:cNvPr id="4" name="S11-mark390"/>
-          <p:cNvSpPr/>
-          <p:nvPr/>
-        </p:nvSpPr>
-        <p:spPr>
-          <a:xfrm>
-            <a:off x="6738801" y="3004784"/>
+          <p:cNvPr id="4" name="S11-mark386"/>
+          <p:cNvSpPr/>
+          <p:nvPr/>
+        </p:nvSpPr>
+        <p:spPr>
+          <a:xfrm>
+            <a:off x="6738801" y="2819781"/>
             <a:ext cx="1110016" cy="740011"/>
           </a:xfrm>
           <a:custGeom>
@@ -5445,13 +5445,13 @@
       </p:sp>
       <p:sp>
         <p:nvSpPr>
-          <p:cNvPr id="5" name="S11-mark391"/>
-          <p:cNvSpPr/>
-          <p:nvPr/>
-        </p:nvSpPr>
-        <p:spPr>
-          <a:xfrm>
-            <a:off x="8588829" y="3004784"/>
+          <p:cNvPr id="5" name="S11-mark387"/>
+          <p:cNvSpPr/>
+          <p:nvPr/>
+        </p:nvSpPr>
+        <p:spPr>
+          <a:xfrm>
+            <a:off x="8588829" y="2819781"/>
             <a:ext cx="1110016" cy="740011"/>
           </a:xfrm>
           <a:custGeom>
@@ -5492,13 +5492,13 @@
       </p:sp>
       <p:sp>
         <p:nvSpPr>
-          <p:cNvPr id="6" name="S11-mark392"/>
-          <p:cNvSpPr/>
-          <p:nvPr/>
-        </p:nvSpPr>
-        <p:spPr>
-          <a:xfrm>
-            <a:off x="10068850" y="3004784"/>
+          <p:cNvPr id="6" name="S11-mark388"/>
+          <p:cNvSpPr/>
+          <p:nvPr/>
+        </p:nvSpPr>
+        <p:spPr>
+          <a:xfrm>
+            <a:off x="10068850" y="2819781"/>
             <a:ext cx="1110016" cy="740011"/>
           </a:xfrm>
           <a:custGeom>
@@ -5539,13 +5539,13 @@
       </p:sp>
       <p:sp>
         <p:nvSpPr>
-          <p:cNvPr id="7" name="S11-mark393"/>
-          <p:cNvSpPr/>
-          <p:nvPr/>
-        </p:nvSpPr>
-        <p:spPr>
-          <a:xfrm>
-            <a:off x="7108807" y="4484805"/>
+          <p:cNvPr id="7" name="S11-mark389"/>
+          <p:cNvSpPr/>
+          <p:nvPr/>
+        </p:nvSpPr>
+        <p:spPr>
+          <a:xfrm>
+            <a:off x="7108807" y="4299803"/>
             <a:ext cx="740011" cy="1110016"/>
           </a:xfrm>
           <a:custGeom>
@@ -5586,13 +5586,13 @@
       </p:sp>
       <p:sp>
         <p:nvSpPr>
-          <p:cNvPr id="8" name="S11-mark394"/>
-          <p:cNvSpPr/>
-          <p:nvPr/>
-        </p:nvSpPr>
-        <p:spPr>
-          <a:xfrm>
-            <a:off x="8958834" y="4484805"/>
+          <p:cNvPr id="8" name="S11-mark390"/>
+          <p:cNvSpPr/>
+          <p:nvPr/>
+        </p:nvSpPr>
+        <p:spPr>
+          <a:xfrm>
+            <a:off x="8958834" y="4299803"/>
             <a:ext cx="1110016" cy="740011"/>
           </a:xfrm>
           <a:custGeom>
@@ -5633,358 +5633,358 @@
       </p:sp>
       <p:sp>
         <p:nvSpPr>
-          <p:cNvPr id="9" name="S11-mark395"/>
+          <p:cNvPr id="9" name="S11-mark391"/>
           <p:cNvSpPr/>
           <p:nvPr/>
         </p:nvSpPr>
         <p:spPr>
           <a:xfrm flipV="1">
-            <a:off x="6368796" y="2264773"/>
-            <a:ext cx="0" cy="3700054"/>
-          </a:xfrm>
-          <a:prstGeom prst="line">
-            <a:avLst/>
-          </a:prstGeom>
-          <a:noFill/>
-          <a:ln w="9525">
-            <a:solidFill>
-              <a:srgbClr val="B8C2CC"/>
-            </a:solidFill>
-            <a:prstDash val="solid"/>
-          </a:ln>
-        </p:spPr>
-      </p:sp>
-      <p:sp>
-        <p:nvSpPr>
-          <p:cNvPr id="10" name="S11-mark396"/>
+            <a:off x="6368796" y="2449776"/>
+            <a:ext cx="0" cy="3330049"/>
+          </a:xfrm>
+          <a:prstGeom prst="line">
+            <a:avLst/>
+          </a:prstGeom>
+          <a:noFill/>
+          <a:ln w="9525">
+            <a:solidFill>
+              <a:srgbClr val="B8C2CC"/>
+            </a:solidFill>
+            <a:prstDash val="solid"/>
+          </a:ln>
+        </p:spPr>
+      </p:sp>
+      <p:sp>
+        <p:nvSpPr>
+          <p:cNvPr id="10" name="S11-mark392"/>
           <p:cNvSpPr/>
           <p:nvPr/>
         </p:nvSpPr>
         <p:spPr>
           <a:xfrm flipV="1">
-            <a:off x="6738801" y="2264773"/>
-            <a:ext cx="0" cy="3700054"/>
-          </a:xfrm>
-          <a:prstGeom prst="line">
-            <a:avLst/>
-          </a:prstGeom>
-          <a:noFill/>
-          <a:ln w="9525">
-            <a:solidFill>
-              <a:srgbClr val="B8C2CC"/>
-            </a:solidFill>
-            <a:prstDash val="solid"/>
-          </a:ln>
-        </p:spPr>
-      </p:sp>
-      <p:sp>
-        <p:nvSpPr>
-          <p:cNvPr id="11" name="S11-mark397"/>
+            <a:off x="6738801" y="2449776"/>
+            <a:ext cx="0" cy="3330049"/>
+          </a:xfrm>
+          <a:prstGeom prst="line">
+            <a:avLst/>
+          </a:prstGeom>
+          <a:noFill/>
+          <a:ln w="9525">
+            <a:solidFill>
+              <a:srgbClr val="B8C2CC"/>
+            </a:solidFill>
+            <a:prstDash val="solid"/>
+          </a:ln>
+        </p:spPr>
+      </p:sp>
+      <p:sp>
+        <p:nvSpPr>
+          <p:cNvPr id="11" name="S11-mark393"/>
           <p:cNvSpPr/>
           <p:nvPr/>
         </p:nvSpPr>
         <p:spPr>
           <a:xfrm flipV="1">
-            <a:off x="7108807" y="2264773"/>
-            <a:ext cx="0" cy="3700054"/>
-          </a:xfrm>
-          <a:prstGeom prst="line">
-            <a:avLst/>
-          </a:prstGeom>
-          <a:noFill/>
-          <a:ln w="9525">
-            <a:solidFill>
-              <a:srgbClr val="B8C2CC"/>
-            </a:solidFill>
-            <a:prstDash val="solid"/>
-          </a:ln>
-        </p:spPr>
-      </p:sp>
-      <p:sp>
-        <p:nvSpPr>
-          <p:cNvPr id="12" name="S11-mark398"/>
+            <a:off x="7108807" y="2449776"/>
+            <a:ext cx="0" cy="3330049"/>
+          </a:xfrm>
+          <a:prstGeom prst="line">
+            <a:avLst/>
+          </a:prstGeom>
+          <a:noFill/>
+          <a:ln w="9525">
+            <a:solidFill>
+              <a:srgbClr val="B8C2CC"/>
+            </a:solidFill>
+            <a:prstDash val="solid"/>
+          </a:ln>
+        </p:spPr>
+      </p:sp>
+      <p:sp>
+        <p:nvSpPr>
+          <p:cNvPr id="12" name="S11-mark394"/>
           <p:cNvSpPr/>
           <p:nvPr/>
         </p:nvSpPr>
         <p:spPr>
           <a:xfrm flipV="1">
-            <a:off x="7478812" y="2264773"/>
-            <a:ext cx="0" cy="3700054"/>
-          </a:xfrm>
-          <a:prstGeom prst="line">
-            <a:avLst/>
-          </a:prstGeom>
-          <a:noFill/>
-          <a:ln w="9525">
-            <a:solidFill>
-              <a:srgbClr val="B8C2CC"/>
-            </a:solidFill>
-            <a:prstDash val="solid"/>
-          </a:ln>
-        </p:spPr>
-      </p:sp>
-      <p:sp>
-        <p:nvSpPr>
-          <p:cNvPr id="13" name="S11-mark399"/>
+            <a:off x="7478812" y="2449776"/>
+            <a:ext cx="0" cy="3330049"/>
+          </a:xfrm>
+          <a:prstGeom prst="line">
+            <a:avLst/>
+          </a:prstGeom>
+          <a:noFill/>
+          <a:ln w="9525">
+            <a:solidFill>
+              <a:srgbClr val="B8C2CC"/>
+            </a:solidFill>
+            <a:prstDash val="solid"/>
+          </a:ln>
+        </p:spPr>
+      </p:sp>
+      <p:sp>
+        <p:nvSpPr>
+          <p:cNvPr id="13" name="S11-mark395"/>
           <p:cNvSpPr/>
           <p:nvPr/>
         </p:nvSpPr>
         <p:spPr>
           <a:xfrm flipV="1">
-            <a:off x="7848818" y="2264773"/>
-            <a:ext cx="0" cy="3700054"/>
-          </a:xfrm>
-          <a:prstGeom prst="line">
-            <a:avLst/>
-          </a:prstGeom>
-          <a:noFill/>
-          <a:ln w="9525">
-            <a:solidFill>
-              <a:srgbClr val="B8C2CC"/>
-            </a:solidFill>
-            <a:prstDash val="solid"/>
-          </a:ln>
-        </p:spPr>
-      </p:sp>
-      <p:sp>
-        <p:nvSpPr>
-          <p:cNvPr id="14" name="S11-mark400"/>
+            <a:off x="7848818" y="2449776"/>
+            <a:ext cx="0" cy="3330049"/>
+          </a:xfrm>
+          <a:prstGeom prst="line">
+            <a:avLst/>
+          </a:prstGeom>
+          <a:noFill/>
+          <a:ln w="9525">
+            <a:solidFill>
+              <a:srgbClr val="B8C2CC"/>
+            </a:solidFill>
+            <a:prstDash val="solid"/>
+          </a:ln>
+        </p:spPr>
+      </p:sp>
+      <p:sp>
+        <p:nvSpPr>
+          <p:cNvPr id="14" name="S11-mark396"/>
           <p:cNvSpPr/>
           <p:nvPr/>
         </p:nvSpPr>
         <p:spPr>
           <a:xfrm flipV="1">
-            <a:off x="8218823" y="2264773"/>
-            <a:ext cx="0" cy="3700054"/>
-          </a:xfrm>
-          <a:prstGeom prst="line">
-            <a:avLst/>
-          </a:prstGeom>
-          <a:noFill/>
-          <a:ln w="9525">
-            <a:solidFill>
-              <a:srgbClr val="B8C2CC"/>
-            </a:solidFill>
-            <a:prstDash val="solid"/>
-          </a:ln>
-        </p:spPr>
-      </p:sp>
-      <p:sp>
-        <p:nvSpPr>
-          <p:cNvPr id="15" name="S11-mark401"/>
+            <a:off x="8218823" y="2449776"/>
+            <a:ext cx="0" cy="3330049"/>
+          </a:xfrm>
+          <a:prstGeom prst="line">
+            <a:avLst/>
+          </a:prstGeom>
+          <a:noFill/>
+          <a:ln w="9525">
+            <a:solidFill>
+              <a:srgbClr val="B8C2CC"/>
+            </a:solidFill>
+            <a:prstDash val="solid"/>
+          </a:ln>
+        </p:spPr>
+      </p:sp>
+      <p:sp>
+        <p:nvSpPr>
+          <p:cNvPr id="15" name="S11-mark397"/>
           <p:cNvSpPr/>
           <p:nvPr/>
         </p:nvSpPr>
         <p:spPr>
           <a:xfrm flipV="1">
-            <a:off x="8588829" y="2264773"/>
-            <a:ext cx="0" cy="3700054"/>
-          </a:xfrm>
-          <a:prstGeom prst="line">
-            <a:avLst/>
-          </a:prstGeom>
-          <a:noFill/>
-          <a:ln w="9525">
-            <a:solidFill>
-              <a:srgbClr val="B8C2CC"/>
-            </a:solidFill>
-            <a:prstDash val="solid"/>
-          </a:ln>
-        </p:spPr>
-      </p:sp>
-      <p:sp>
-        <p:nvSpPr>
-          <p:cNvPr id="16" name="S11-mark402"/>
+            <a:off x="8588829" y="2449776"/>
+            <a:ext cx="0" cy="3330049"/>
+          </a:xfrm>
+          <a:prstGeom prst="line">
+            <a:avLst/>
+          </a:prstGeom>
+          <a:noFill/>
+          <a:ln w="9525">
+            <a:solidFill>
+              <a:srgbClr val="B8C2CC"/>
+            </a:solidFill>
+            <a:prstDash val="solid"/>
+          </a:ln>
+        </p:spPr>
+      </p:sp>
+      <p:sp>
+        <p:nvSpPr>
+          <p:cNvPr id="16" name="S11-mark398"/>
           <p:cNvSpPr/>
           <p:nvPr/>
         </p:nvSpPr>
         <p:spPr>
           <a:xfrm flipV="1">
-            <a:off x="8958834" y="2264773"/>
-            <a:ext cx="0" cy="3700054"/>
-          </a:xfrm>
-          <a:prstGeom prst="line">
-            <a:avLst/>
-          </a:prstGeom>
-          <a:noFill/>
-          <a:ln w="9525">
-            <a:solidFill>
-              <a:srgbClr val="B8C2CC"/>
-            </a:solidFill>
-            <a:prstDash val="solid"/>
-          </a:ln>
-        </p:spPr>
-      </p:sp>
-      <p:sp>
-        <p:nvSpPr>
-          <p:cNvPr id="17" name="S11-mark403"/>
+            <a:off x="8958834" y="2449776"/>
+            <a:ext cx="0" cy="3330049"/>
+          </a:xfrm>
+          <a:prstGeom prst="line">
+            <a:avLst/>
+          </a:prstGeom>
+          <a:noFill/>
+          <a:ln w="9525">
+            <a:solidFill>
+              <a:srgbClr val="B8C2CC"/>
+            </a:solidFill>
+            <a:prstDash val="solid"/>
+          </a:ln>
+        </p:spPr>
+      </p:sp>
+      <p:sp>
+        <p:nvSpPr>
+          <p:cNvPr id="17" name="S11-mark399"/>
           <p:cNvSpPr/>
           <p:nvPr/>
         </p:nvSpPr>
         <p:spPr>
           <a:xfrm flipV="1">
-            <a:off x="9328839" y="2264773"/>
-            <a:ext cx="0" cy="3700054"/>
-          </a:xfrm>
-          <a:prstGeom prst="line">
-            <a:avLst/>
-          </a:prstGeom>
-          <a:noFill/>
-          <a:ln w="9525">
-            <a:solidFill>
-              <a:srgbClr val="B8C2CC"/>
-            </a:solidFill>
-            <a:prstDash val="solid"/>
-          </a:ln>
-        </p:spPr>
-      </p:sp>
-      <p:sp>
-        <p:nvSpPr>
-          <p:cNvPr id="18" name="S11-mark404"/>
+            <a:off x="9328839" y="2449776"/>
+            <a:ext cx="0" cy="3330049"/>
+          </a:xfrm>
+          <a:prstGeom prst="line">
+            <a:avLst/>
+          </a:prstGeom>
+          <a:noFill/>
+          <a:ln w="9525">
+            <a:solidFill>
+              <a:srgbClr val="B8C2CC"/>
+            </a:solidFill>
+            <a:prstDash val="solid"/>
+          </a:ln>
+        </p:spPr>
+      </p:sp>
+      <p:sp>
+        <p:nvSpPr>
+          <p:cNvPr id="18" name="S11-mark400"/>
           <p:cNvSpPr/>
           <p:nvPr/>
         </p:nvSpPr>
         <p:spPr>
           <a:xfrm flipV="1">
-            <a:off x="9698845" y="2264773"/>
-            <a:ext cx="0" cy="3700054"/>
-          </a:xfrm>
-          <a:prstGeom prst="line">
-            <a:avLst/>
-          </a:prstGeom>
-          <a:noFill/>
-          <a:ln w="9525">
-            <a:solidFill>
-              <a:srgbClr val="B8C2CC"/>
-            </a:solidFill>
-            <a:prstDash val="solid"/>
-          </a:ln>
-        </p:spPr>
-      </p:sp>
-      <p:sp>
-        <p:nvSpPr>
-          <p:cNvPr id="19" name="S11-mark405"/>
+            <a:off x="9698845" y="2449776"/>
+            <a:ext cx="0" cy="3330049"/>
+          </a:xfrm>
+          <a:prstGeom prst="line">
+            <a:avLst/>
+          </a:prstGeom>
+          <a:noFill/>
+          <a:ln w="9525">
+            <a:solidFill>
+              <a:srgbClr val="B8C2CC"/>
+            </a:solidFill>
+            <a:prstDash val="solid"/>
+          </a:ln>
+        </p:spPr>
+      </p:sp>
+      <p:sp>
+        <p:nvSpPr>
+          <p:cNvPr id="19" name="S11-mark401"/>
           <p:cNvSpPr/>
           <p:nvPr/>
         </p:nvSpPr>
         <p:spPr>
           <a:xfrm flipV="1">
-            <a:off x="10068850" y="2264773"/>
-            <a:ext cx="0" cy="3700054"/>
-          </a:xfrm>
-          <a:prstGeom prst="line">
-            <a:avLst/>
-          </a:prstGeom>
-          <a:noFill/>
-          <a:ln w="9525">
-            <a:solidFill>
-              <a:srgbClr val="B8C2CC"/>
-            </a:solidFill>
-            <a:prstDash val="solid"/>
-          </a:ln>
-        </p:spPr>
-      </p:sp>
-      <p:sp>
-        <p:nvSpPr>
-          <p:cNvPr id="20" name="S11-mark406"/>
+            <a:off x="10068850" y="2449776"/>
+            <a:ext cx="0" cy="3330049"/>
+          </a:xfrm>
+          <a:prstGeom prst="line">
+            <a:avLst/>
+          </a:prstGeom>
+          <a:noFill/>
+          <a:ln w="9525">
+            <a:solidFill>
+              <a:srgbClr val="B8C2CC"/>
+            </a:solidFill>
+            <a:prstDash val="solid"/>
+          </a:ln>
+        </p:spPr>
+      </p:sp>
+      <p:sp>
+        <p:nvSpPr>
+          <p:cNvPr id="20" name="S11-mark402"/>
           <p:cNvSpPr/>
           <p:nvPr/>
         </p:nvSpPr>
         <p:spPr>
           <a:xfrm flipV="1">
-            <a:off x="10438856" y="2264773"/>
-            <a:ext cx="0" cy="3700054"/>
-          </a:xfrm>
-          <a:prstGeom prst="line">
-            <a:avLst/>
-          </a:prstGeom>
-          <a:noFill/>
-          <a:ln w="9525">
-            <a:solidFill>
-              <a:srgbClr val="B8C2CC"/>
-            </a:solidFill>
-            <a:prstDash val="solid"/>
-          </a:ln>
-        </p:spPr>
-      </p:sp>
-      <p:sp>
-        <p:nvSpPr>
-          <p:cNvPr id="21" name="S11-mark407"/>
+            <a:off x="10438856" y="2449776"/>
+            <a:ext cx="0" cy="3330049"/>
+          </a:xfrm>
+          <a:prstGeom prst="line">
+            <a:avLst/>
+          </a:prstGeom>
+          <a:noFill/>
+          <a:ln w="9525">
+            <a:solidFill>
+              <a:srgbClr val="B8C2CC"/>
+            </a:solidFill>
+            <a:prstDash val="solid"/>
+          </a:ln>
+        </p:spPr>
+      </p:sp>
+      <p:sp>
+        <p:nvSpPr>
+          <p:cNvPr id="21" name="S11-mark403"/>
           <p:cNvSpPr/>
           <p:nvPr/>
         </p:nvSpPr>
         <p:spPr>
           <a:xfrm flipV="1">
-            <a:off x="10808861" y="2264773"/>
-            <a:ext cx="0" cy="3700054"/>
-          </a:xfrm>
-          <a:prstGeom prst="line">
-            <a:avLst/>
-          </a:prstGeom>
-          <a:noFill/>
-          <a:ln w="9525">
-            <a:solidFill>
-              <a:srgbClr val="B8C2CC"/>
-            </a:solidFill>
-            <a:prstDash val="solid"/>
-          </a:ln>
-        </p:spPr>
-      </p:sp>
-      <p:sp>
-        <p:nvSpPr>
-          <p:cNvPr id="22" name="S11-mark408"/>
+            <a:off x="10808861" y="2449776"/>
+            <a:ext cx="0" cy="3330049"/>
+          </a:xfrm>
+          <a:prstGeom prst="line">
+            <a:avLst/>
+          </a:prstGeom>
+          <a:noFill/>
+          <a:ln w="9525">
+            <a:solidFill>
+              <a:srgbClr val="B8C2CC"/>
+            </a:solidFill>
+            <a:prstDash val="solid"/>
+          </a:ln>
+        </p:spPr>
+      </p:sp>
+      <p:sp>
+        <p:nvSpPr>
+          <p:cNvPr id="22" name="S11-mark404"/>
           <p:cNvSpPr/>
           <p:nvPr/>
         </p:nvSpPr>
         <p:spPr>
           <a:xfrm flipV="1">
-            <a:off x="11178867" y="2264773"/>
-            <a:ext cx="0" cy="3700054"/>
-          </a:xfrm>
-          <a:prstGeom prst="line">
-            <a:avLst/>
-          </a:prstGeom>
-          <a:noFill/>
-          <a:ln w="9525">
-            <a:solidFill>
-              <a:srgbClr val="B8C2CC"/>
-            </a:solidFill>
-            <a:prstDash val="solid"/>
-          </a:ln>
-        </p:spPr>
-      </p:sp>
-      <p:sp>
-        <p:nvSpPr>
-          <p:cNvPr id="23" name="S11-mark409"/>
+            <a:off x="11178867" y="2449776"/>
+            <a:ext cx="0" cy="3330049"/>
+          </a:xfrm>
+          <a:prstGeom prst="line">
+            <a:avLst/>
+          </a:prstGeom>
+          <a:noFill/>
+          <a:ln w="9525">
+            <a:solidFill>
+              <a:srgbClr val="B8C2CC"/>
+            </a:solidFill>
+            <a:prstDash val="solid"/>
+          </a:ln>
+        </p:spPr>
+      </p:sp>
+      <p:sp>
+        <p:nvSpPr>
+          <p:cNvPr id="23" name="S11-mark405"/>
           <p:cNvSpPr/>
           <p:nvPr/>
         </p:nvSpPr>
         <p:spPr>
           <a:xfrm flipV="1">
-            <a:off x="11548872" y="2264773"/>
-            <a:ext cx="0" cy="3700054"/>
-          </a:xfrm>
-          <a:prstGeom prst="line">
-            <a:avLst/>
-          </a:prstGeom>
-          <a:noFill/>
-          <a:ln w="9525">
-            <a:solidFill>
-              <a:srgbClr val="B8C2CC"/>
-            </a:solidFill>
-            <a:prstDash val="solid"/>
-          </a:ln>
-        </p:spPr>
-      </p:sp>
-      <p:sp>
-        <p:nvSpPr>
-          <p:cNvPr id="24" name="S11-mark410"/>
-          <p:cNvSpPr/>
-          <p:nvPr/>
-        </p:nvSpPr>
-        <p:spPr>
-          <a:xfrm>
-            <a:off x="6368796" y="5964827"/>
+            <a:off x="11548872" y="2449776"/>
+            <a:ext cx="0" cy="3330049"/>
+          </a:xfrm>
+          <a:prstGeom prst="line">
+            <a:avLst/>
+          </a:prstGeom>
+          <a:noFill/>
+          <a:ln w="9525">
+            <a:solidFill>
+              <a:srgbClr val="B8C2CC"/>
+            </a:solidFill>
+            <a:prstDash val="solid"/>
+          </a:ln>
+        </p:spPr>
+      </p:sp>
+      <p:sp>
+        <p:nvSpPr>
+          <p:cNvPr id="24" name="S11-mark406"/>
+          <p:cNvSpPr/>
+          <p:nvPr/>
+        </p:nvSpPr>
+        <p:spPr>
+          <a:xfrm>
+            <a:off x="6368796" y="5779824"/>
             <a:ext cx="5180076" cy="0"/>
           </a:xfrm>
           <a:prstGeom prst="line">
@@ -6001,13 +6001,13 @@
       </p:sp>
       <p:sp>
         <p:nvSpPr>
-          <p:cNvPr id="25" name="S11-mark411"/>
-          <p:cNvSpPr/>
-          <p:nvPr/>
-        </p:nvSpPr>
-        <p:spPr>
-          <a:xfrm>
-            <a:off x="6368796" y="5594822"/>
+          <p:cNvPr id="25" name="S11-mark407"/>
+          <p:cNvSpPr/>
+          <p:nvPr/>
+        </p:nvSpPr>
+        <p:spPr>
+          <a:xfrm>
+            <a:off x="6368796" y="5409819"/>
             <a:ext cx="5180076" cy="0"/>
           </a:xfrm>
           <a:prstGeom prst="line">
@@ -6024,13 +6024,13 @@
       </p:sp>
       <p:sp>
         <p:nvSpPr>
-          <p:cNvPr id="26" name="S11-mark412"/>
-          <p:cNvSpPr/>
-          <p:nvPr/>
-        </p:nvSpPr>
-        <p:spPr>
-          <a:xfrm>
-            <a:off x="6368796" y="5224816"/>
+          <p:cNvPr id="26" name="S11-mark408"/>
+          <p:cNvSpPr/>
+          <p:nvPr/>
+        </p:nvSpPr>
+        <p:spPr>
+          <a:xfrm>
+            <a:off x="6368796" y="5039814"/>
             <a:ext cx="5180076" cy="0"/>
           </a:xfrm>
           <a:prstGeom prst="line">
@@ -6047,13 +6047,13 @@
       </p:sp>
       <p:sp>
         <p:nvSpPr>
-          <p:cNvPr id="27" name="S11-mark413"/>
-          <p:cNvSpPr/>
-          <p:nvPr/>
-        </p:nvSpPr>
-        <p:spPr>
-          <a:xfrm>
-            <a:off x="6368796" y="4854811"/>
+          <p:cNvPr id="27" name="S11-mark409"/>
+          <p:cNvSpPr/>
+          <p:nvPr/>
+        </p:nvSpPr>
+        <p:spPr>
+          <a:xfrm>
+            <a:off x="6368796" y="4669808"/>
             <a:ext cx="5180076" cy="0"/>
           </a:xfrm>
           <a:prstGeom prst="line">
@@ -6070,13 +6070,13 @@
       </p:sp>
       <p:sp>
         <p:nvSpPr>
-          <p:cNvPr id="28" name="S11-mark414"/>
-          <p:cNvSpPr/>
-          <p:nvPr/>
-        </p:nvSpPr>
-        <p:spPr>
-          <a:xfrm>
-            <a:off x="6368796" y="4484805"/>
+          <p:cNvPr id="28" name="S11-mark410"/>
+          <p:cNvSpPr/>
+          <p:nvPr/>
+        </p:nvSpPr>
+        <p:spPr>
+          <a:xfrm>
+            <a:off x="6368796" y="4299803"/>
             <a:ext cx="5180076" cy="0"/>
           </a:xfrm>
           <a:prstGeom prst="line">
@@ -6093,13 +6093,13 @@
       </p:sp>
       <p:sp>
         <p:nvSpPr>
-          <p:cNvPr id="29" name="S11-mark415"/>
-          <p:cNvSpPr/>
-          <p:nvPr/>
-        </p:nvSpPr>
-        <p:spPr>
-          <a:xfrm>
-            <a:off x="6368796" y="4114800"/>
+          <p:cNvPr id="29" name="S11-mark411"/>
+          <p:cNvSpPr/>
+          <p:nvPr/>
+        </p:nvSpPr>
+        <p:spPr>
+          <a:xfrm>
+            <a:off x="6368796" y="3929797"/>
             <a:ext cx="5180076" cy="0"/>
           </a:xfrm>
           <a:prstGeom prst="line">
@@ -6116,13 +6116,13 @@
       </p:sp>
       <p:sp>
         <p:nvSpPr>
-          <p:cNvPr id="30" name="S11-mark416"/>
-          <p:cNvSpPr/>
-          <p:nvPr/>
-        </p:nvSpPr>
-        <p:spPr>
-          <a:xfrm>
-            <a:off x="6368796" y="3744795"/>
+          <p:cNvPr id="30" name="S11-mark412"/>
+          <p:cNvSpPr/>
+          <p:nvPr/>
+        </p:nvSpPr>
+        <p:spPr>
+          <a:xfrm>
+            <a:off x="6368796" y="3559792"/>
             <a:ext cx="5180076" cy="0"/>
           </a:xfrm>
           <a:prstGeom prst="line">
@@ -6139,13 +6139,13 @@
       </p:sp>
       <p:sp>
         <p:nvSpPr>
-          <p:cNvPr id="31" name="S11-mark417"/>
-          <p:cNvSpPr/>
-          <p:nvPr/>
-        </p:nvSpPr>
-        <p:spPr>
-          <a:xfrm>
-            <a:off x="6368796" y="3374789"/>
+          <p:cNvPr id="31" name="S11-mark413"/>
+          <p:cNvSpPr/>
+          <p:nvPr/>
+        </p:nvSpPr>
+        <p:spPr>
+          <a:xfrm>
+            <a:off x="6368796" y="3189786"/>
             <a:ext cx="5180076" cy="0"/>
           </a:xfrm>
           <a:prstGeom prst="line">
@@ -6162,13 +6162,13 @@
       </p:sp>
       <p:sp>
         <p:nvSpPr>
-          <p:cNvPr id="32" name="S11-mark418"/>
-          <p:cNvSpPr/>
-          <p:nvPr/>
-        </p:nvSpPr>
-        <p:spPr>
-          <a:xfrm>
-            <a:off x="6368796" y="3004784"/>
+          <p:cNvPr id="32" name="S11-mark414"/>
+          <p:cNvSpPr/>
+          <p:nvPr/>
+        </p:nvSpPr>
+        <p:spPr>
+          <a:xfrm>
+            <a:off x="6368796" y="2819781"/>
             <a:ext cx="5180076" cy="0"/>
           </a:xfrm>
           <a:prstGeom prst="line">
@@ -6185,13 +6185,13 @@
       </p:sp>
       <p:sp>
         <p:nvSpPr>
-          <p:cNvPr id="33" name="S11-mark419"/>
-          <p:cNvSpPr/>
-          <p:nvPr/>
-        </p:nvSpPr>
-        <p:spPr>
-          <a:xfrm>
-            <a:off x="6368796" y="2634778"/>
+          <p:cNvPr id="33" name="S11-mark415"/>
+          <p:cNvSpPr/>
+          <p:nvPr/>
+        </p:nvSpPr>
+        <p:spPr>
+          <a:xfrm>
+            <a:off x="6368796" y="2449776"/>
             <a:ext cx="5180076" cy="0"/>
           </a:xfrm>
           <a:prstGeom prst="line">
@@ -6208,36 +6208,13 @@
       </p:sp>
       <p:sp>
         <p:nvSpPr>
-          <p:cNvPr id="34" name="S11-mark420"/>
-          <p:cNvSpPr/>
-          <p:nvPr/>
-        </p:nvSpPr>
-        <p:spPr>
-          <a:xfrm>
-            <a:off x="6368796" y="2264773"/>
-            <a:ext cx="5180076" cy="0"/>
-          </a:xfrm>
-          <a:prstGeom prst="line">
-            <a:avLst/>
-          </a:prstGeom>
-          <a:noFill/>
-          <a:ln w="9525">
-            <a:solidFill>
-              <a:srgbClr val="B8C2CC"/>
-            </a:solidFill>
-            <a:prstDash val="solid"/>
-          </a:ln>
-        </p:spPr>
-      </p:sp>
-      <p:sp>
-        <p:nvSpPr>
-          <p:cNvPr id="35" name="S11-figure421" descr="모눈 위의 ㄴ 모양 처음 도형과, 이동한 도형 가·나·다·라"/>
-          <p:cNvSpPr/>
-          <p:nvPr/>
-        </p:nvSpPr>
-        <p:spPr>
-          <a:xfrm>
-            <a:off x="6738801" y="3004784"/>
+          <p:cNvPr id="34" name="S11-figure416" descr="모눈 위의 ㄴ 모양 처음 도형과, 이동한 도형 가·나·다·라"/>
+          <p:cNvSpPr/>
+          <p:nvPr/>
+        </p:nvSpPr>
+        <p:spPr>
+          <a:xfrm>
+            <a:off x="6738801" y="2819781"/>
             <a:ext cx="1110016" cy="740011"/>
           </a:xfrm>
           <a:custGeom>
@@ -6281,13 +6258,13 @@
       </p:sp>
       <p:sp>
         <p:nvSpPr>
-          <p:cNvPr id="36" name="S11-mark422"/>
-          <p:cNvSpPr/>
-          <p:nvPr/>
-        </p:nvSpPr>
-        <p:spPr>
-          <a:xfrm>
-            <a:off x="8588829" y="3004784"/>
+          <p:cNvPr id="35" name="S11-mark417"/>
+          <p:cNvSpPr/>
+          <p:nvPr/>
+        </p:nvSpPr>
+        <p:spPr>
+          <a:xfrm>
+            <a:off x="8588829" y="2819781"/>
             <a:ext cx="1110016" cy="740011"/>
           </a:xfrm>
           <a:custGeom>
@@ -6331,13 +6308,13 @@
       </p:sp>
       <p:sp>
         <p:nvSpPr>
-          <p:cNvPr id="37" name="S11-mark423"/>
-          <p:cNvSpPr/>
-          <p:nvPr/>
-        </p:nvSpPr>
-        <p:spPr>
-          <a:xfrm>
-            <a:off x="10068850" y="3004784"/>
+          <p:cNvPr id="36" name="S11-mark418"/>
+          <p:cNvSpPr/>
+          <p:nvPr/>
+        </p:nvSpPr>
+        <p:spPr>
+          <a:xfrm>
+            <a:off x="10068850" y="2819781"/>
             <a:ext cx="1110016" cy="740011"/>
           </a:xfrm>
           <a:custGeom>
@@ -6381,13 +6358,13 @@
       </p:sp>
       <p:sp>
         <p:nvSpPr>
-          <p:cNvPr id="38" name="S11-mark424"/>
-          <p:cNvSpPr/>
-          <p:nvPr/>
-        </p:nvSpPr>
-        <p:spPr>
-          <a:xfrm>
-            <a:off x="7108807" y="4484805"/>
+          <p:cNvPr id="37" name="S11-mark419"/>
+          <p:cNvSpPr/>
+          <p:nvPr/>
+        </p:nvSpPr>
+        <p:spPr>
+          <a:xfrm>
+            <a:off x="7108807" y="4299803"/>
             <a:ext cx="740011" cy="1110016"/>
           </a:xfrm>
           <a:custGeom>
@@ -6431,13 +6408,13 @@
       </p:sp>
       <p:sp>
         <p:nvSpPr>
-          <p:cNvPr id="39" name="S11-mark425"/>
-          <p:cNvSpPr/>
-          <p:nvPr/>
-        </p:nvSpPr>
-        <p:spPr>
-          <a:xfrm>
-            <a:off x="8958834" y="4484805"/>
+          <p:cNvPr id="38" name="S11-mark420"/>
+          <p:cNvSpPr/>
+          <p:nvPr/>
+        </p:nvSpPr>
+        <p:spPr>
+          <a:xfrm>
+            <a:off x="8958834" y="4299803"/>
             <a:ext cx="1110016" cy="740011"/>
           </a:xfrm>
           <a:custGeom>
@@ -6481,13 +6458,13 @@
       </p:sp>
       <p:sp>
         <p:nvSpPr>
-          <p:cNvPr id="40" name="S11-label427"/>
+          <p:cNvPr id="39" name="S11-label422"/>
           <p:cNvSpPr txBox="1"/>
           <p:nvPr/>
         </p:nvSpPr>
         <p:spPr>
           <a:xfrm>
-            <a:off x="6940242" y="2592280"/>
+            <a:off x="6940242" y="2407278"/>
             <a:ext cx="707136" cy="381000"/>
           </a:xfrm>
           <a:prstGeom prst="rect">
@@ -6520,13 +6497,13 @@
       </p:sp>
       <p:sp>
         <p:nvSpPr>
-          <p:cNvPr id="41" name="S11-label429"/>
+          <p:cNvPr id="40" name="S11-label424"/>
           <p:cNvSpPr txBox="1"/>
           <p:nvPr/>
         </p:nvSpPr>
         <p:spPr>
           <a:xfrm>
-            <a:off x="8939621" y="2592280"/>
+            <a:off x="8939621" y="2407278"/>
             <a:ext cx="408432" cy="381000"/>
           </a:xfrm>
           <a:prstGeom prst="rect">
@@ -6559,13 +6536,13 @@
       </p:sp>
       <p:sp>
         <p:nvSpPr>
-          <p:cNvPr id="42" name="S11-label431"/>
+          <p:cNvPr id="41" name="S11-label426"/>
           <p:cNvSpPr txBox="1"/>
           <p:nvPr/>
         </p:nvSpPr>
         <p:spPr>
           <a:xfrm>
-            <a:off x="10419642" y="2592280"/>
+            <a:off x="10419642" y="2407278"/>
             <a:ext cx="408432" cy="381000"/>
           </a:xfrm>
           <a:prstGeom prst="rect">
@@ -6598,13 +6575,13 @@
       </p:sp>
       <p:sp>
         <p:nvSpPr>
-          <p:cNvPr id="43" name="S11-label433"/>
+          <p:cNvPr id="42" name="S11-label428"/>
           <p:cNvSpPr txBox="1"/>
           <p:nvPr/>
         </p:nvSpPr>
         <p:spPr>
           <a:xfrm>
-            <a:off x="7274596" y="4072302"/>
+            <a:off x="7274596" y="3887299"/>
             <a:ext cx="408432" cy="381000"/>
           </a:xfrm>
           <a:prstGeom prst="rect">
@@ -6637,13 +6614,13 @@
       </p:sp>
       <p:sp>
         <p:nvSpPr>
-          <p:cNvPr id="44" name="S11-label435"/>
+          <p:cNvPr id="43" name="S11-label430"/>
           <p:cNvSpPr txBox="1"/>
           <p:nvPr/>
         </p:nvSpPr>
         <p:spPr>
           <a:xfrm>
-            <a:off x="9309626" y="4072302"/>
+            <a:off x="9309626" y="3887299"/>
             <a:ext cx="408432" cy="381000"/>
           </a:xfrm>
           <a:prstGeom prst="rect">
@@ -6676,7 +6653,7 @@
       </p:sp>
       <p:sp>
         <p:nvSpPr>
-          <p:cNvPr id="45" name="S11-chip436"/>
+          <p:cNvPr id="44" name="S11-chip431"/>
           <p:cNvSpPr txBox="1"/>
           <p:nvPr/>
         </p:nvSpPr>
@@ -6723,7 +6700,7 @@
       </p:sp>
       <p:sp>
         <p:nvSpPr>
-          <p:cNvPr id="46" name="S11-text437"/>
+          <p:cNvPr id="45" name="S11-text432"/>
           <p:cNvSpPr txBox="1"/>
           <p:nvPr/>
         </p:nvSpPr>
@@ -6779,7 +6756,7 @@
       </p:sp>
       <p:sp>
         <p:nvSpPr>
-          <p:cNvPr id="47" name="S11-chip438"/>
+          <p:cNvPr id="46" name="S11-chip433"/>
           <p:cNvSpPr txBox="1"/>
           <p:nvPr/>
         </p:nvSpPr>
@@ -6826,7 +6803,7 @@
       </p:sp>
       <p:sp>
         <p:nvSpPr>
-          <p:cNvPr id="48" name="S11-text439"/>
+          <p:cNvPr id="47" name="S11-text434"/>
           <p:cNvSpPr txBox="1"/>
           <p:nvPr/>
         </p:nvSpPr>
@@ -6882,7 +6859,7 @@
       </p:sp>
       <p:sp>
         <p:nvSpPr>
-          <p:cNvPr id="49" name="S11-chip440"/>
+          <p:cNvPr id="48" name="S11-chip435"/>
           <p:cNvSpPr txBox="1"/>
           <p:nvPr/>
         </p:nvSpPr>
@@ -6929,7 +6906,7 @@
       </p:sp>
       <p:sp>
         <p:nvSpPr>
-          <p:cNvPr id="50" name="S11-text441"/>
+          <p:cNvPr id="49" name="S11-text436"/>
           <p:cNvSpPr txBox="1"/>
           <p:nvPr/>
         </p:nvSpPr>
@@ -6968,7 +6945,7 @@
       </p:sp>
       <p:sp>
         <p:nvSpPr>
-          <p:cNvPr id="51" name="S11-chip442"/>
+          <p:cNvPr id="50" name="S11-chip437"/>
           <p:cNvSpPr txBox="1"/>
           <p:nvPr/>
         </p:nvSpPr>
@@ -7015,7 +6992,7 @@
       </p:sp>
       <p:sp>
         <p:nvSpPr>
-          <p:cNvPr id="52" name="S11-text443"/>
+          <p:cNvPr id="51" name="S11-text438"/>
           <p:cNvSpPr txBox="1"/>
           <p:nvPr/>
         </p:nvSpPr>
@@ -7168,7 +7145,7 @@
       </p:sp>
       <p:sp>
         <p:nvSpPr>
-          <p:cNvPr id="3" name="S13-text444"/>
+          <p:cNvPr id="3" name="S13-text439"/>
           <p:cNvSpPr txBox="1"/>
           <p:nvPr/>
         </p:nvSpPr>
@@ -7207,7 +7184,7 @@
       </p:sp>
       <p:sp>
         <p:nvSpPr>
-          <p:cNvPr id="4" name="S13-card445"/>
+          <p:cNvPr id="4" name="S13-card440"/>
           <p:cNvSpPr/>
           <p:nvPr/>
         </p:nvSpPr>
@@ -7234,7 +7211,7 @@
       </p:sp>
       <p:sp>
         <p:nvSpPr>
-          <p:cNvPr id="5" name="S13-cardtext446"/>
+          <p:cNvPr id="5" name="S13-cardtext441"/>
           <p:cNvSpPr txBox="1"/>
           <p:nvPr/>
         </p:nvSpPr>
@@ -7276,7 +7253,7 @@
       </p:sp>
       <p:sp>
         <p:nvSpPr>
-          <p:cNvPr id="6" name="S13-chip447"/>
+          <p:cNvPr id="6" name="S13-chip442"/>
           <p:cNvSpPr txBox="1"/>
           <p:nvPr/>
         </p:nvSpPr>
@@ -7323,7 +7300,7 @@
       </p:sp>
       <p:sp>
         <p:nvSpPr>
-          <p:cNvPr id="7" name="S13-card448"/>
+          <p:cNvPr id="7" name="S13-card443"/>
           <p:cNvSpPr/>
           <p:nvPr/>
         </p:nvSpPr>
@@ -7350,7 +7327,7 @@
       </p:sp>
       <p:sp>
         <p:nvSpPr>
-          <p:cNvPr id="8" name="S13-cardtext449"/>
+          <p:cNvPr id="8" name="S13-cardtext444"/>
           <p:cNvSpPr txBox="1"/>
           <p:nvPr/>
         </p:nvSpPr>
@@ -7392,7 +7369,7 @@
       </p:sp>
       <p:sp>
         <p:nvSpPr>
-          <p:cNvPr id="9" name="S13-chip450"/>
+          <p:cNvPr id="9" name="S13-chip445"/>
           <p:cNvSpPr txBox="1"/>
           <p:nvPr/>
         </p:nvSpPr>
@@ -7439,7 +7416,7 @@
       </p:sp>
       <p:sp>
         <p:nvSpPr>
-          <p:cNvPr id="10" name="S13-card451"/>
+          <p:cNvPr id="10" name="S13-card446"/>
           <p:cNvSpPr/>
           <p:nvPr/>
         </p:nvSpPr>
@@ -7466,7 +7443,7 @@
       </p:sp>
       <p:sp>
         <p:nvSpPr>
-          <p:cNvPr id="11" name="S13-cardtext452"/>
+          <p:cNvPr id="11" name="S13-cardtext447"/>
           <p:cNvSpPr txBox="1"/>
           <p:nvPr/>
         </p:nvSpPr>
@@ -7528,7 +7505,7 @@
       </p:sp>
       <p:sp>
         <p:nvSpPr>
-          <p:cNvPr id="12" name="S13-chip453"/>
+          <p:cNvPr id="12" name="S13-chip448"/>
           <p:cNvSpPr txBox="1"/>
           <p:nvPr/>
         </p:nvSpPr>
@@ -7575,7 +7552,7 @@
       </p:sp>
       <p:sp>
         <p:nvSpPr>
-          <p:cNvPr id="13" name="S13-card454"/>
+          <p:cNvPr id="13" name="S13-card449"/>
           <p:cNvSpPr/>
           <p:nvPr/>
         </p:nvSpPr>
@@ -7602,7 +7579,7 @@
       </p:sp>
       <p:sp>
         <p:nvSpPr>
-          <p:cNvPr id="14" name="S13-cardtext455"/>
+          <p:cNvPr id="14" name="S13-cardtext450"/>
           <p:cNvSpPr txBox="1"/>
           <p:nvPr/>
         </p:nvSpPr>
@@ -7664,7 +7641,7 @@
       </p:sp>
       <p:sp>
         <p:nvSpPr>
-          <p:cNvPr id="15" name="S13-chip456"/>
+          <p:cNvPr id="15" name="S13-chip451"/>
           <p:cNvSpPr txBox="1"/>
           <p:nvPr/>
         </p:nvSpPr>
@@ -7711,7 +7688,7 @@
       </p:sp>
       <p:sp>
         <p:nvSpPr>
-          <p:cNvPr id="16" name="S13-card457"/>
+          <p:cNvPr id="16" name="S13-card452"/>
           <p:cNvSpPr/>
           <p:nvPr/>
         </p:nvSpPr>
@@ -7738,7 +7715,7 @@
       </p:sp>
       <p:sp>
         <p:nvSpPr>
-          <p:cNvPr id="17" name="S13-cardtext458"/>
+          <p:cNvPr id="17" name="S13-cardtext453"/>
           <p:cNvSpPr txBox="1"/>
           <p:nvPr/>
         </p:nvSpPr>
@@ -7894,7 +7871,7 @@
       </p:sp>
       <p:sp>
         <p:nvSpPr>
-          <p:cNvPr id="3" name="S14-card459"/>
+          <p:cNvPr id="3" name="S14-card454"/>
           <p:cNvSpPr/>
           <p:nvPr/>
         </p:nvSpPr>
@@ -7921,7 +7898,7 @@
       </p:sp>
       <p:sp>
         <p:nvSpPr>
-          <p:cNvPr id="4" name="S14-cardtext460"/>
+          <p:cNvPr id="4" name="S14-cardtext455"/>
           <p:cNvSpPr txBox="1"/>
           <p:nvPr/>
         </p:nvSpPr>
@@ -7963,7 +7940,7 @@
       </p:sp>
       <p:sp>
         <p:nvSpPr>
-          <p:cNvPr id="5" name="S14-chip461"/>
+          <p:cNvPr id="5" name="S14-chip456"/>
           <p:cNvSpPr txBox="1"/>
           <p:nvPr/>
         </p:nvSpPr>
@@ -8010,7 +7987,7 @@
       </p:sp>
       <p:sp>
         <p:nvSpPr>
-          <p:cNvPr id="6" name="S14-chip462"/>
+          <p:cNvPr id="6" name="S14-chip457"/>
           <p:cNvSpPr txBox="1"/>
           <p:nvPr/>
         </p:nvSpPr>
@@ -8057,7 +8034,7 @@
       </p:sp>
       <p:sp>
         <p:nvSpPr>
-          <p:cNvPr id="7" name="S14-text463"/>
+          <p:cNvPr id="7" name="S14-text458"/>
           <p:cNvSpPr txBox="1"/>
           <p:nvPr/>
         </p:nvSpPr>
@@ -8096,7 +8073,7 @@
       </p:sp>
       <p:sp>
         <p:nvSpPr>
-          <p:cNvPr id="8" name="S14-text464"/>
+          <p:cNvPr id="8" name="S14-text459"/>
           <p:cNvSpPr txBox="1"/>
           <p:nvPr/>
         </p:nvSpPr>
@@ -8152,7 +8129,7 @@
       </p:sp>
       <p:sp>
         <p:nvSpPr>
-          <p:cNvPr id="9" name="S14-text465"/>
+          <p:cNvPr id="9" name="S14-text460"/>
           <p:cNvSpPr txBox="1"/>
           <p:nvPr/>
         </p:nvSpPr>
@@ -8208,7 +8185,7 @@
       </p:sp>
       <p:sp>
         <p:nvSpPr>
-          <p:cNvPr id="10" name="S14-text466"/>
+          <p:cNvPr id="10" name="S14-text461"/>
           <p:cNvSpPr txBox="1"/>
           <p:nvPr/>
         </p:nvSpPr>
@@ -8264,7 +8241,7 @@
       </p:sp>
       <p:sp>
         <p:nvSpPr>
-          <p:cNvPr id="11" name="S14-text467"/>
+          <p:cNvPr id="11" name="S14-text462"/>
           <p:cNvSpPr txBox="1"/>
           <p:nvPr/>
         </p:nvSpPr>
@@ -8417,7 +8394,7 @@
       </p:sp>
       <p:sp>
         <p:nvSpPr>
-          <p:cNvPr id="3" name="S15-card468"/>
+          <p:cNvPr id="3" name="S15-card463"/>
           <p:cNvSpPr/>
           <p:nvPr/>
         </p:nvSpPr>
@@ -8444,7 +8421,7 @@
       </p:sp>
       <p:sp>
         <p:nvSpPr>
-          <p:cNvPr id="4" name="S15-cardtext469"/>
+          <p:cNvPr id="4" name="S15-cardtext464"/>
           <p:cNvSpPr txBox="1"/>
           <p:nvPr/>
         </p:nvSpPr>
@@ -8506,7 +8483,7 @@
       </p:sp>
       <p:sp>
         <p:nvSpPr>
-          <p:cNvPr id="5" name="S15-card470"/>
+          <p:cNvPr id="5" name="S15-card465"/>
           <p:cNvSpPr/>
           <p:nvPr/>
         </p:nvSpPr>
@@ -8533,7 +8510,7 @@
       </p:sp>
       <p:sp>
         <p:nvSpPr>
-          <p:cNvPr id="6" name="S15-cardtext471"/>
+          <p:cNvPr id="6" name="S15-cardtext466"/>
           <p:cNvSpPr txBox="1"/>
           <p:nvPr/>
         </p:nvSpPr>
@@ -8595,7 +8572,7 @@
       </p:sp>
       <p:sp>
         <p:nvSpPr>
-          <p:cNvPr id="7" name="S15-figure472" descr="3시를 가리키는 시계: 두 바늘이 직각"/>
+          <p:cNvPr id="7" name="S15-figure467" descr="3시를 가리키는 시계: 두 바늘이 직각"/>
           <p:cNvSpPr/>
           <p:nvPr/>
         </p:nvSpPr>
@@ -8620,7 +8597,7 @@
       </p:sp>
       <p:sp>
         <p:nvSpPr>
-          <p:cNvPr id="8" name="S15-line473"/>
+          <p:cNvPr id="8" name="S15-line468"/>
           <p:cNvSpPr/>
           <p:nvPr/>
         </p:nvSpPr>
@@ -8643,7 +8620,7 @@
       </p:sp>
       <p:sp>
         <p:nvSpPr>
-          <p:cNvPr id="9" name="S15-line474"/>
+          <p:cNvPr id="9" name="S15-line469"/>
           <p:cNvSpPr/>
           <p:nvPr/>
         </p:nvSpPr>
@@ -8666,7 +8643,7 @@
       </p:sp>
       <p:sp>
         <p:nvSpPr>
-          <p:cNvPr id="10" name="S15-line475"/>
+          <p:cNvPr id="10" name="S15-line470"/>
           <p:cNvSpPr/>
           <p:nvPr/>
         </p:nvSpPr>
@@ -8689,7 +8666,7 @@
       </p:sp>
       <p:sp>
         <p:nvSpPr>
-          <p:cNvPr id="11" name="S15-line476"/>
+          <p:cNvPr id="11" name="S15-line471"/>
           <p:cNvSpPr/>
           <p:nvPr/>
         </p:nvSpPr>
@@ -8712,7 +8689,7 @@
       </p:sp>
       <p:sp>
         <p:nvSpPr>
-          <p:cNvPr id="12" name="S15-line477"/>
+          <p:cNvPr id="12" name="S15-line472"/>
           <p:cNvSpPr/>
           <p:nvPr/>
         </p:nvSpPr>
@@ -8735,7 +8712,7 @@
       </p:sp>
       <p:sp>
         <p:nvSpPr>
-          <p:cNvPr id="13" name="S15-line478"/>
+          <p:cNvPr id="13" name="S15-line473"/>
           <p:cNvSpPr/>
           <p:nvPr/>
         </p:nvSpPr>
@@ -8758,7 +8735,7 @@
       </p:sp>
       <p:sp>
         <p:nvSpPr>
-          <p:cNvPr id="14" name="S15-line479"/>
+          <p:cNvPr id="14" name="S15-line474"/>
           <p:cNvSpPr/>
           <p:nvPr/>
         </p:nvSpPr>
@@ -8781,7 +8758,7 @@
       </p:sp>
       <p:sp>
         <p:nvSpPr>
-          <p:cNvPr id="15" name="S15-line480"/>
+          <p:cNvPr id="15" name="S15-line475"/>
           <p:cNvSpPr/>
           <p:nvPr/>
         </p:nvSpPr>
@@ -8804,7 +8781,7 @@
       </p:sp>
       <p:sp>
         <p:nvSpPr>
-          <p:cNvPr id="16" name="S15-line481"/>
+          <p:cNvPr id="16" name="S15-line476"/>
           <p:cNvSpPr/>
           <p:nvPr/>
         </p:nvSpPr>
@@ -8827,7 +8804,7 @@
       </p:sp>
       <p:sp>
         <p:nvSpPr>
-          <p:cNvPr id="17" name="S15-line482"/>
+          <p:cNvPr id="17" name="S15-line477"/>
           <p:cNvSpPr/>
           <p:nvPr/>
         </p:nvSpPr>
@@ -8850,7 +8827,7 @@
       </p:sp>
       <p:sp>
         <p:nvSpPr>
-          <p:cNvPr id="18" name="S15-line483"/>
+          <p:cNvPr id="18" name="S15-line478"/>
           <p:cNvSpPr/>
           <p:nvPr/>
         </p:nvSpPr>
@@ -8873,7 +8850,7 @@
       </p:sp>
       <p:sp>
         <p:nvSpPr>
-          <p:cNvPr id="19" name="S15-line484"/>
+          <p:cNvPr id="19" name="S15-line479"/>
           <p:cNvSpPr/>
           <p:nvPr/>
         </p:nvSpPr>
@@ -8896,7 +8873,7 @@
       </p:sp>
       <p:sp>
         <p:nvSpPr>
-          <p:cNvPr id="20" name="S15-line485"/>
+          <p:cNvPr id="20" name="S15-line480"/>
           <p:cNvSpPr/>
           <p:nvPr/>
         </p:nvSpPr>
@@ -8919,7 +8896,7 @@
       </p:sp>
       <p:sp>
         <p:nvSpPr>
-          <p:cNvPr id="21" name="S15-line486"/>
+          <p:cNvPr id="21" name="S15-line481"/>
           <p:cNvSpPr/>
           <p:nvPr/>
         </p:nvSpPr>
@@ -8942,7 +8919,7 @@
       </p:sp>
       <p:sp>
         <p:nvSpPr>
-          <p:cNvPr id="22" name="S15-line487"/>
+          <p:cNvPr id="22" name="S15-line482"/>
           <p:cNvSpPr/>
           <p:nvPr/>
         </p:nvSpPr>
@@ -8965,7 +8942,7 @@
       </p:sp>
       <p:sp>
         <p:nvSpPr>
-          <p:cNvPr id="23" name="S15-line488"/>
+          <p:cNvPr id="23" name="S15-line483"/>
           <p:cNvSpPr/>
           <p:nvPr/>
         </p:nvSpPr>
@@ -8988,7 +8965,7 @@
       </p:sp>
       <p:sp>
         <p:nvSpPr>
-          <p:cNvPr id="24" name="S15-line489"/>
+          <p:cNvPr id="24" name="S15-line484"/>
           <p:cNvSpPr/>
           <p:nvPr/>
         </p:nvSpPr>
@@ -9011,7 +8988,7 @@
       </p:sp>
       <p:sp>
         <p:nvSpPr>
-          <p:cNvPr id="25" name="S15-line490"/>
+          <p:cNvPr id="25" name="S15-line485"/>
           <p:cNvSpPr/>
           <p:nvPr/>
         </p:nvSpPr>
@@ -9034,7 +9011,7 @@
       </p:sp>
       <p:sp>
         <p:nvSpPr>
-          <p:cNvPr id="26" name="S15-line491"/>
+          <p:cNvPr id="26" name="S15-line486"/>
           <p:cNvSpPr/>
           <p:nvPr/>
         </p:nvSpPr>
@@ -9057,7 +9034,7 @@
       </p:sp>
       <p:sp>
         <p:nvSpPr>
-          <p:cNvPr id="27" name="S15-line492"/>
+          <p:cNvPr id="27" name="S15-line487"/>
           <p:cNvSpPr/>
           <p:nvPr/>
         </p:nvSpPr>
@@ -9080,7 +9057,7 @@
       </p:sp>
       <p:sp>
         <p:nvSpPr>
-          <p:cNvPr id="28" name="S15-line493"/>
+          <p:cNvPr id="28" name="S15-line488"/>
           <p:cNvSpPr/>
           <p:nvPr/>
         </p:nvSpPr>
@@ -9103,7 +9080,7 @@
       </p:sp>
       <p:sp>
         <p:nvSpPr>
-          <p:cNvPr id="29" name="S15-line494"/>
+          <p:cNvPr id="29" name="S15-line489"/>
           <p:cNvSpPr/>
           <p:nvPr/>
         </p:nvSpPr>
@@ -9126,7 +9103,7 @@
       </p:sp>
       <p:sp>
         <p:nvSpPr>
-          <p:cNvPr id="30" name="S15-line495"/>
+          <p:cNvPr id="30" name="S15-line490"/>
           <p:cNvSpPr/>
           <p:nvPr/>
         </p:nvSpPr>
@@ -9149,7 +9126,7 @@
       </p:sp>
       <p:sp>
         <p:nvSpPr>
-          <p:cNvPr id="31" name="S15-line496"/>
+          <p:cNvPr id="31" name="S15-line491"/>
           <p:cNvSpPr/>
           <p:nvPr/>
         </p:nvSpPr>
@@ -9172,7 +9149,7 @@
       </p:sp>
       <p:sp>
         <p:nvSpPr>
-          <p:cNvPr id="32" name="S15-line497"/>
+          <p:cNvPr id="32" name="S15-line492"/>
           <p:cNvSpPr/>
           <p:nvPr/>
         </p:nvSpPr>
@@ -9195,7 +9172,7 @@
       </p:sp>
       <p:sp>
         <p:nvSpPr>
-          <p:cNvPr id="33" name="S15-line498"/>
+          <p:cNvPr id="33" name="S15-line493"/>
           <p:cNvSpPr/>
           <p:nvPr/>
         </p:nvSpPr>
@@ -9218,7 +9195,7 @@
       </p:sp>
       <p:sp>
         <p:nvSpPr>
-          <p:cNvPr id="34" name="S15-line499"/>
+          <p:cNvPr id="34" name="S15-line494"/>
           <p:cNvSpPr/>
           <p:nvPr/>
         </p:nvSpPr>
@@ -9241,7 +9218,7 @@
       </p:sp>
       <p:sp>
         <p:nvSpPr>
-          <p:cNvPr id="35" name="S15-line500"/>
+          <p:cNvPr id="35" name="S15-line495"/>
           <p:cNvSpPr/>
           <p:nvPr/>
         </p:nvSpPr>
@@ -9264,7 +9241,7 @@
       </p:sp>
       <p:sp>
         <p:nvSpPr>
-          <p:cNvPr id="36" name="S15-line501"/>
+          <p:cNvPr id="36" name="S15-line496"/>
           <p:cNvSpPr/>
           <p:nvPr/>
         </p:nvSpPr>
@@ -9287,7 +9264,7 @@
       </p:sp>
       <p:sp>
         <p:nvSpPr>
-          <p:cNvPr id="37" name="S15-line502"/>
+          <p:cNvPr id="37" name="S15-line497"/>
           <p:cNvSpPr/>
           <p:nvPr/>
         </p:nvSpPr>
@@ -9310,7 +9287,7 @@
       </p:sp>
       <p:sp>
         <p:nvSpPr>
-          <p:cNvPr id="38" name="S15-line503"/>
+          <p:cNvPr id="38" name="S15-line498"/>
           <p:cNvSpPr/>
           <p:nvPr/>
         </p:nvSpPr>
@@ -9333,7 +9310,7 @@
       </p:sp>
       <p:sp>
         <p:nvSpPr>
-          <p:cNvPr id="39" name="S15-line504"/>
+          <p:cNvPr id="39" name="S15-line499"/>
           <p:cNvSpPr/>
           <p:nvPr/>
         </p:nvSpPr>
@@ -9356,7 +9333,7 @@
       </p:sp>
       <p:sp>
         <p:nvSpPr>
-          <p:cNvPr id="40" name="S15-line505"/>
+          <p:cNvPr id="40" name="S15-line500"/>
           <p:cNvSpPr/>
           <p:nvPr/>
         </p:nvSpPr>
@@ -9379,7 +9356,7 @@
       </p:sp>
       <p:sp>
         <p:nvSpPr>
-          <p:cNvPr id="41" name="S15-line506"/>
+          <p:cNvPr id="41" name="S15-line501"/>
           <p:cNvSpPr/>
           <p:nvPr/>
         </p:nvSpPr>
@@ -9402,7 +9379,7 @@
       </p:sp>
       <p:sp>
         <p:nvSpPr>
-          <p:cNvPr id="42" name="S15-line507"/>
+          <p:cNvPr id="42" name="S15-line502"/>
           <p:cNvSpPr/>
           <p:nvPr/>
         </p:nvSpPr>
@@ -9425,7 +9402,7 @@
       </p:sp>
       <p:sp>
         <p:nvSpPr>
-          <p:cNvPr id="43" name="S15-line508"/>
+          <p:cNvPr id="43" name="S15-line503"/>
           <p:cNvSpPr/>
           <p:nvPr/>
         </p:nvSpPr>
@@ -9448,7 +9425,7 @@
       </p:sp>
       <p:sp>
         <p:nvSpPr>
-          <p:cNvPr id="44" name="S15-line509"/>
+          <p:cNvPr id="44" name="S15-line504"/>
           <p:cNvSpPr/>
           <p:nvPr/>
         </p:nvSpPr>
@@ -9471,7 +9448,7 @@
       </p:sp>
       <p:sp>
         <p:nvSpPr>
-          <p:cNvPr id="45" name="S15-line510"/>
+          <p:cNvPr id="45" name="S15-line505"/>
           <p:cNvSpPr/>
           <p:nvPr/>
         </p:nvSpPr>
@@ -9494,7 +9471,7 @@
       </p:sp>
       <p:sp>
         <p:nvSpPr>
-          <p:cNvPr id="46" name="S15-line511"/>
+          <p:cNvPr id="46" name="S15-line506"/>
           <p:cNvSpPr/>
           <p:nvPr/>
         </p:nvSpPr>
@@ -9517,7 +9494,7 @@
       </p:sp>
       <p:sp>
         <p:nvSpPr>
-          <p:cNvPr id="47" name="S15-line512"/>
+          <p:cNvPr id="47" name="S15-line507"/>
           <p:cNvSpPr/>
           <p:nvPr/>
         </p:nvSpPr>
@@ -9540,7 +9517,7 @@
       </p:sp>
       <p:sp>
         <p:nvSpPr>
-          <p:cNvPr id="48" name="S15-line513"/>
+          <p:cNvPr id="48" name="S15-line508"/>
           <p:cNvSpPr/>
           <p:nvPr/>
         </p:nvSpPr>
@@ -9563,7 +9540,7 @@
       </p:sp>
       <p:sp>
         <p:nvSpPr>
-          <p:cNvPr id="49" name="S15-line514"/>
+          <p:cNvPr id="49" name="S15-line509"/>
           <p:cNvSpPr/>
           <p:nvPr/>
         </p:nvSpPr>
@@ -9586,7 +9563,7 @@
       </p:sp>
       <p:sp>
         <p:nvSpPr>
-          <p:cNvPr id="50" name="S15-line515"/>
+          <p:cNvPr id="50" name="S15-line510"/>
           <p:cNvSpPr/>
           <p:nvPr/>
         </p:nvSpPr>
@@ -9609,7 +9586,7 @@
       </p:sp>
       <p:sp>
         <p:nvSpPr>
-          <p:cNvPr id="51" name="S15-line516"/>
+          <p:cNvPr id="51" name="S15-line511"/>
           <p:cNvSpPr/>
           <p:nvPr/>
         </p:nvSpPr>
@@ -9632,7 +9609,7 @@
       </p:sp>
       <p:sp>
         <p:nvSpPr>
-          <p:cNvPr id="52" name="S15-line517"/>
+          <p:cNvPr id="52" name="S15-line512"/>
           <p:cNvSpPr/>
           <p:nvPr/>
         </p:nvSpPr>
@@ -9655,7 +9632,7 @@
       </p:sp>
       <p:sp>
         <p:nvSpPr>
-          <p:cNvPr id="53" name="S15-line518"/>
+          <p:cNvPr id="53" name="S15-line513"/>
           <p:cNvSpPr/>
           <p:nvPr/>
         </p:nvSpPr>
@@ -9678,7 +9655,7 @@
       </p:sp>
       <p:sp>
         <p:nvSpPr>
-          <p:cNvPr id="54" name="S15-line519"/>
+          <p:cNvPr id="54" name="S15-line514"/>
           <p:cNvSpPr/>
           <p:nvPr/>
         </p:nvSpPr>
@@ -9701,7 +9678,7 @@
       </p:sp>
       <p:sp>
         <p:nvSpPr>
-          <p:cNvPr id="55" name="S15-line520"/>
+          <p:cNvPr id="55" name="S15-line515"/>
           <p:cNvSpPr/>
           <p:nvPr/>
         </p:nvSpPr>
@@ -9724,7 +9701,7 @@
       </p:sp>
       <p:sp>
         <p:nvSpPr>
-          <p:cNvPr id="56" name="S15-line521"/>
+          <p:cNvPr id="56" name="S15-line516"/>
           <p:cNvSpPr/>
           <p:nvPr/>
         </p:nvSpPr>
@@ -9747,7 +9724,7 @@
       </p:sp>
       <p:sp>
         <p:nvSpPr>
-          <p:cNvPr id="57" name="S15-line522"/>
+          <p:cNvPr id="57" name="S15-line517"/>
           <p:cNvSpPr/>
           <p:nvPr/>
         </p:nvSpPr>
@@ -9770,7 +9747,7 @@
       </p:sp>
       <p:sp>
         <p:nvSpPr>
-          <p:cNvPr id="58" name="S15-line523"/>
+          <p:cNvPr id="58" name="S15-line518"/>
           <p:cNvSpPr/>
           <p:nvPr/>
         </p:nvSpPr>
@@ -9793,7 +9770,7 @@
       </p:sp>
       <p:sp>
         <p:nvSpPr>
-          <p:cNvPr id="59" name="S15-line524"/>
+          <p:cNvPr id="59" name="S15-line519"/>
           <p:cNvSpPr/>
           <p:nvPr/>
         </p:nvSpPr>
@@ -9816,7 +9793,7 @@
       </p:sp>
       <p:sp>
         <p:nvSpPr>
-          <p:cNvPr id="60" name="S15-line525"/>
+          <p:cNvPr id="60" name="S15-line520"/>
           <p:cNvSpPr/>
           <p:nvPr/>
         </p:nvSpPr>
@@ -9839,7 +9816,7 @@
       </p:sp>
       <p:sp>
         <p:nvSpPr>
-          <p:cNvPr id="61" name="S15-line526"/>
+          <p:cNvPr id="61" name="S15-line521"/>
           <p:cNvSpPr/>
           <p:nvPr/>
         </p:nvSpPr>
@@ -9862,7 +9839,7 @@
       </p:sp>
       <p:sp>
         <p:nvSpPr>
-          <p:cNvPr id="62" name="S15-line527"/>
+          <p:cNvPr id="62" name="S15-line522"/>
           <p:cNvSpPr/>
           <p:nvPr/>
         </p:nvSpPr>
@@ -9885,7 +9862,7 @@
       </p:sp>
       <p:sp>
         <p:nvSpPr>
-          <p:cNvPr id="63" name="S15-line528"/>
+          <p:cNvPr id="63" name="S15-line523"/>
           <p:cNvSpPr/>
           <p:nvPr/>
         </p:nvSpPr>
@@ -9908,7 +9885,7 @@
       </p:sp>
       <p:sp>
         <p:nvSpPr>
-          <p:cNvPr id="64" name="S15-line529"/>
+          <p:cNvPr id="64" name="S15-line524"/>
           <p:cNvSpPr/>
           <p:nvPr/>
         </p:nvSpPr>
@@ -9931,7 +9908,7 @@
       </p:sp>
       <p:sp>
         <p:nvSpPr>
-          <p:cNvPr id="65" name="S15-line530"/>
+          <p:cNvPr id="65" name="S15-line525"/>
           <p:cNvSpPr/>
           <p:nvPr/>
         </p:nvSpPr>
@@ -9954,7 +9931,7 @@
       </p:sp>
       <p:sp>
         <p:nvSpPr>
-          <p:cNvPr id="66" name="S15-line531"/>
+          <p:cNvPr id="66" name="S15-line526"/>
           <p:cNvSpPr/>
           <p:nvPr/>
         </p:nvSpPr>
@@ -9977,7 +9954,7 @@
       </p:sp>
       <p:sp>
         <p:nvSpPr>
-          <p:cNvPr id="67" name="S15-line532"/>
+          <p:cNvPr id="67" name="S15-line527"/>
           <p:cNvSpPr/>
           <p:nvPr/>
         </p:nvSpPr>
@@ -10000,7 +9977,7 @@
       </p:sp>
       <p:sp>
         <p:nvSpPr>
-          <p:cNvPr id="68" name="S15-label533"/>
+          <p:cNvPr id="68" name="S15-label528"/>
           <p:cNvSpPr txBox="1"/>
           <p:nvPr/>
         </p:nvSpPr>
@@ -10039,7 +10016,7 @@
       </p:sp>
       <p:sp>
         <p:nvSpPr>
-          <p:cNvPr id="69" name="S15-label534"/>
+          <p:cNvPr id="69" name="S15-label529"/>
           <p:cNvSpPr txBox="1"/>
           <p:nvPr/>
         </p:nvSpPr>
@@ -10078,7 +10055,7 @@
       </p:sp>
       <p:sp>
         <p:nvSpPr>
-          <p:cNvPr id="70" name="S15-label535"/>
+          <p:cNvPr id="70" name="S15-label530"/>
           <p:cNvSpPr txBox="1"/>
           <p:nvPr/>
         </p:nvSpPr>
@@ -10117,7 +10094,7 @@
       </p:sp>
       <p:sp>
         <p:nvSpPr>
-          <p:cNvPr id="71" name="S15-label536"/>
+          <p:cNvPr id="71" name="S15-label531"/>
           <p:cNvSpPr txBox="1"/>
           <p:nvPr/>
         </p:nvSpPr>
@@ -10156,7 +10133,7 @@
       </p:sp>
       <p:sp>
         <p:nvSpPr>
-          <p:cNvPr id="72" name="S15-label537"/>
+          <p:cNvPr id="72" name="S15-label532"/>
           <p:cNvSpPr txBox="1"/>
           <p:nvPr/>
         </p:nvSpPr>
@@ -10195,7 +10172,7 @@
       </p:sp>
       <p:sp>
         <p:nvSpPr>
-          <p:cNvPr id="73" name="S15-label538"/>
+          <p:cNvPr id="73" name="S15-label533"/>
           <p:cNvSpPr txBox="1"/>
           <p:nvPr/>
         </p:nvSpPr>
@@ -10234,7 +10211,7 @@
       </p:sp>
       <p:sp>
         <p:nvSpPr>
-          <p:cNvPr id="74" name="S15-label539"/>
+          <p:cNvPr id="74" name="S15-label534"/>
           <p:cNvSpPr txBox="1"/>
           <p:nvPr/>
         </p:nvSpPr>
@@ -10273,7 +10250,7 @@
       </p:sp>
       <p:sp>
         <p:nvSpPr>
-          <p:cNvPr id="75" name="S15-label540"/>
+          <p:cNvPr id="75" name="S15-label535"/>
           <p:cNvSpPr txBox="1"/>
           <p:nvPr/>
         </p:nvSpPr>
@@ -10312,7 +10289,7 @@
       </p:sp>
       <p:sp>
         <p:nvSpPr>
-          <p:cNvPr id="76" name="S15-label541"/>
+          <p:cNvPr id="76" name="S15-label536"/>
           <p:cNvSpPr txBox="1"/>
           <p:nvPr/>
         </p:nvSpPr>
@@ -10351,7 +10328,7 @@
       </p:sp>
       <p:sp>
         <p:nvSpPr>
-          <p:cNvPr id="77" name="S15-label542"/>
+          <p:cNvPr id="77" name="S15-label537"/>
           <p:cNvSpPr txBox="1"/>
           <p:nvPr/>
         </p:nvSpPr>
@@ -10390,7 +10367,7 @@
       </p:sp>
       <p:sp>
         <p:nvSpPr>
-          <p:cNvPr id="78" name="S15-label543"/>
+          <p:cNvPr id="78" name="S15-label538"/>
           <p:cNvSpPr txBox="1"/>
           <p:nvPr/>
         </p:nvSpPr>
@@ -10429,7 +10406,7 @@
       </p:sp>
       <p:sp>
         <p:nvSpPr>
-          <p:cNvPr id="79" name="S15-label544"/>
+          <p:cNvPr id="79" name="S15-label539"/>
           <p:cNvSpPr txBox="1"/>
           <p:nvPr/>
         </p:nvSpPr>
@@ -10468,7 +10445,7 @@
       </p:sp>
       <p:sp>
         <p:nvSpPr>
-          <p:cNvPr id="80" name="S15-line545"/>
+          <p:cNvPr id="80" name="S15-line540"/>
           <p:cNvSpPr/>
           <p:nvPr/>
         </p:nvSpPr>
@@ -10491,7 +10468,7 @@
       </p:sp>
       <p:sp>
         <p:nvSpPr>
-          <p:cNvPr id="81" name="S15-line546"/>
+          <p:cNvPr id="81" name="S15-line541"/>
           <p:cNvSpPr/>
           <p:nvPr/>
         </p:nvSpPr>
@@ -10514,7 +10491,7 @@
       </p:sp>
       <p:sp>
         <p:nvSpPr>
-          <p:cNvPr id="82" name="S15-pin547"/>
+          <p:cNvPr id="82" name="S15-pin542"/>
           <p:cNvSpPr/>
           <p:nvPr/>
         </p:nvSpPr>
@@ -10539,7 +10516,7 @@
       </p:sp>
       <p:sp>
         <p:nvSpPr>
-          <p:cNvPr id="83" name="S15-label548"/>
+          <p:cNvPr id="83" name="S15-label543"/>
           <p:cNvSpPr txBox="1"/>
           <p:nvPr/>
         </p:nvSpPr>
@@ -10578,7 +10555,7 @@
       </p:sp>
       <p:sp>
         <p:nvSpPr>
-          <p:cNvPr id="84" name="S15-figure549" descr="6시를 가리키는 시계: 두 바늘이 일직선"/>
+          <p:cNvPr id="84" name="S15-figure544" descr="6시를 가리키는 시계: 두 바늘이 일직선"/>
           <p:cNvSpPr/>
           <p:nvPr/>
         </p:nvSpPr>
@@ -10603,7 +10580,7 @@
       </p:sp>
       <p:sp>
         <p:nvSpPr>
-          <p:cNvPr id="85" name="S15-line550"/>
+          <p:cNvPr id="85" name="S15-line545"/>
           <p:cNvSpPr/>
           <p:nvPr/>
         </p:nvSpPr>
@@ -10626,7 +10603,7 @@
       </p:sp>
       <p:sp>
         <p:nvSpPr>
-          <p:cNvPr id="86" name="S15-line551"/>
+          <p:cNvPr id="86" name="S15-line546"/>
           <p:cNvSpPr/>
           <p:nvPr/>
         </p:nvSpPr>
@@ -10649,7 +10626,7 @@
       </p:sp>
       <p:sp>
         <p:nvSpPr>
-          <p:cNvPr id="87" name="S15-line552"/>
+          <p:cNvPr id="87" name="S15-line547"/>
           <p:cNvSpPr/>
           <p:nvPr/>
         </p:nvSpPr>
@@ -10672,7 +10649,7 @@
       </p:sp>
       <p:sp>
         <p:nvSpPr>
-          <p:cNvPr id="88" name="S15-line553"/>
+          <p:cNvPr id="88" name="S15-line548"/>
           <p:cNvSpPr/>
           <p:nvPr/>
         </p:nvSpPr>
@@ -10695,7 +10672,7 @@
       </p:sp>
       <p:sp>
         <p:nvSpPr>
-          <p:cNvPr id="89" name="S15-line554"/>
+          <p:cNvPr id="89" name="S15-line549"/>
           <p:cNvSpPr/>
           <p:nvPr/>
         </p:nvSpPr>
@@ -10718,7 +10695,7 @@
       </p:sp>
       <p:sp>
         <p:nvSpPr>
-          <p:cNvPr id="90" name="S15-line555"/>
+          <p:cNvPr id="90" name="S15-line550"/>
           <p:cNvSpPr/>
           <p:nvPr/>
         </p:nvSpPr>
@@ -10741,7 +10718,7 @@
       </p:sp>
       <p:sp>
         <p:nvSpPr>
-          <p:cNvPr id="91" name="S15-line556"/>
+          <p:cNvPr id="91" name="S15-line551"/>
           <p:cNvSpPr/>
           <p:nvPr/>
         </p:nvSpPr>
@@ -10764,7 +10741,7 @@
       </p:sp>
       <p:sp>
         <p:nvSpPr>
-          <p:cNvPr id="92" name="S15-line557"/>
+          <p:cNvPr id="92" name="S15-line552"/>
           <p:cNvSpPr/>
           <p:nvPr/>
         </p:nvSpPr>
@@ -10787,7 +10764,7 @@
       </p:sp>
       <p:sp>
         <p:nvSpPr>
-          <p:cNvPr id="93" name="S15-line558"/>
+          <p:cNvPr id="93" name="S15-line553"/>
           <p:cNvSpPr/>
           <p:nvPr/>
         </p:nvSpPr>
@@ -10810,7 +10787,7 @@
       </p:sp>
       <p:sp>
         <p:nvSpPr>
-          <p:cNvPr id="94" name="S15-line559"/>
+          <p:cNvPr id="94" name="S15-line554"/>
           <p:cNvSpPr/>
           <p:nvPr/>
         </p:nvSpPr>
@@ -10833,7 +10810,7 @@
       </p:sp>
       <p:sp>
         <p:nvSpPr>
-          <p:cNvPr id="95" name="S15-line560"/>
+          <p:cNvPr id="95" name="S15-line555"/>
           <p:cNvSpPr/>
           <p:nvPr/>
         </p:nvSpPr>
@@ -10856,7 +10833,7 @@
       </p:sp>
       <p:sp>
         <p:nvSpPr>
-          <p:cNvPr id="96" name="S15-line561"/>
+          <p:cNvPr id="96" name="S15-line556"/>
           <p:cNvSpPr/>
           <p:nvPr/>
         </p:nvSpPr>
@@ -10879,7 +10856,7 @@
       </p:sp>
       <p:sp>
         <p:nvSpPr>
-          <p:cNvPr id="97" name="S15-line562"/>
+          <p:cNvPr id="97" name="S15-line557"/>
           <p:cNvSpPr/>
           <p:nvPr/>
         </p:nvSpPr>
@@ -10902,7 +10879,7 @@
       </p:sp>
       <p:sp>
         <p:nvSpPr>
-          <p:cNvPr id="98" name="S15-line563"/>
+          <p:cNvPr id="98" name="S15-line558"/>
           <p:cNvSpPr/>
           <p:nvPr/>
         </p:nvSpPr>
@@ -10925,7 +10902,7 @@
       </p:sp>
       <p:sp>
         <p:nvSpPr>
-          <p:cNvPr id="99" name="S15-line564"/>
+          <p:cNvPr id="99" name="S15-line559"/>
           <p:cNvSpPr/>
           <p:nvPr/>
         </p:nvSpPr>
@@ -10948,7 +10925,7 @@
       </p:sp>
       <p:sp>
         <p:nvSpPr>
-          <p:cNvPr id="100" name="S15-line565"/>
+          <p:cNvPr id="100" name="S15-line560"/>
           <p:cNvSpPr/>
           <p:nvPr/>
         </p:nvSpPr>
@@ -10971,7 +10948,7 @@
       </p:sp>
       <p:sp>
         <p:nvSpPr>
-          <p:cNvPr id="101" name="S15-line566"/>
+          <p:cNvPr id="101" name="S15-line561"/>
           <p:cNvSpPr/>
           <p:nvPr/>
         </p:nvSpPr>
@@ -10994,7 +10971,7 @@
       </p:sp>
       <p:sp>
         <p:nvSpPr>
-          <p:cNvPr id="102" name="S15-line567"/>
+          <p:cNvPr id="102" name="S15-line562"/>
           <p:cNvSpPr/>
           <p:nvPr/>
         </p:nvSpPr>
@@ -11017,7 +10994,7 @@
       </p:sp>
       <p:sp>
         <p:nvSpPr>
-          <p:cNvPr id="103" name="S15-line568"/>
+          <p:cNvPr id="103" name="S15-line563"/>
           <p:cNvSpPr/>
           <p:nvPr/>
         </p:nvSpPr>
@@ -11040,7 +11017,7 @@
       </p:sp>
       <p:sp>
         <p:nvSpPr>
-          <p:cNvPr id="104" name="S15-line569"/>
+          <p:cNvPr id="104" name="S15-line564"/>
           <p:cNvSpPr/>
           <p:nvPr/>
         </p:nvSpPr>
@@ -11063,7 +11040,7 @@
       </p:sp>
       <p:sp>
         <p:nvSpPr>
-          <p:cNvPr id="105" name="S15-line570"/>
+          <p:cNvPr id="105" name="S15-line565"/>
           <p:cNvSpPr/>
           <p:nvPr/>
         </p:nvSpPr>
@@ -11086,7 +11063,7 @@
       </p:sp>
       <p:sp>
         <p:nvSpPr>
-          <p:cNvPr id="106" name="S15-line571"/>
+          <p:cNvPr id="106" name="S15-line566"/>
           <p:cNvSpPr/>
           <p:nvPr/>
         </p:nvSpPr>
@@ -11109,7 +11086,7 @@
       </p:sp>
       <p:sp>
         <p:nvSpPr>
-          <p:cNvPr id="107" name="S15-line572"/>
+          <p:cNvPr id="107" name="S15-line567"/>
           <p:cNvSpPr/>
           <p:nvPr/>
         </p:nvSpPr>
@@ -11132,7 +11109,7 @@
       </p:sp>
       <p:sp>
         <p:nvSpPr>
-          <p:cNvPr id="108" name="S15-line573"/>
+          <p:cNvPr id="108" name="S15-line568"/>
           <p:cNvSpPr/>
           <p:nvPr/>
         </p:nvSpPr>
@@ -11155,7 +11132,7 @@
       </p:sp>
       <p:sp>
         <p:nvSpPr>
-          <p:cNvPr id="109" name="S15-line574"/>
+          <p:cNvPr id="109" name="S15-line569"/>
           <p:cNvSpPr/>
           <p:nvPr/>
         </p:nvSpPr>
@@ -11178,7 +11155,7 @@
       </p:sp>
       <p:sp>
         <p:nvSpPr>
-          <p:cNvPr id="110" name="S15-line575"/>
+          <p:cNvPr id="110" name="S15-line570"/>
           <p:cNvSpPr/>
           <p:nvPr/>
         </p:nvSpPr>
@@ -11201,7 +11178,7 @@
       </p:sp>
       <p:sp>
         <p:nvSpPr>
-          <p:cNvPr id="111" name="S15-line576"/>
+          <p:cNvPr id="111" name="S15-line571"/>
           <p:cNvSpPr/>
           <p:nvPr/>
         </p:nvSpPr>
@@ -11224,7 +11201,7 @@
       </p:sp>
       <p:sp>
         <p:nvSpPr>
-          <p:cNvPr id="112" name="S15-line577"/>
+          <p:cNvPr id="112" name="S15-line572"/>
           <p:cNvSpPr/>
           <p:nvPr/>
         </p:nvSpPr>
@@ -11247,7 +11224,7 @@
       </p:sp>
       <p:sp>
         <p:nvSpPr>
-          <p:cNvPr id="113" name="S15-line578"/>
+          <p:cNvPr id="113" name="S15-line573"/>
           <p:cNvSpPr/>
           <p:nvPr/>
         </p:nvSpPr>
@@ -11270,7 +11247,7 @@
       </p:sp>
       <p:sp>
         <p:nvSpPr>
-          <p:cNvPr id="114" name="S15-line579"/>
+          <p:cNvPr id="114" name="S15-line574"/>
           <p:cNvSpPr/>
           <p:nvPr/>
         </p:nvSpPr>
@@ -11293,7 +11270,7 @@
       </p:sp>
       <p:sp>
         <p:nvSpPr>
-          <p:cNvPr id="115" name="S15-line580"/>
+          <p:cNvPr id="115" name="S15-line575"/>
           <p:cNvSpPr/>
           <p:nvPr/>
         </p:nvSpPr>
@@ -11316,7 +11293,7 @@
       </p:sp>
       <p:sp>
         <p:nvSpPr>
-          <p:cNvPr id="116" name="S15-line581"/>
+          <p:cNvPr id="116" name="S15-line576"/>
           <p:cNvSpPr/>
           <p:nvPr/>
         </p:nvSpPr>
@@ -11339,7 +11316,7 @@
       </p:sp>
       <p:sp>
         <p:nvSpPr>
-          <p:cNvPr id="117" name="S15-line582"/>
+          <p:cNvPr id="117" name="S15-line577"/>
           <p:cNvSpPr/>
           <p:nvPr/>
         </p:nvSpPr>
@@ -11362,7 +11339,7 @@
       </p:sp>
       <p:sp>
         <p:nvSpPr>
-          <p:cNvPr id="118" name="S15-line583"/>
+          <p:cNvPr id="118" name="S15-line578"/>
           <p:cNvSpPr/>
           <p:nvPr/>
         </p:nvSpPr>
@@ -11385,7 +11362,7 @@
       </p:sp>
       <p:sp>
         <p:nvSpPr>
-          <p:cNvPr id="119" name="S15-line584"/>
+          <p:cNvPr id="119" name="S15-line579"/>
           <p:cNvSpPr/>
           <p:nvPr/>
         </p:nvSpPr>
@@ -11408,7 +11385,7 @@
       </p:sp>
       <p:sp>
         <p:nvSpPr>
-          <p:cNvPr id="120" name="S15-line585"/>
+          <p:cNvPr id="120" name="S15-line580"/>
           <p:cNvSpPr/>
           <p:nvPr/>
         </p:nvSpPr>
@@ -11431,7 +11408,7 @@
       </p:sp>
       <p:sp>
         <p:nvSpPr>
-          <p:cNvPr id="121" name="S15-line586"/>
+          <p:cNvPr id="121" name="S15-line581"/>
           <p:cNvSpPr/>
           <p:nvPr/>
         </p:nvSpPr>
@@ -11454,7 +11431,7 @@
       </p:sp>
       <p:sp>
         <p:nvSpPr>
-          <p:cNvPr id="122" name="S15-line587"/>
+          <p:cNvPr id="122" name="S15-line582"/>
           <p:cNvSpPr/>
           <p:nvPr/>
         </p:nvSpPr>
@@ -11477,7 +11454,7 @@
       </p:sp>
       <p:sp>
         <p:nvSpPr>
-          <p:cNvPr id="123" name="S15-line588"/>
+          <p:cNvPr id="123" name="S15-line583"/>
           <p:cNvSpPr/>
           <p:nvPr/>
         </p:nvSpPr>
@@ -11500,7 +11477,7 @@
       </p:sp>
       <p:sp>
         <p:nvSpPr>
-          <p:cNvPr id="124" name="S15-line589"/>
+          <p:cNvPr id="124" name="S15-line584"/>
           <p:cNvSpPr/>
           <p:nvPr/>
         </p:nvSpPr>
@@ -11523,7 +11500,7 @@
       </p:sp>
       <p:sp>
         <p:nvSpPr>
-          <p:cNvPr id="125" name="S15-line590"/>
+          <p:cNvPr id="125" name="S15-line585"/>
           <p:cNvSpPr/>
           <p:nvPr/>
         </p:nvSpPr>
@@ -11546,7 +11523,7 @@
       </p:sp>
       <p:sp>
         <p:nvSpPr>
-          <p:cNvPr id="126" name="S15-line591"/>
+          <p:cNvPr id="126" name="S15-line586"/>
           <p:cNvSpPr/>
           <p:nvPr/>
         </p:nvSpPr>
@@ -11569,7 +11546,7 @@
       </p:sp>
       <p:sp>
         <p:nvSpPr>
-          <p:cNvPr id="127" name="S15-line592"/>
+          <p:cNvPr id="127" name="S15-line587"/>
           <p:cNvSpPr/>
           <p:nvPr/>
         </p:nvSpPr>
@@ -11592,7 +11569,7 @@
       </p:sp>
       <p:sp>
         <p:nvSpPr>
-          <p:cNvPr id="128" name="S15-line593"/>
+          <p:cNvPr id="128" name="S15-line588"/>
           <p:cNvSpPr/>
           <p:nvPr/>
         </p:nvSpPr>
@@ -11615,7 +11592,7 @@
       </p:sp>
       <p:sp>
         <p:nvSpPr>
-          <p:cNvPr id="129" name="S15-line594"/>
+          <p:cNvPr id="129" name="S15-line589"/>
           <p:cNvSpPr/>
           <p:nvPr/>
         </p:nvSpPr>
@@ -11638,7 +11615,7 @@
       </p:sp>
       <p:sp>
         <p:nvSpPr>
-          <p:cNvPr id="130" name="S15-line595"/>
+          <p:cNvPr id="130" name="S15-line590"/>
           <p:cNvSpPr/>
           <p:nvPr/>
         </p:nvSpPr>
@@ -11661,7 +11638,7 @@
       </p:sp>
       <p:sp>
         <p:nvSpPr>
-          <p:cNvPr id="131" name="S15-line596"/>
+          <p:cNvPr id="131" name="S15-line591"/>
           <p:cNvSpPr/>
           <p:nvPr/>
         </p:nvSpPr>
@@ -11684,7 +11661,7 @@
       </p:sp>
       <p:sp>
         <p:nvSpPr>
-          <p:cNvPr id="132" name="S15-line597"/>
+          <p:cNvPr id="132" name="S15-line592"/>
           <p:cNvSpPr/>
           <p:nvPr/>
         </p:nvSpPr>
@@ -11707,7 +11684,7 @@
       </p:sp>
       <p:sp>
         <p:nvSpPr>
-          <p:cNvPr id="133" name="S15-line598"/>
+          <p:cNvPr id="133" name="S15-line593"/>
           <p:cNvSpPr/>
           <p:nvPr/>
         </p:nvSpPr>
@@ -11730,7 +11707,7 @@
       </p:sp>
       <p:sp>
         <p:nvSpPr>
-          <p:cNvPr id="134" name="S15-line599"/>
+          <p:cNvPr id="134" name="S15-line594"/>
           <p:cNvSpPr/>
           <p:nvPr/>
         </p:nvSpPr>
@@ -11753,7 +11730,7 @@
       </p:sp>
       <p:sp>
         <p:nvSpPr>
-          <p:cNvPr id="135" name="S15-line600"/>
+          <p:cNvPr id="135" name="S15-line595"/>
           <p:cNvSpPr/>
           <p:nvPr/>
         </p:nvSpPr>
@@ -11776,7 +11753,7 @@
       </p:sp>
       <p:sp>
         <p:nvSpPr>
-          <p:cNvPr id="136" name="S15-line601"/>
+          <p:cNvPr id="136" name="S15-line596"/>
           <p:cNvSpPr/>
           <p:nvPr/>
         </p:nvSpPr>
@@ -11799,7 +11776,7 @@
       </p:sp>
       <p:sp>
         <p:nvSpPr>
-          <p:cNvPr id="137" name="S15-line602"/>
+          <p:cNvPr id="137" name="S15-line597"/>
           <p:cNvSpPr/>
           <p:nvPr/>
         </p:nvSpPr>
@@ -11822,7 +11799,7 @@
       </p:sp>
       <p:sp>
         <p:nvSpPr>
-          <p:cNvPr id="138" name="S15-line603"/>
+          <p:cNvPr id="138" name="S15-line598"/>
           <p:cNvSpPr/>
           <p:nvPr/>
         </p:nvSpPr>
@@ -11845,7 +11822,7 @@
       </p:sp>
       <p:sp>
         <p:nvSpPr>
-          <p:cNvPr id="139" name="S15-line604"/>
+          <p:cNvPr id="139" name="S15-line599"/>
           <p:cNvSpPr/>
           <p:nvPr/>
         </p:nvSpPr>
@@ -11868,7 +11845,7 @@
       </p:sp>
       <p:sp>
         <p:nvSpPr>
-          <p:cNvPr id="140" name="S15-line605"/>
+          <p:cNvPr id="140" name="S15-line600"/>
           <p:cNvSpPr/>
           <p:nvPr/>
         </p:nvSpPr>
@@ -11891,7 +11868,7 @@
       </p:sp>
       <p:sp>
         <p:nvSpPr>
-          <p:cNvPr id="141" name="S15-line606"/>
+          <p:cNvPr id="141" name="S15-line601"/>
           <p:cNvSpPr/>
           <p:nvPr/>
         </p:nvSpPr>
@@ -11914,7 +11891,7 @@
       </p:sp>
       <p:sp>
         <p:nvSpPr>
-          <p:cNvPr id="142" name="S15-line607"/>
+          <p:cNvPr id="142" name="S15-line602"/>
           <p:cNvSpPr/>
           <p:nvPr/>
         </p:nvSpPr>
@@ -11937,7 +11914,7 @@
       </p:sp>
       <p:sp>
         <p:nvSpPr>
-          <p:cNvPr id="143" name="S15-line608"/>
+          <p:cNvPr id="143" name="S15-line603"/>
           <p:cNvSpPr/>
           <p:nvPr/>
         </p:nvSpPr>
@@ -11960,7 +11937,7 @@
       </p:sp>
       <p:sp>
         <p:nvSpPr>
-          <p:cNvPr id="144" name="S15-line609"/>
+          <p:cNvPr id="144" name="S15-line604"/>
           <p:cNvSpPr/>
           <p:nvPr/>
         </p:nvSpPr>
@@ -11983,7 +11960,7 @@
       </p:sp>
       <p:sp>
         <p:nvSpPr>
-          <p:cNvPr id="145" name="S15-label610"/>
+          <p:cNvPr id="145" name="S15-label605"/>
           <p:cNvSpPr txBox="1"/>
           <p:nvPr/>
         </p:nvSpPr>
@@ -12022,7 +11999,7 @@
       </p:sp>
       <p:sp>
         <p:nvSpPr>
-          <p:cNvPr id="146" name="S15-label611"/>
+          <p:cNvPr id="146" name="S15-label606"/>
           <p:cNvSpPr txBox="1"/>
           <p:nvPr/>
         </p:nvSpPr>
@@ -12061,7 +12038,7 @@
       </p:sp>
       <p:sp>
         <p:nvSpPr>
-          <p:cNvPr id="147" name="S15-label612"/>
+          <p:cNvPr id="147" name="S15-label607"/>
           <p:cNvSpPr txBox="1"/>
           <p:nvPr/>
         </p:nvSpPr>
@@ -12100,7 +12077,7 @@
       </p:sp>
       <p:sp>
         <p:nvSpPr>
-          <p:cNvPr id="148" name="S15-label613"/>
+          <p:cNvPr id="148" name="S15-label608"/>
           <p:cNvSpPr txBox="1"/>
           <p:nvPr/>
         </p:nvSpPr>
@@ -12139,7 +12116,7 @@
       </p:sp>
       <p:sp>
         <p:nvSpPr>
-          <p:cNvPr id="149" name="S15-label614"/>
+          <p:cNvPr id="149" name="S15-label609"/>
           <p:cNvSpPr txBox="1"/>
           <p:nvPr/>
         </p:nvSpPr>
@@ -12178,7 +12155,7 @@
       </p:sp>
       <p:sp>
         <p:nvSpPr>
-          <p:cNvPr id="150" name="S15-label615"/>
+          <p:cNvPr id="150" name="S15-label610"/>
           <p:cNvSpPr txBox="1"/>
           <p:nvPr/>
         </p:nvSpPr>
@@ -12217,7 +12194,7 @@
       </p:sp>
       <p:sp>
         <p:nvSpPr>
-          <p:cNvPr id="151" name="S15-label616"/>
+          <p:cNvPr id="151" name="S15-label611"/>
           <p:cNvSpPr txBox="1"/>
           <p:nvPr/>
         </p:nvSpPr>
@@ -12256,7 +12233,7 @@
       </p:sp>
       <p:sp>
         <p:nvSpPr>
-          <p:cNvPr id="152" name="S15-label617"/>
+          <p:cNvPr id="152" name="S15-label612"/>
           <p:cNvSpPr txBox="1"/>
           <p:nvPr/>
         </p:nvSpPr>
@@ -12295,7 +12272,7 @@
       </p:sp>
       <p:sp>
         <p:nvSpPr>
-          <p:cNvPr id="153" name="S15-label618"/>
+          <p:cNvPr id="153" name="S15-label613"/>
           <p:cNvSpPr txBox="1"/>
           <p:nvPr/>
         </p:nvSpPr>
@@ -12334,7 +12311,7 @@
       </p:sp>
       <p:sp>
         <p:nvSpPr>
-          <p:cNvPr id="154" name="S15-label619"/>
+          <p:cNvPr id="154" name="S15-label614"/>
           <p:cNvSpPr txBox="1"/>
           <p:nvPr/>
         </p:nvSpPr>
@@ -12373,7 +12350,7 @@
       </p:sp>
       <p:sp>
         <p:nvSpPr>
-          <p:cNvPr id="155" name="S15-label620"/>
+          <p:cNvPr id="155" name="S15-label615"/>
           <p:cNvSpPr txBox="1"/>
           <p:nvPr/>
         </p:nvSpPr>
@@ -12412,7 +12389,7 @@
       </p:sp>
       <p:sp>
         <p:nvSpPr>
-          <p:cNvPr id="156" name="S15-label621"/>
+          <p:cNvPr id="156" name="S15-label616"/>
           <p:cNvSpPr txBox="1"/>
           <p:nvPr/>
         </p:nvSpPr>
@@ -12451,7 +12428,7 @@
       </p:sp>
       <p:sp>
         <p:nvSpPr>
-          <p:cNvPr id="157" name="S15-line622"/>
+          <p:cNvPr id="157" name="S15-line617"/>
           <p:cNvSpPr/>
           <p:nvPr/>
         </p:nvSpPr>
@@ -12474,7 +12451,7 @@
       </p:sp>
       <p:sp>
         <p:nvSpPr>
-          <p:cNvPr id="158" name="S15-line623"/>
+          <p:cNvPr id="158" name="S15-line618"/>
           <p:cNvSpPr/>
           <p:nvPr/>
         </p:nvSpPr>
@@ -12497,7 +12474,7 @@
       </p:sp>
       <p:sp>
         <p:nvSpPr>
-          <p:cNvPr id="159" name="S15-pin624"/>
+          <p:cNvPr id="159" name="S15-pin619"/>
           <p:cNvSpPr/>
           <p:nvPr/>
         </p:nvSpPr>
@@ -12522,7 +12499,7 @@
       </p:sp>
       <p:sp>
         <p:nvSpPr>
-          <p:cNvPr id="160" name="S15-label625"/>
+          <p:cNvPr id="160" name="S15-label620"/>
           <p:cNvSpPr txBox="1"/>
           <p:nvPr/>
         </p:nvSpPr>
@@ -13596,7 +13573,7 @@
         </p:nvSpPr>
         <p:spPr>
           <a:xfrm>
-            <a:off x="1441899" y="2980651"/>
+            <a:off x="1441899" y="2716902"/>
             <a:ext cx="1582497" cy="1582497"/>
           </a:xfrm>
           <a:custGeom>
@@ -13643,7 +13620,7 @@
         </p:nvSpPr>
         <p:spPr>
           <a:xfrm>
-            <a:off x="4079394" y="2980651"/>
+            <a:off x="4079394" y="2716902"/>
             <a:ext cx="1582497" cy="1582497"/>
           </a:xfrm>
           <a:custGeom>
@@ -13690,8 +13667,8 @@
         </p:nvSpPr>
         <p:spPr>
           <a:xfrm flipV="1">
-            <a:off x="914400" y="1925653"/>
-            <a:ext cx="0" cy="3692494"/>
+            <a:off x="914400" y="2189403"/>
+            <a:ext cx="0" cy="3164994"/>
           </a:xfrm>
           <a:prstGeom prst="line">
             <a:avLst/>
@@ -13713,8 +13690,8 @@
         </p:nvSpPr>
         <p:spPr>
           <a:xfrm flipV="1">
-            <a:off x="1441899" y="1925653"/>
-            <a:ext cx="0" cy="3692494"/>
+            <a:off x="1441899" y="2189403"/>
+            <a:ext cx="0" cy="3164994"/>
           </a:xfrm>
           <a:prstGeom prst="line">
             <a:avLst/>
@@ -13736,8 +13713,8 @@
         </p:nvSpPr>
         <p:spPr>
           <a:xfrm flipV="1">
-            <a:off x="1969398" y="1925653"/>
-            <a:ext cx="0" cy="3692494"/>
+            <a:off x="1969398" y="2189403"/>
+            <a:ext cx="0" cy="3164994"/>
           </a:xfrm>
           <a:prstGeom prst="line">
             <a:avLst/>
@@ -13759,8 +13736,8 @@
         </p:nvSpPr>
         <p:spPr>
           <a:xfrm flipV="1">
-            <a:off x="2496897" y="1925653"/>
-            <a:ext cx="0" cy="3692494"/>
+            <a:off x="2496897" y="2189403"/>
+            <a:ext cx="0" cy="3164994"/>
           </a:xfrm>
           <a:prstGeom prst="line">
             <a:avLst/>
@@ -13782,8 +13759,8 @@
         </p:nvSpPr>
         <p:spPr>
           <a:xfrm flipV="1">
-            <a:off x="3024396" y="1925653"/>
-            <a:ext cx="0" cy="3692494"/>
+            <a:off x="3024396" y="2189403"/>
+            <a:ext cx="0" cy="3164994"/>
           </a:xfrm>
           <a:prstGeom prst="line">
             <a:avLst/>
@@ -13805,8 +13782,8 @@
         </p:nvSpPr>
         <p:spPr>
           <a:xfrm flipV="1">
-            <a:off x="3551895" y="1925653"/>
-            <a:ext cx="0" cy="3692494"/>
+            <a:off x="3551895" y="2189403"/>
+            <a:ext cx="0" cy="3164994"/>
           </a:xfrm>
           <a:prstGeom prst="line">
             <a:avLst/>
@@ -13828,8 +13805,8 @@
         </p:nvSpPr>
         <p:spPr>
           <a:xfrm flipV="1">
-            <a:off x="4079394" y="1925653"/>
-            <a:ext cx="0" cy="3692494"/>
+            <a:off x="4079394" y="2189403"/>
+            <a:ext cx="0" cy="3164994"/>
           </a:xfrm>
           <a:prstGeom prst="line">
             <a:avLst/>
@@ -13851,8 +13828,8 @@
         </p:nvSpPr>
         <p:spPr>
           <a:xfrm flipV="1">
-            <a:off x="4606894" y="1925653"/>
-            <a:ext cx="0" cy="3692494"/>
+            <a:off x="4606894" y="2189403"/>
+            <a:ext cx="0" cy="3164994"/>
           </a:xfrm>
           <a:prstGeom prst="line">
             <a:avLst/>
@@ -13874,8 +13851,8 @@
         </p:nvSpPr>
         <p:spPr>
           <a:xfrm flipV="1">
-            <a:off x="5134393" y="1925653"/>
-            <a:ext cx="0" cy="3692494"/>
+            <a:off x="5134393" y="2189403"/>
+            <a:ext cx="0" cy="3164994"/>
           </a:xfrm>
           <a:prstGeom prst="line">
             <a:avLst/>
@@ -13897,8 +13874,8 @@
         </p:nvSpPr>
         <p:spPr>
           <a:xfrm flipV="1">
-            <a:off x="5661892" y="1925653"/>
-            <a:ext cx="0" cy="3692494"/>
+            <a:off x="5661892" y="2189403"/>
+            <a:ext cx="0" cy="3164994"/>
           </a:xfrm>
           <a:prstGeom prst="line">
             <a:avLst/>
@@ -13920,8 +13897,8 @@
         </p:nvSpPr>
         <p:spPr>
           <a:xfrm flipV="1">
-            <a:off x="6189391" y="1925653"/>
-            <a:ext cx="0" cy="3692494"/>
+            <a:off x="6189391" y="2189403"/>
+            <a:ext cx="0" cy="3164994"/>
           </a:xfrm>
           <a:prstGeom prst="line">
             <a:avLst/>
@@ -13943,7 +13920,7 @@
         </p:nvSpPr>
         <p:spPr>
           <a:xfrm>
-            <a:off x="914400" y="5618147"/>
+            <a:off x="914400" y="5354397"/>
             <a:ext cx="5274991" cy="0"/>
           </a:xfrm>
           <a:prstGeom prst="line">
@@ -13966,7 +13943,7 @@
         </p:nvSpPr>
         <p:spPr>
           <a:xfrm>
-            <a:off x="914400" y="5090648"/>
+            <a:off x="914400" y="4826898"/>
             <a:ext cx="5274991" cy="0"/>
           </a:xfrm>
           <a:prstGeom prst="line">
@@ -13989,7 +13966,7 @@
         </p:nvSpPr>
         <p:spPr>
           <a:xfrm>
-            <a:off x="914400" y="4563149"/>
+            <a:off x="914400" y="4299399"/>
             <a:ext cx="5274991" cy="0"/>
           </a:xfrm>
           <a:prstGeom prst="line">
@@ -14012,7 +13989,7 @@
         </p:nvSpPr>
         <p:spPr>
           <a:xfrm>
-            <a:off x="914400" y="4035650"/>
+            <a:off x="914400" y="3771900"/>
             <a:ext cx="5274991" cy="0"/>
           </a:xfrm>
           <a:prstGeom prst="line">
@@ -14035,7 +14012,7 @@
         </p:nvSpPr>
         <p:spPr>
           <a:xfrm>
-            <a:off x="914400" y="3508150"/>
+            <a:off x="914400" y="3244401"/>
             <a:ext cx="5274991" cy="0"/>
           </a:xfrm>
           <a:prstGeom prst="line">
@@ -14058,7 +14035,7 @@
         </p:nvSpPr>
         <p:spPr>
           <a:xfrm>
-            <a:off x="914400" y="2980651"/>
+            <a:off x="914400" y="2716902"/>
             <a:ext cx="5274991" cy="0"/>
           </a:xfrm>
           <a:prstGeom prst="line">
@@ -14081,7 +14058,7 @@
         </p:nvSpPr>
         <p:spPr>
           <a:xfrm>
-            <a:off x="914400" y="2453152"/>
+            <a:off x="914400" y="2189403"/>
             <a:ext cx="5274991" cy="0"/>
           </a:xfrm>
           <a:prstGeom prst="line">
@@ -14098,36 +14075,13 @@
       </p:sp>
       <p:sp>
         <p:nvSpPr>
-          <p:cNvPr id="23" name="S03-mark77"/>
-          <p:cNvSpPr/>
-          <p:nvPr/>
-        </p:nvSpPr>
-        <p:spPr>
-          <a:xfrm>
-            <a:off x="914400" y="1925653"/>
-            <a:ext cx="5274991" cy="0"/>
-          </a:xfrm>
-          <a:prstGeom prst="line">
-            <a:avLst/>
-          </a:prstGeom>
-          <a:noFill/>
-          <a:ln w="9525">
-            <a:solidFill>
-              <a:srgbClr val="B8C2CC"/>
-            </a:solidFill>
-            <a:prstDash val="solid"/>
-          </a:ln>
-        </p:spPr>
-      </p:sp>
-      <p:sp>
-        <p:nvSpPr>
-          <p:cNvPr id="24" name="S03-figure78" descr="모눈 위의 깃발과, 오른쪽으로 5칸 민 깃발: 모양과 방향은 같고 위치만 다름"/>
-          <p:cNvSpPr/>
-          <p:nvPr/>
-        </p:nvSpPr>
-        <p:spPr>
-          <a:xfrm>
-            <a:off x="1441899" y="2980651"/>
+          <p:cNvPr id="23" name="S03-figure77" descr="모눈 위의 깃발과, 오른쪽으로 5칸 민 깃발: 모양과 방향은 같고 위치만 다름"/>
+          <p:cNvSpPr/>
+          <p:nvPr/>
+        </p:nvSpPr>
+        <p:spPr>
+          <a:xfrm>
+            <a:off x="1441899" y="2716902"/>
             <a:ext cx="1582497" cy="1582497"/>
           </a:xfrm>
           <a:custGeom>
@@ -14171,13 +14125,13 @@
       </p:sp>
       <p:sp>
         <p:nvSpPr>
-          <p:cNvPr id="25" name="S03-mark79"/>
-          <p:cNvSpPr/>
-          <p:nvPr/>
-        </p:nvSpPr>
-        <p:spPr>
-          <a:xfrm>
-            <a:off x="4079394" y="2980651"/>
+          <p:cNvPr id="24" name="S03-mark78"/>
+          <p:cNvSpPr/>
+          <p:nvPr/>
+        </p:nvSpPr>
+        <p:spPr>
+          <a:xfrm>
+            <a:off x="4079394" y="2716902"/>
             <a:ext cx="1582497" cy="1582497"/>
           </a:xfrm>
           <a:custGeom>
@@ -14221,13 +14175,13 @@
       </p:sp>
       <p:sp>
         <p:nvSpPr>
-          <p:cNvPr id="26" name="S03-mark80"/>
-          <p:cNvSpPr/>
-          <p:nvPr/>
-        </p:nvSpPr>
-        <p:spPr>
-          <a:xfrm>
-            <a:off x="1441899" y="4879648"/>
+          <p:cNvPr id="25" name="S03-mark79"/>
+          <p:cNvSpPr/>
+          <p:nvPr/>
+        </p:nvSpPr>
+        <p:spPr>
+          <a:xfrm>
+            <a:off x="1441899" y="4615899"/>
             <a:ext cx="2637495" cy="0"/>
           </a:xfrm>
           <a:prstGeom prst="line">
@@ -14245,13 +14199,13 @@
       </p:sp>
       <p:sp>
         <p:nvSpPr>
-          <p:cNvPr id="27" name="S03-label82"/>
+          <p:cNvPr id="26" name="S03-label81"/>
           <p:cNvSpPr txBox="1"/>
           <p:nvPr/>
         </p:nvSpPr>
         <p:spPr>
           <a:xfrm>
-            <a:off x="2455847" y="4963468"/>
+            <a:off x="2455847" y="4699719"/>
             <a:ext cx="609600" cy="381000"/>
           </a:xfrm>
           <a:prstGeom prst="rect">
@@ -14284,13 +14238,13 @@
       </p:sp>
       <p:sp>
         <p:nvSpPr>
-          <p:cNvPr id="28" name="S03-label84"/>
+          <p:cNvPr id="27" name="S03-label83"/>
           <p:cNvSpPr txBox="1"/>
           <p:nvPr/>
         </p:nvSpPr>
         <p:spPr>
           <a:xfrm>
-            <a:off x="1879580" y="2368152"/>
+            <a:off x="1879580" y="2104403"/>
             <a:ext cx="707136" cy="381000"/>
           </a:xfrm>
           <a:prstGeom prst="rect">
@@ -14323,13 +14277,13 @@
       </p:sp>
       <p:sp>
         <p:nvSpPr>
-          <p:cNvPr id="29" name="S03-label86"/>
+          <p:cNvPr id="28" name="S03-label85"/>
           <p:cNvSpPr txBox="1"/>
           <p:nvPr/>
         </p:nvSpPr>
         <p:spPr>
           <a:xfrm>
-            <a:off x="4471355" y="2368152"/>
+            <a:off x="4471355" y="2104403"/>
             <a:ext cx="798576" cy="381000"/>
           </a:xfrm>
           <a:prstGeom prst="rect">
@@ -14362,7 +14316,7 @@
       </p:sp>
       <p:sp>
         <p:nvSpPr>
-          <p:cNvPr id="30" name="S03-card87"/>
+          <p:cNvPr id="29" name="S03-card86"/>
           <p:cNvSpPr/>
           <p:nvPr/>
         </p:nvSpPr>
@@ -14389,7 +14343,7 @@
       </p:sp>
       <p:sp>
         <p:nvSpPr>
-          <p:cNvPr id="31" name="S03-cardtext88"/>
+          <p:cNvPr id="30" name="S03-cardtext87"/>
           <p:cNvSpPr txBox="1"/>
           <p:nvPr/>
         </p:nvSpPr>
@@ -14451,7 +14405,7 @@
       </p:sp>
       <p:sp>
         <p:nvSpPr>
-          <p:cNvPr id="32" name="S03-card89"/>
+          <p:cNvPr id="31" name="S03-card88"/>
           <p:cNvSpPr/>
           <p:nvPr/>
         </p:nvSpPr>
@@ -14478,7 +14432,7 @@
       </p:sp>
       <p:sp>
         <p:nvSpPr>
-          <p:cNvPr id="33" name="S03-cardtext90"/>
+          <p:cNvPr id="32" name="S03-cardtext89"/>
           <p:cNvSpPr txBox="1"/>
           <p:nvPr/>
         </p:nvSpPr>
@@ -14634,7 +14588,7 @@
       </p:sp>
       <p:sp>
         <p:nvSpPr>
-          <p:cNvPr id="3" name="S04-card91"/>
+          <p:cNvPr id="3" name="S04-card90"/>
           <p:cNvSpPr/>
           <p:nvPr/>
         </p:nvSpPr>
@@ -14661,7 +14615,7 @@
       </p:sp>
       <p:sp>
         <p:nvSpPr>
-          <p:cNvPr id="4" name="S04-cardtext92"/>
+          <p:cNvPr id="4" name="S04-cardtext91"/>
           <p:cNvSpPr txBox="1"/>
           <p:nvPr/>
         </p:nvSpPr>
@@ -14723,7 +14677,7 @@
       </p:sp>
       <p:sp>
         <p:nvSpPr>
-          <p:cNvPr id="5" name="S04-card93"/>
+          <p:cNvPr id="5" name="S04-card92"/>
           <p:cNvSpPr/>
           <p:nvPr/>
         </p:nvSpPr>
@@ -14750,7 +14704,7 @@
       </p:sp>
       <p:sp>
         <p:nvSpPr>
-          <p:cNvPr id="6" name="S04-cardtext94"/>
+          <p:cNvPr id="6" name="S04-cardtext93"/>
           <p:cNvSpPr txBox="1"/>
           <p:nvPr/>
         </p:nvSpPr>
@@ -14812,7 +14766,7 @@
       </p:sp>
       <p:sp>
         <p:nvSpPr>
-          <p:cNvPr id="7" name="S04-mark95"/>
+          <p:cNvPr id="7" name="S04-mark94"/>
           <p:cNvSpPr/>
           <p:nvPr/>
         </p:nvSpPr>
@@ -14859,7 +14813,7 @@
       </p:sp>
       <p:sp>
         <p:nvSpPr>
-          <p:cNvPr id="8" name="S04-mark96"/>
+          <p:cNvPr id="8" name="S04-mark95"/>
           <p:cNvSpPr/>
           <p:nvPr/>
         </p:nvSpPr>
@@ -14906,7 +14860,7 @@
       </p:sp>
       <p:sp>
         <p:nvSpPr>
-          <p:cNvPr id="9" name="S04-mark97"/>
+          <p:cNvPr id="9" name="S04-mark96"/>
           <p:cNvSpPr/>
           <p:nvPr/>
         </p:nvSpPr>
@@ -14929,7 +14883,7 @@
       </p:sp>
       <p:sp>
         <p:nvSpPr>
-          <p:cNvPr id="10" name="S04-mark98"/>
+          <p:cNvPr id="10" name="S04-mark97"/>
           <p:cNvSpPr/>
           <p:nvPr/>
         </p:nvSpPr>
@@ -14952,7 +14906,7 @@
       </p:sp>
       <p:sp>
         <p:nvSpPr>
-          <p:cNvPr id="11" name="S04-mark99"/>
+          <p:cNvPr id="11" name="S04-mark98"/>
           <p:cNvSpPr/>
           <p:nvPr/>
         </p:nvSpPr>
@@ -14975,7 +14929,7 @@
       </p:sp>
       <p:sp>
         <p:nvSpPr>
-          <p:cNvPr id="12" name="S04-mark100"/>
+          <p:cNvPr id="12" name="S04-mark99"/>
           <p:cNvSpPr/>
           <p:nvPr/>
         </p:nvSpPr>
@@ -14998,7 +14952,7 @@
       </p:sp>
       <p:sp>
         <p:nvSpPr>
-          <p:cNvPr id="13" name="S04-mark101"/>
+          <p:cNvPr id="13" name="S04-mark100"/>
           <p:cNvSpPr/>
           <p:nvPr/>
         </p:nvSpPr>
@@ -15021,7 +14975,7 @@
       </p:sp>
       <p:sp>
         <p:nvSpPr>
-          <p:cNvPr id="14" name="S04-mark102"/>
+          <p:cNvPr id="14" name="S04-mark101"/>
           <p:cNvSpPr/>
           <p:nvPr/>
         </p:nvSpPr>
@@ -15044,7 +14998,7 @@
       </p:sp>
       <p:sp>
         <p:nvSpPr>
-          <p:cNvPr id="15" name="S04-mark103"/>
+          <p:cNvPr id="15" name="S04-mark102"/>
           <p:cNvSpPr/>
           <p:nvPr/>
         </p:nvSpPr>
@@ -15067,7 +15021,7 @@
       </p:sp>
       <p:sp>
         <p:nvSpPr>
-          <p:cNvPr id="16" name="S04-mark104"/>
+          <p:cNvPr id="16" name="S04-mark103"/>
           <p:cNvSpPr/>
           <p:nvPr/>
         </p:nvSpPr>
@@ -15090,7 +15044,7 @@
       </p:sp>
       <p:sp>
         <p:nvSpPr>
-          <p:cNvPr id="17" name="S04-mark105"/>
+          <p:cNvPr id="17" name="S04-mark104"/>
           <p:cNvSpPr/>
           <p:nvPr/>
         </p:nvSpPr>
@@ -15113,7 +15067,7 @@
       </p:sp>
       <p:sp>
         <p:nvSpPr>
-          <p:cNvPr id="18" name="S04-mark106"/>
+          <p:cNvPr id="18" name="S04-mark105"/>
           <p:cNvSpPr/>
           <p:nvPr/>
         </p:nvSpPr>
@@ -15136,7 +15090,7 @@
       </p:sp>
       <p:sp>
         <p:nvSpPr>
-          <p:cNvPr id="19" name="S04-mark107"/>
+          <p:cNvPr id="19" name="S04-mark106"/>
           <p:cNvSpPr/>
           <p:nvPr/>
         </p:nvSpPr>
@@ -15159,7 +15113,7 @@
       </p:sp>
       <p:sp>
         <p:nvSpPr>
-          <p:cNvPr id="20" name="S04-mark108"/>
+          <p:cNvPr id="20" name="S04-mark107"/>
           <p:cNvSpPr/>
           <p:nvPr/>
         </p:nvSpPr>
@@ -15182,7 +15136,7 @@
       </p:sp>
       <p:sp>
         <p:nvSpPr>
-          <p:cNvPr id="21" name="S04-mark109"/>
+          <p:cNvPr id="21" name="S04-mark108"/>
           <p:cNvSpPr/>
           <p:nvPr/>
         </p:nvSpPr>
@@ -15205,7 +15159,7 @@
       </p:sp>
       <p:sp>
         <p:nvSpPr>
-          <p:cNvPr id="22" name="S04-mark110"/>
+          <p:cNvPr id="22" name="S04-mark109"/>
           <p:cNvSpPr/>
           <p:nvPr/>
         </p:nvSpPr>
@@ -15228,7 +15182,7 @@
       </p:sp>
       <p:sp>
         <p:nvSpPr>
-          <p:cNvPr id="23" name="S04-mark111"/>
+          <p:cNvPr id="23" name="S04-mark110"/>
           <p:cNvSpPr/>
           <p:nvPr/>
         </p:nvSpPr>
@@ -15251,7 +15205,7 @@
       </p:sp>
       <p:sp>
         <p:nvSpPr>
-          <p:cNvPr id="24" name="S04-mark112"/>
+          <p:cNvPr id="24" name="S04-mark111"/>
           <p:cNvSpPr/>
           <p:nvPr/>
         </p:nvSpPr>
@@ -15274,7 +15228,7 @@
       </p:sp>
       <p:sp>
         <p:nvSpPr>
-          <p:cNvPr id="25" name="S04-mark113"/>
+          <p:cNvPr id="25" name="S04-mark112"/>
           <p:cNvSpPr/>
           <p:nvPr/>
         </p:nvSpPr>
@@ -15297,7 +15251,7 @@
       </p:sp>
       <p:sp>
         <p:nvSpPr>
-          <p:cNvPr id="26" name="S04-mark114"/>
+          <p:cNvPr id="26" name="S04-mark113"/>
           <p:cNvSpPr/>
           <p:nvPr/>
         </p:nvSpPr>
@@ -15320,7 +15274,7 @@
       </p:sp>
       <p:sp>
         <p:nvSpPr>
-          <p:cNvPr id="27" name="S04-mark115"/>
+          <p:cNvPr id="27" name="S04-mark114"/>
           <p:cNvSpPr/>
           <p:nvPr/>
         </p:nvSpPr>
@@ -15343,7 +15297,7 @@
       </p:sp>
       <p:sp>
         <p:nvSpPr>
-          <p:cNvPr id="28" name="S04-figure116" descr="깃발을 세로 점선을 기준으로 오른쪽으로 뒤집음: 깃발이 오른쪽을 향하던 것이 왼쪽을 향함"/>
+          <p:cNvPr id="28" name="S04-figure115" descr="깃발을 세로 점선을 기준으로 오른쪽으로 뒤집음: 깃발이 오른쪽을 향하던 것이 왼쪽을 향함"/>
           <p:cNvSpPr/>
           <p:nvPr/>
         </p:nvSpPr>
@@ -15393,7 +15347,7 @@
       </p:sp>
       <p:sp>
         <p:nvSpPr>
-          <p:cNvPr id="29" name="S04-mark117"/>
+          <p:cNvPr id="29" name="S04-mark116"/>
           <p:cNvSpPr/>
           <p:nvPr/>
         </p:nvSpPr>
@@ -15443,7 +15397,7 @@
       </p:sp>
       <p:sp>
         <p:nvSpPr>
-          <p:cNvPr id="30" name="S04-mark118"/>
+          <p:cNvPr id="30" name="S04-mark117"/>
           <p:cNvSpPr/>
           <p:nvPr/>
         </p:nvSpPr>
@@ -15466,7 +15420,7 @@
       </p:sp>
       <p:sp>
         <p:nvSpPr>
-          <p:cNvPr id="31" name="S04-label119"/>
+          <p:cNvPr id="31" name="S04-label118"/>
           <p:cNvSpPr txBox="1"/>
           <p:nvPr/>
         </p:nvSpPr>
@@ -15505,7 +15459,7 @@
       </p:sp>
       <p:sp>
         <p:nvSpPr>
-          <p:cNvPr id="32" name="S04-mark120"/>
+          <p:cNvPr id="32" name="S04-mark119"/>
           <p:cNvSpPr/>
           <p:nvPr/>
         </p:nvSpPr>
@@ -15552,7 +15506,7 @@
       </p:sp>
       <p:sp>
         <p:nvSpPr>
-          <p:cNvPr id="33" name="S04-mark121"/>
+          <p:cNvPr id="33" name="S04-mark120"/>
           <p:cNvSpPr/>
           <p:nvPr/>
         </p:nvSpPr>
@@ -15599,7 +15553,7 @@
       </p:sp>
       <p:sp>
         <p:nvSpPr>
-          <p:cNvPr id="34" name="S04-mark122"/>
+          <p:cNvPr id="34" name="S04-mark121"/>
           <p:cNvSpPr/>
           <p:nvPr/>
         </p:nvSpPr>
@@ -15622,7 +15576,7 @@
       </p:sp>
       <p:sp>
         <p:nvSpPr>
-          <p:cNvPr id="35" name="S04-mark123"/>
+          <p:cNvPr id="35" name="S04-mark122"/>
           <p:cNvSpPr/>
           <p:nvPr/>
         </p:nvSpPr>
@@ -15645,7 +15599,7 @@
       </p:sp>
       <p:sp>
         <p:nvSpPr>
-          <p:cNvPr id="36" name="S04-mark124"/>
+          <p:cNvPr id="36" name="S04-mark123"/>
           <p:cNvSpPr/>
           <p:nvPr/>
         </p:nvSpPr>
@@ -15668,7 +15622,7 @@
       </p:sp>
       <p:sp>
         <p:nvSpPr>
-          <p:cNvPr id="37" name="S04-mark125"/>
+          <p:cNvPr id="37" name="S04-mark124"/>
           <p:cNvSpPr/>
           <p:nvPr/>
         </p:nvSpPr>
@@ -15691,7 +15645,7 @@
       </p:sp>
       <p:sp>
         <p:nvSpPr>
-          <p:cNvPr id="38" name="S04-mark126"/>
+          <p:cNvPr id="38" name="S04-mark125"/>
           <p:cNvSpPr/>
           <p:nvPr/>
         </p:nvSpPr>
@@ -15714,7 +15668,7 @@
       </p:sp>
       <p:sp>
         <p:nvSpPr>
-          <p:cNvPr id="39" name="S04-mark127"/>
+          <p:cNvPr id="39" name="S04-mark126"/>
           <p:cNvSpPr/>
           <p:nvPr/>
         </p:nvSpPr>
@@ -15737,7 +15691,7 @@
       </p:sp>
       <p:sp>
         <p:nvSpPr>
-          <p:cNvPr id="40" name="S04-mark128"/>
+          <p:cNvPr id="40" name="S04-mark127"/>
           <p:cNvSpPr/>
           <p:nvPr/>
         </p:nvSpPr>
@@ -15760,7 +15714,7 @@
       </p:sp>
       <p:sp>
         <p:nvSpPr>
-          <p:cNvPr id="41" name="S04-mark129"/>
+          <p:cNvPr id="41" name="S04-mark128"/>
           <p:cNvSpPr/>
           <p:nvPr/>
         </p:nvSpPr>
@@ -15783,7 +15737,7 @@
       </p:sp>
       <p:sp>
         <p:nvSpPr>
-          <p:cNvPr id="42" name="S04-mark130"/>
+          <p:cNvPr id="42" name="S04-mark129"/>
           <p:cNvSpPr/>
           <p:nvPr/>
         </p:nvSpPr>
@@ -15806,7 +15760,7 @@
       </p:sp>
       <p:sp>
         <p:nvSpPr>
-          <p:cNvPr id="43" name="S04-mark131"/>
+          <p:cNvPr id="43" name="S04-mark130"/>
           <p:cNvSpPr/>
           <p:nvPr/>
         </p:nvSpPr>
@@ -15829,7 +15783,7 @@
       </p:sp>
       <p:sp>
         <p:nvSpPr>
-          <p:cNvPr id="44" name="S04-mark132"/>
+          <p:cNvPr id="44" name="S04-mark131"/>
           <p:cNvSpPr/>
           <p:nvPr/>
         </p:nvSpPr>
@@ -15852,7 +15806,7 @@
       </p:sp>
       <p:sp>
         <p:nvSpPr>
-          <p:cNvPr id="45" name="S04-mark133"/>
+          <p:cNvPr id="45" name="S04-mark132"/>
           <p:cNvSpPr/>
           <p:nvPr/>
         </p:nvSpPr>
@@ -15875,7 +15829,7 @@
       </p:sp>
       <p:sp>
         <p:nvSpPr>
-          <p:cNvPr id="46" name="S04-mark134"/>
+          <p:cNvPr id="46" name="S04-mark133"/>
           <p:cNvSpPr/>
           <p:nvPr/>
         </p:nvSpPr>
@@ -15898,7 +15852,7 @@
       </p:sp>
       <p:sp>
         <p:nvSpPr>
-          <p:cNvPr id="47" name="S04-mark135"/>
+          <p:cNvPr id="47" name="S04-mark134"/>
           <p:cNvSpPr/>
           <p:nvPr/>
         </p:nvSpPr>
@@ -15921,7 +15875,7 @@
       </p:sp>
       <p:sp>
         <p:nvSpPr>
-          <p:cNvPr id="48" name="S04-mark136"/>
+          <p:cNvPr id="48" name="S04-mark135"/>
           <p:cNvSpPr/>
           <p:nvPr/>
         </p:nvSpPr>
@@ -15944,7 +15898,7 @@
       </p:sp>
       <p:sp>
         <p:nvSpPr>
-          <p:cNvPr id="49" name="S04-mark137"/>
+          <p:cNvPr id="49" name="S04-mark136"/>
           <p:cNvSpPr/>
           <p:nvPr/>
         </p:nvSpPr>
@@ -15967,7 +15921,7 @@
       </p:sp>
       <p:sp>
         <p:nvSpPr>
-          <p:cNvPr id="50" name="S04-mark138"/>
+          <p:cNvPr id="50" name="S04-mark137"/>
           <p:cNvSpPr/>
           <p:nvPr/>
         </p:nvSpPr>
@@ -15990,7 +15944,7 @@
       </p:sp>
       <p:sp>
         <p:nvSpPr>
-          <p:cNvPr id="51" name="S04-mark139"/>
+          <p:cNvPr id="51" name="S04-mark138"/>
           <p:cNvSpPr/>
           <p:nvPr/>
         </p:nvSpPr>
@@ -16013,7 +15967,7 @@
       </p:sp>
       <p:sp>
         <p:nvSpPr>
-          <p:cNvPr id="52" name="S04-mark140"/>
+          <p:cNvPr id="52" name="S04-mark139"/>
           <p:cNvSpPr/>
           <p:nvPr/>
         </p:nvSpPr>
@@ -16036,7 +15990,7 @@
       </p:sp>
       <p:sp>
         <p:nvSpPr>
-          <p:cNvPr id="53" name="S04-figure141" descr="깃발을 가로 점선을 기준으로 아래쪽으로 뒤집음: 깃발이 위쪽에 있던 것이 아래쪽에 있음"/>
+          <p:cNvPr id="53" name="S04-figure140" descr="깃발을 가로 점선을 기준으로 아래쪽으로 뒤집음: 깃발이 위쪽에 있던 것이 아래쪽에 있음"/>
           <p:cNvSpPr/>
           <p:nvPr/>
         </p:nvSpPr>
@@ -16086,7 +16040,7 @@
       </p:sp>
       <p:sp>
         <p:nvSpPr>
-          <p:cNvPr id="54" name="S04-mark142"/>
+          <p:cNvPr id="54" name="S04-mark141"/>
           <p:cNvSpPr/>
           <p:nvPr/>
         </p:nvSpPr>
@@ -16136,7 +16090,7 @@
       </p:sp>
       <p:sp>
         <p:nvSpPr>
-          <p:cNvPr id="55" name="S04-mark143"/>
+          <p:cNvPr id="55" name="S04-mark142"/>
           <p:cNvSpPr/>
           <p:nvPr/>
         </p:nvSpPr>
@@ -16159,7 +16113,7 @@
       </p:sp>
       <p:sp>
         <p:nvSpPr>
-          <p:cNvPr id="56" name="S04-label144"/>
+          <p:cNvPr id="56" name="S04-label143"/>
           <p:cNvSpPr txBox="1"/>
           <p:nvPr/>
         </p:nvSpPr>
@@ -16312,7 +16266,7 @@
       </p:sp>
       <p:sp>
         <p:nvSpPr>
-          <p:cNvPr id="3" name="S05-card145"/>
+          <p:cNvPr id="3" name="S05-card144"/>
           <p:cNvSpPr/>
           <p:nvPr/>
         </p:nvSpPr>
@@ -16339,7 +16293,7 @@
       </p:sp>
       <p:sp>
         <p:nvSpPr>
-          <p:cNvPr id="4" name="S05-cardtext146"/>
+          <p:cNvPr id="4" name="S05-cardtext145"/>
           <p:cNvSpPr txBox="1"/>
           <p:nvPr/>
         </p:nvSpPr>
@@ -16381,7 +16335,7 @@
       </p:sp>
       <p:sp>
         <p:nvSpPr>
-          <p:cNvPr id="5" name="S05-chip147"/>
+          <p:cNvPr id="5" name="S05-chip146"/>
           <p:cNvSpPr txBox="1"/>
           <p:nvPr/>
         </p:nvSpPr>
@@ -16428,7 +16382,7 @@
       </p:sp>
       <p:sp>
         <p:nvSpPr>
-          <p:cNvPr id="6" name="S05-mark148"/>
+          <p:cNvPr id="6" name="S05-mark147"/>
           <p:cNvSpPr/>
           <p:nvPr/>
         </p:nvSpPr>
@@ -16475,7 +16429,7 @@
       </p:sp>
       <p:sp>
         <p:nvSpPr>
-          <p:cNvPr id="7" name="S05-mark149"/>
+          <p:cNvPr id="7" name="S05-mark148"/>
           <p:cNvSpPr/>
           <p:nvPr/>
         </p:nvSpPr>
@@ -16498,7 +16452,7 @@
       </p:sp>
       <p:sp>
         <p:nvSpPr>
-          <p:cNvPr id="8" name="S05-mark150"/>
+          <p:cNvPr id="8" name="S05-mark149"/>
           <p:cNvSpPr/>
           <p:nvPr/>
         </p:nvSpPr>
@@ -16521,7 +16475,7 @@
       </p:sp>
       <p:sp>
         <p:nvSpPr>
-          <p:cNvPr id="9" name="S05-mark151"/>
+          <p:cNvPr id="9" name="S05-mark150"/>
           <p:cNvSpPr/>
           <p:nvPr/>
         </p:nvSpPr>
@@ -16544,7 +16498,7 @@
       </p:sp>
       <p:sp>
         <p:nvSpPr>
-          <p:cNvPr id="10" name="S05-mark152"/>
+          <p:cNvPr id="10" name="S05-mark151"/>
           <p:cNvSpPr/>
           <p:nvPr/>
         </p:nvSpPr>
@@ -16567,7 +16521,7 @@
       </p:sp>
       <p:sp>
         <p:nvSpPr>
-          <p:cNvPr id="11" name="S05-mark153"/>
+          <p:cNvPr id="11" name="S05-mark152"/>
           <p:cNvSpPr/>
           <p:nvPr/>
         </p:nvSpPr>
@@ -16590,7 +16544,7 @@
       </p:sp>
       <p:sp>
         <p:nvSpPr>
-          <p:cNvPr id="12" name="S05-mark154"/>
+          <p:cNvPr id="12" name="S05-mark153"/>
           <p:cNvSpPr/>
           <p:nvPr/>
         </p:nvSpPr>
@@ -16613,7 +16567,7 @@
       </p:sp>
       <p:sp>
         <p:nvSpPr>
-          <p:cNvPr id="13" name="S05-mark155"/>
+          <p:cNvPr id="13" name="S05-mark154"/>
           <p:cNvSpPr/>
           <p:nvPr/>
         </p:nvSpPr>
@@ -16636,7 +16590,7 @@
       </p:sp>
       <p:sp>
         <p:nvSpPr>
-          <p:cNvPr id="14" name="S05-mark156"/>
+          <p:cNvPr id="14" name="S05-mark155"/>
           <p:cNvSpPr/>
           <p:nvPr/>
         </p:nvSpPr>
@@ -16659,7 +16613,7 @@
       </p:sp>
       <p:sp>
         <p:nvSpPr>
-          <p:cNvPr id="15" name="S05-figure157" descr="처음 깃발: 깃대는 위를 향하고 깃발은 위쪽에서 오른쪽을 향함"/>
+          <p:cNvPr id="15" name="S05-figure156" descr="처음 깃발: 깃대는 위를 향하고 깃발은 위쪽에서 오른쪽을 향함"/>
           <p:cNvSpPr/>
           <p:nvPr/>
         </p:nvSpPr>
@@ -16709,7 +16663,7 @@
       </p:sp>
       <p:sp>
         <p:nvSpPr>
-          <p:cNvPr id="16" name="S05-label158"/>
+          <p:cNvPr id="16" name="S05-label157"/>
           <p:cNvSpPr txBox="1"/>
           <p:nvPr/>
         </p:nvSpPr>
@@ -16748,7 +16702,7 @@
       </p:sp>
       <p:sp>
         <p:nvSpPr>
-          <p:cNvPr id="17" name="S05-chip159"/>
+          <p:cNvPr id="17" name="S05-chip158"/>
           <p:cNvSpPr txBox="1"/>
           <p:nvPr/>
         </p:nvSpPr>
@@ -16795,7 +16749,7 @@
       </p:sp>
       <p:sp>
         <p:nvSpPr>
-          <p:cNvPr id="18" name="S05-mark160"/>
+          <p:cNvPr id="18" name="S05-mark159"/>
           <p:cNvSpPr/>
           <p:nvPr/>
         </p:nvSpPr>
@@ -16842,7 +16796,7 @@
       </p:sp>
       <p:sp>
         <p:nvSpPr>
-          <p:cNvPr id="19" name="S05-mark161"/>
+          <p:cNvPr id="19" name="S05-mark160"/>
           <p:cNvSpPr/>
           <p:nvPr/>
         </p:nvSpPr>
@@ -16865,7 +16819,7 @@
       </p:sp>
       <p:sp>
         <p:nvSpPr>
-          <p:cNvPr id="20" name="S05-mark162"/>
+          <p:cNvPr id="20" name="S05-mark161"/>
           <p:cNvSpPr/>
           <p:nvPr/>
         </p:nvSpPr>
@@ -16888,7 +16842,7 @@
       </p:sp>
       <p:sp>
         <p:nvSpPr>
-          <p:cNvPr id="21" name="S05-mark163"/>
+          <p:cNvPr id="21" name="S05-mark162"/>
           <p:cNvSpPr/>
           <p:nvPr/>
         </p:nvSpPr>
@@ -16911,7 +16865,7 @@
       </p:sp>
       <p:sp>
         <p:nvSpPr>
-          <p:cNvPr id="22" name="S05-mark164"/>
+          <p:cNvPr id="22" name="S05-mark163"/>
           <p:cNvSpPr/>
           <p:nvPr/>
         </p:nvSpPr>
@@ -16934,7 +16888,7 @@
       </p:sp>
       <p:sp>
         <p:nvSpPr>
-          <p:cNvPr id="23" name="S05-mark165"/>
+          <p:cNvPr id="23" name="S05-mark164"/>
           <p:cNvSpPr/>
           <p:nvPr/>
         </p:nvSpPr>
@@ -16957,7 +16911,7 @@
       </p:sp>
       <p:sp>
         <p:nvSpPr>
-          <p:cNvPr id="24" name="S05-mark166"/>
+          <p:cNvPr id="24" name="S05-mark165"/>
           <p:cNvSpPr/>
           <p:nvPr/>
         </p:nvSpPr>
@@ -16980,7 +16934,7 @@
       </p:sp>
       <p:sp>
         <p:nvSpPr>
-          <p:cNvPr id="25" name="S05-mark167"/>
+          <p:cNvPr id="25" name="S05-mark166"/>
           <p:cNvSpPr/>
           <p:nvPr/>
         </p:nvSpPr>
@@ -17003,7 +16957,7 @@
       </p:sp>
       <p:sp>
         <p:nvSpPr>
-          <p:cNvPr id="26" name="S05-mark168"/>
+          <p:cNvPr id="26" name="S05-mark167"/>
           <p:cNvSpPr/>
           <p:nvPr/>
         </p:nvSpPr>
@@ -17026,7 +16980,7 @@
       </p:sp>
       <p:sp>
         <p:nvSpPr>
-          <p:cNvPr id="27" name="S05-figure169" descr="가: 깃발이 아래쪽에서 오른쪽을 향함(위·아래가 바뀜)"/>
+          <p:cNvPr id="27" name="S05-figure168" descr="가: 깃발이 아래쪽에서 오른쪽을 향함(위·아래가 바뀜)"/>
           <p:cNvSpPr/>
           <p:nvPr/>
         </p:nvSpPr>
@@ -17076,7 +17030,7 @@
       </p:sp>
       <p:sp>
         <p:nvSpPr>
-          <p:cNvPr id="28" name="S05-label170"/>
+          <p:cNvPr id="28" name="S05-label169"/>
           <p:cNvSpPr txBox="1"/>
           <p:nvPr/>
         </p:nvSpPr>
@@ -17115,7 +17069,7 @@
       </p:sp>
       <p:sp>
         <p:nvSpPr>
-          <p:cNvPr id="29" name="S05-chip171"/>
+          <p:cNvPr id="29" name="S05-chip170"/>
           <p:cNvSpPr txBox="1"/>
           <p:nvPr/>
         </p:nvSpPr>
@@ -17162,7 +17116,7 @@
       </p:sp>
       <p:sp>
         <p:nvSpPr>
-          <p:cNvPr id="30" name="S05-mark172"/>
+          <p:cNvPr id="30" name="S05-mark171"/>
           <p:cNvSpPr/>
           <p:nvPr/>
         </p:nvSpPr>
@@ -17209,7 +17163,7 @@
       </p:sp>
       <p:sp>
         <p:nvSpPr>
-          <p:cNvPr id="31" name="S05-mark173"/>
+          <p:cNvPr id="31" name="S05-mark172"/>
           <p:cNvSpPr/>
           <p:nvPr/>
         </p:nvSpPr>
@@ -17232,7 +17186,7 @@
       </p:sp>
       <p:sp>
         <p:nvSpPr>
-          <p:cNvPr id="32" name="S05-mark174"/>
+          <p:cNvPr id="32" name="S05-mark173"/>
           <p:cNvSpPr/>
           <p:nvPr/>
         </p:nvSpPr>
@@ -17255,7 +17209,7 @@
       </p:sp>
       <p:sp>
         <p:nvSpPr>
-          <p:cNvPr id="33" name="S05-mark175"/>
+          <p:cNvPr id="33" name="S05-mark174"/>
           <p:cNvSpPr/>
           <p:nvPr/>
         </p:nvSpPr>
@@ -17278,7 +17232,7 @@
       </p:sp>
       <p:sp>
         <p:nvSpPr>
-          <p:cNvPr id="34" name="S05-mark176"/>
+          <p:cNvPr id="34" name="S05-mark175"/>
           <p:cNvSpPr/>
           <p:nvPr/>
         </p:nvSpPr>
@@ -17301,7 +17255,7 @@
       </p:sp>
       <p:sp>
         <p:nvSpPr>
-          <p:cNvPr id="35" name="S05-mark177"/>
+          <p:cNvPr id="35" name="S05-mark176"/>
           <p:cNvSpPr/>
           <p:nvPr/>
         </p:nvSpPr>
@@ -17324,7 +17278,7 @@
       </p:sp>
       <p:sp>
         <p:nvSpPr>
-          <p:cNvPr id="36" name="S05-mark178"/>
+          <p:cNvPr id="36" name="S05-mark177"/>
           <p:cNvSpPr/>
           <p:nvPr/>
         </p:nvSpPr>
@@ -17347,7 +17301,7 @@
       </p:sp>
       <p:sp>
         <p:nvSpPr>
-          <p:cNvPr id="37" name="S05-mark179"/>
+          <p:cNvPr id="37" name="S05-mark178"/>
           <p:cNvSpPr/>
           <p:nvPr/>
         </p:nvSpPr>
@@ -17370,7 +17324,7 @@
       </p:sp>
       <p:sp>
         <p:nvSpPr>
-          <p:cNvPr id="38" name="S05-mark180"/>
+          <p:cNvPr id="38" name="S05-mark179"/>
           <p:cNvSpPr/>
           <p:nvPr/>
         </p:nvSpPr>
@@ -17393,7 +17347,7 @@
       </p:sp>
       <p:sp>
         <p:nvSpPr>
-          <p:cNvPr id="39" name="S05-figure181" descr="나: 깃발이 아래쪽에서 왼쪽을 향함(180° 돌림)"/>
+          <p:cNvPr id="39" name="S05-figure180" descr="나: 깃발이 아래쪽에서 왼쪽을 향함(180° 돌림)"/>
           <p:cNvSpPr/>
           <p:nvPr/>
         </p:nvSpPr>
@@ -17443,7 +17397,7 @@
       </p:sp>
       <p:sp>
         <p:nvSpPr>
-          <p:cNvPr id="40" name="S05-label182"/>
+          <p:cNvPr id="40" name="S05-label181"/>
           <p:cNvSpPr txBox="1"/>
           <p:nvPr/>
         </p:nvSpPr>
@@ -17482,7 +17436,7 @@
       </p:sp>
       <p:sp>
         <p:nvSpPr>
-          <p:cNvPr id="41" name="S05-chip183"/>
+          <p:cNvPr id="41" name="S05-chip182"/>
           <p:cNvSpPr txBox="1"/>
           <p:nvPr/>
         </p:nvSpPr>
@@ -17529,7 +17483,7 @@
       </p:sp>
       <p:sp>
         <p:nvSpPr>
-          <p:cNvPr id="42" name="S05-mark184"/>
+          <p:cNvPr id="42" name="S05-mark183"/>
           <p:cNvSpPr/>
           <p:nvPr/>
         </p:nvSpPr>
@@ -17576,7 +17530,7 @@
       </p:sp>
       <p:sp>
         <p:nvSpPr>
-          <p:cNvPr id="43" name="S05-mark185"/>
+          <p:cNvPr id="43" name="S05-mark184"/>
           <p:cNvSpPr/>
           <p:nvPr/>
         </p:nvSpPr>
@@ -17599,7 +17553,7 @@
       </p:sp>
       <p:sp>
         <p:nvSpPr>
-          <p:cNvPr id="44" name="S05-mark186"/>
+          <p:cNvPr id="44" name="S05-mark185"/>
           <p:cNvSpPr/>
           <p:nvPr/>
         </p:nvSpPr>
@@ -17622,7 +17576,7 @@
       </p:sp>
       <p:sp>
         <p:nvSpPr>
-          <p:cNvPr id="45" name="S05-mark187"/>
+          <p:cNvPr id="45" name="S05-mark186"/>
           <p:cNvSpPr/>
           <p:nvPr/>
         </p:nvSpPr>
@@ -17645,7 +17599,7 @@
       </p:sp>
       <p:sp>
         <p:nvSpPr>
-          <p:cNvPr id="46" name="S05-mark188"/>
+          <p:cNvPr id="46" name="S05-mark187"/>
           <p:cNvSpPr/>
           <p:nvPr/>
         </p:nvSpPr>
@@ -17668,7 +17622,7 @@
       </p:sp>
       <p:sp>
         <p:nvSpPr>
-          <p:cNvPr id="47" name="S05-mark189"/>
+          <p:cNvPr id="47" name="S05-mark188"/>
           <p:cNvSpPr/>
           <p:nvPr/>
         </p:nvSpPr>
@@ -17691,7 +17645,7 @@
       </p:sp>
       <p:sp>
         <p:nvSpPr>
-          <p:cNvPr id="48" name="S05-mark190"/>
+          <p:cNvPr id="48" name="S05-mark189"/>
           <p:cNvSpPr/>
           <p:nvPr/>
         </p:nvSpPr>
@@ -17714,7 +17668,7 @@
       </p:sp>
       <p:sp>
         <p:nvSpPr>
-          <p:cNvPr id="49" name="S05-mark191"/>
+          <p:cNvPr id="49" name="S05-mark190"/>
           <p:cNvSpPr/>
           <p:nvPr/>
         </p:nvSpPr>
@@ -17737,7 +17691,7 @@
       </p:sp>
       <p:sp>
         <p:nvSpPr>
-          <p:cNvPr id="50" name="S05-mark192"/>
+          <p:cNvPr id="50" name="S05-mark191"/>
           <p:cNvSpPr/>
           <p:nvPr/>
         </p:nvSpPr>
@@ -17760,7 +17714,7 @@
       </p:sp>
       <p:sp>
         <p:nvSpPr>
-          <p:cNvPr id="51" name="S05-figure193" descr="다: 깃발이 위쪽에서 왼쪽을 향함(왼쪽·오른쪽이 바뀜)"/>
+          <p:cNvPr id="51" name="S05-figure192" descr="다: 깃발이 위쪽에서 왼쪽을 향함(왼쪽·오른쪽이 바뀜)"/>
           <p:cNvSpPr/>
           <p:nvPr/>
         </p:nvSpPr>
@@ -17810,7 +17764,7 @@
       </p:sp>
       <p:sp>
         <p:nvSpPr>
-          <p:cNvPr id="52" name="S05-label194"/>
+          <p:cNvPr id="52" name="S05-label193"/>
           <p:cNvSpPr txBox="1"/>
           <p:nvPr/>
         </p:nvSpPr>
@@ -17963,7 +17917,7 @@
       </p:sp>
       <p:sp>
         <p:nvSpPr>
-          <p:cNvPr id="3" name="S06-card195"/>
+          <p:cNvPr id="3" name="S06-card194"/>
           <p:cNvSpPr/>
           <p:nvPr/>
         </p:nvSpPr>
@@ -17990,7 +17944,7 @@
       </p:sp>
       <p:sp>
         <p:nvSpPr>
-          <p:cNvPr id="4" name="S06-cardtext196"/>
+          <p:cNvPr id="4" name="S06-cardtext195"/>
           <p:cNvSpPr txBox="1"/>
           <p:nvPr/>
         </p:nvSpPr>
@@ -18032,7 +17986,7 @@
       </p:sp>
       <p:sp>
         <p:nvSpPr>
-          <p:cNvPr id="5" name="S06-card197"/>
+          <p:cNvPr id="5" name="S06-card196"/>
           <p:cNvSpPr/>
           <p:nvPr/>
         </p:nvSpPr>
@@ -18059,7 +18013,7 @@
       </p:sp>
       <p:sp>
         <p:nvSpPr>
-          <p:cNvPr id="6" name="S06-cardtext198"/>
+          <p:cNvPr id="6" name="S06-cardtext197"/>
           <p:cNvSpPr txBox="1"/>
           <p:nvPr/>
         </p:nvSpPr>
@@ -18101,7 +18055,7 @@
       </p:sp>
       <p:sp>
         <p:nvSpPr>
-          <p:cNvPr id="7" name="S06-chip199"/>
+          <p:cNvPr id="7" name="S06-chip198"/>
           <p:cNvSpPr txBox="1"/>
           <p:nvPr/>
         </p:nvSpPr>
@@ -18148,7 +18102,7 @@
       </p:sp>
       <p:sp>
         <p:nvSpPr>
-          <p:cNvPr id="8" name="S06-mark200"/>
+          <p:cNvPr id="8" name="S06-mark199"/>
           <p:cNvSpPr/>
           <p:nvPr/>
         </p:nvSpPr>
@@ -18195,7 +18149,7 @@
       </p:sp>
       <p:sp>
         <p:nvSpPr>
-          <p:cNvPr id="9" name="S06-mark201"/>
+          <p:cNvPr id="9" name="S06-mark200"/>
           <p:cNvSpPr/>
           <p:nvPr/>
         </p:nvSpPr>
@@ -18218,7 +18172,7 @@
       </p:sp>
       <p:sp>
         <p:nvSpPr>
-          <p:cNvPr id="10" name="S06-mark202"/>
+          <p:cNvPr id="10" name="S06-mark201"/>
           <p:cNvSpPr/>
           <p:nvPr/>
         </p:nvSpPr>
@@ -18241,7 +18195,7 @@
       </p:sp>
       <p:sp>
         <p:nvSpPr>
-          <p:cNvPr id="11" name="S06-mark203"/>
+          <p:cNvPr id="11" name="S06-mark202"/>
           <p:cNvSpPr/>
           <p:nvPr/>
         </p:nvSpPr>
@@ -18264,7 +18218,7 @@
       </p:sp>
       <p:sp>
         <p:nvSpPr>
-          <p:cNvPr id="12" name="S06-mark204"/>
+          <p:cNvPr id="12" name="S06-mark203"/>
           <p:cNvSpPr/>
           <p:nvPr/>
         </p:nvSpPr>
@@ -18287,7 +18241,7 @@
       </p:sp>
       <p:sp>
         <p:nvSpPr>
-          <p:cNvPr id="13" name="S06-mark205"/>
+          <p:cNvPr id="13" name="S06-mark204"/>
           <p:cNvSpPr/>
           <p:nvPr/>
         </p:nvSpPr>
@@ -18310,7 +18264,7 @@
       </p:sp>
       <p:sp>
         <p:nvSpPr>
-          <p:cNvPr id="14" name="S06-mark206"/>
+          <p:cNvPr id="14" name="S06-mark205"/>
           <p:cNvSpPr/>
           <p:nvPr/>
         </p:nvSpPr>
@@ -18333,7 +18287,7 @@
       </p:sp>
       <p:sp>
         <p:nvSpPr>
-          <p:cNvPr id="15" name="S06-mark207"/>
+          <p:cNvPr id="15" name="S06-mark206"/>
           <p:cNvSpPr/>
           <p:nvPr/>
         </p:nvSpPr>
@@ -18356,7 +18310,7 @@
       </p:sp>
       <p:sp>
         <p:nvSpPr>
-          <p:cNvPr id="16" name="S06-mark208"/>
+          <p:cNvPr id="16" name="S06-mark207"/>
           <p:cNvSpPr/>
           <p:nvPr/>
         </p:nvSpPr>
@@ -18379,7 +18333,7 @@
       </p:sp>
       <p:sp>
         <p:nvSpPr>
-          <p:cNvPr id="17" name="S06-figure209" descr="토끼의 답: 깃발이 위쪽에서 왼쪽을 향함"/>
+          <p:cNvPr id="17" name="S06-figure208" descr="토끼의 답: 깃발이 위쪽에서 왼쪽을 향함"/>
           <p:cNvSpPr/>
           <p:nvPr/>
         </p:nvSpPr>
@@ -18429,7 +18383,7 @@
       </p:sp>
       <p:sp>
         <p:nvSpPr>
-          <p:cNvPr id="18" name="S06-text210"/>
+          <p:cNvPr id="18" name="S06-text209"/>
           <p:cNvSpPr txBox="1"/>
           <p:nvPr/>
         </p:nvSpPr>
@@ -18468,7 +18422,7 @@
       </p:sp>
       <p:sp>
         <p:nvSpPr>
-          <p:cNvPr id="19" name="S06-chip211"/>
+          <p:cNvPr id="19" name="S06-chip210"/>
           <p:cNvSpPr txBox="1"/>
           <p:nvPr/>
         </p:nvSpPr>
@@ -18515,7 +18469,7 @@
       </p:sp>
       <p:sp>
         <p:nvSpPr>
-          <p:cNvPr id="20" name="S06-mark212"/>
+          <p:cNvPr id="20" name="S06-mark211"/>
           <p:cNvSpPr/>
           <p:nvPr/>
         </p:nvSpPr>
@@ -18562,7 +18516,7 @@
       </p:sp>
       <p:sp>
         <p:nvSpPr>
-          <p:cNvPr id="21" name="S06-mark213"/>
+          <p:cNvPr id="21" name="S06-mark212"/>
           <p:cNvSpPr/>
           <p:nvPr/>
         </p:nvSpPr>
@@ -18585,7 +18539,7 @@
       </p:sp>
       <p:sp>
         <p:nvSpPr>
-          <p:cNvPr id="22" name="S06-mark214"/>
+          <p:cNvPr id="22" name="S06-mark213"/>
           <p:cNvSpPr/>
           <p:nvPr/>
         </p:nvSpPr>
@@ -18608,7 +18562,7 @@
       </p:sp>
       <p:sp>
         <p:nvSpPr>
-          <p:cNvPr id="23" name="S06-mark215"/>
+          <p:cNvPr id="23" name="S06-mark214"/>
           <p:cNvSpPr/>
           <p:nvPr/>
         </p:nvSpPr>
@@ -18631,7 +18585,7 @@
       </p:sp>
       <p:sp>
         <p:nvSpPr>
-          <p:cNvPr id="24" name="S06-mark216"/>
+          <p:cNvPr id="24" name="S06-mark215"/>
           <p:cNvSpPr/>
           <p:nvPr/>
         </p:nvSpPr>
@@ -18654,7 +18608,7 @@
       </p:sp>
       <p:sp>
         <p:nvSpPr>
-          <p:cNvPr id="25" name="S06-mark217"/>
+          <p:cNvPr id="25" name="S06-mark216"/>
           <p:cNvSpPr/>
           <p:nvPr/>
         </p:nvSpPr>
@@ -18677,7 +18631,7 @@
       </p:sp>
       <p:sp>
         <p:nvSpPr>
-          <p:cNvPr id="26" name="S06-mark218"/>
+          <p:cNvPr id="26" name="S06-mark217"/>
           <p:cNvSpPr/>
           <p:nvPr/>
         </p:nvSpPr>
@@ -18700,7 +18654,7 @@
       </p:sp>
       <p:sp>
         <p:nvSpPr>
-          <p:cNvPr id="27" name="S06-mark219"/>
+          <p:cNvPr id="27" name="S06-mark218"/>
           <p:cNvSpPr/>
           <p:nvPr/>
         </p:nvSpPr>
@@ -18723,7 +18677,7 @@
       </p:sp>
       <p:sp>
         <p:nvSpPr>
-          <p:cNvPr id="28" name="S06-mark220"/>
+          <p:cNvPr id="28" name="S06-mark219"/>
           <p:cNvSpPr/>
           <p:nvPr/>
         </p:nvSpPr>
@@ -18746,7 +18700,7 @@
       </p:sp>
       <p:sp>
         <p:nvSpPr>
-          <p:cNvPr id="29" name="S06-figure221" descr="곰의 답: 깃발이 아래쪽에서 오른쪽을 향함"/>
+          <p:cNvPr id="29" name="S06-figure220" descr="곰의 답: 깃발이 아래쪽에서 오른쪽을 향함"/>
           <p:cNvSpPr/>
           <p:nvPr/>
         </p:nvSpPr>
@@ -18796,7 +18750,7 @@
       </p:sp>
       <p:sp>
         <p:nvSpPr>
-          <p:cNvPr id="30" name="S06-text222"/>
+          <p:cNvPr id="30" name="S06-text221"/>
           <p:cNvSpPr txBox="1"/>
           <p:nvPr/>
         </p:nvSpPr>
@@ -18949,7 +18903,7 @@
       </p:sp>
       <p:sp>
         <p:nvSpPr>
-          <p:cNvPr id="3" name="S07-text223"/>
+          <p:cNvPr id="3" name="S07-text222"/>
           <p:cNvSpPr txBox="1"/>
           <p:nvPr/>
         </p:nvSpPr>
@@ -18988,14 +18942,14 @@
       </p:sp>
       <p:sp>
         <p:nvSpPr>
-          <p:cNvPr id="4" name="S07-mark224"/>
-          <p:cNvSpPr/>
-          <p:nvPr/>
-        </p:nvSpPr>
-        <p:spPr>
-          <a:xfrm>
-            <a:off x="2535174" y="3072384"/>
-            <a:ext cx="1042416" cy="1042416"/>
+          <p:cNvPr id="4" name="S07-mark223"/>
+          <p:cNvSpPr/>
+          <p:nvPr/>
+        </p:nvSpPr>
+        <p:spPr>
+          <a:xfrm>
+            <a:off x="2578608" y="2811780"/>
+            <a:ext cx="1303020" cy="1303020"/>
           </a:xfrm>
           <a:custGeom>
             <a:avLst/>
@@ -19004,21 +18958,21 @@
             <a:cxnLst/>
             <a:rect l="l" t="t" r="r" b="b"/>
             <a:pathLst>
-              <a:path w="1042416" h="1042416">
+              <a:path w="1303020" h="1303020">
                 <a:moveTo>
-                  <a:pt x="0" y="1042416"/>
+                  <a:pt x="0" y="1303020"/>
                 </a:moveTo>
                 <a:lnTo>
-                  <a:pt x="347472" y="1042416"/>
-                </a:lnTo>
-                <a:lnTo>
-                  <a:pt x="347472" y="694944"/>
-                </a:lnTo>
-                <a:lnTo>
-                  <a:pt x="1042416" y="347472"/>
-                </a:lnTo>
-                <a:lnTo>
-                  <a:pt x="347472" y="0"/>
+                  <a:pt x="434340" y="1303020"/>
+                </a:lnTo>
+                <a:lnTo>
+                  <a:pt x="434340" y="868680"/>
+                </a:lnTo>
+                <a:lnTo>
+                  <a:pt x="1303020" y="434340"/>
+                </a:lnTo>
+                <a:lnTo>
+                  <a:pt x="434340" y="0"/>
                 </a:lnTo>
                 <a:lnTo>
                   <a:pt x="0" y="0"/>
@@ -19035,14 +18989,14 @@
       </p:sp>
       <p:sp>
         <p:nvSpPr>
-          <p:cNvPr id="5" name="S07-mark225"/>
-          <p:cNvSpPr/>
-          <p:nvPr/>
-        </p:nvSpPr>
-        <p:spPr>
-          <a:xfrm>
-            <a:off x="2535174" y="4114800"/>
-            <a:ext cx="1042416" cy="1042416"/>
+          <p:cNvPr id="5" name="S07-mark224"/>
+          <p:cNvSpPr/>
+          <p:nvPr/>
+        </p:nvSpPr>
+        <p:spPr>
+          <a:xfrm>
+            <a:off x="2578608" y="4114800"/>
+            <a:ext cx="1303020" cy="1303020"/>
           </a:xfrm>
           <a:custGeom>
             <a:avLst/>
@@ -19051,24 +19005,24 @@
             <a:cxnLst/>
             <a:rect l="l" t="t" r="r" b="b"/>
             <a:pathLst>
-              <a:path w="1042416" h="1042416">
+              <a:path w="1303020" h="1303020">
                 <a:moveTo>
                   <a:pt x="0" y="0"/>
                 </a:moveTo>
                 <a:lnTo>
-                  <a:pt x="0" y="347472"/>
-                </a:lnTo>
-                <a:lnTo>
-                  <a:pt x="347472" y="347472"/>
-                </a:lnTo>
-                <a:lnTo>
-                  <a:pt x="694944" y="1042416"/>
-                </a:lnTo>
-                <a:lnTo>
-                  <a:pt x="1042416" y="347472"/>
-                </a:lnTo>
-                <a:lnTo>
-                  <a:pt x="1042416" y="0"/>
+                  <a:pt x="0" y="434340"/>
+                </a:lnTo>
+                <a:lnTo>
+                  <a:pt x="434340" y="434340"/>
+                </a:lnTo>
+                <a:lnTo>
+                  <a:pt x="868680" y="1303020"/>
+                </a:lnTo>
+                <a:lnTo>
+                  <a:pt x="1303020" y="434340"/>
+                </a:lnTo>
+                <a:lnTo>
+                  <a:pt x="1303020" y="0"/>
                 </a:lnTo>
                 <a:close/>
               </a:path>
@@ -19082,13 +19036,13 @@
       </p:sp>
       <p:sp>
         <p:nvSpPr>
-          <p:cNvPr id="6" name="S07-mark226"/>
+          <p:cNvPr id="6" name="S07-mark225"/>
           <p:cNvSpPr/>
           <p:nvPr/>
         </p:nvSpPr>
         <p:spPr>
           <a:xfrm flipV="1">
-            <a:off x="2187702" y="2377440"/>
+            <a:off x="2144268" y="2377440"/>
             <a:ext cx="0" cy="3474720"/>
           </a:xfrm>
           <a:prstGeom prst="line">
@@ -19105,13 +19059,13 @@
       </p:sp>
       <p:sp>
         <p:nvSpPr>
-          <p:cNvPr id="7" name="S07-mark227"/>
+          <p:cNvPr id="7" name="S07-mark226"/>
           <p:cNvSpPr/>
           <p:nvPr/>
         </p:nvSpPr>
         <p:spPr>
           <a:xfrm flipV="1">
-            <a:off x="2535174" y="2377440"/>
+            <a:off x="2578608" y="2377440"/>
             <a:ext cx="0" cy="3474720"/>
           </a:xfrm>
           <a:prstGeom prst="line">
@@ -19128,13 +19082,13 @@
       </p:sp>
       <p:sp>
         <p:nvSpPr>
-          <p:cNvPr id="8" name="S07-mark228"/>
+          <p:cNvPr id="8" name="S07-mark227"/>
           <p:cNvSpPr/>
           <p:nvPr/>
         </p:nvSpPr>
         <p:spPr>
           <a:xfrm flipV="1">
-            <a:off x="2882646" y="2377440"/>
+            <a:off x="3012948" y="2377440"/>
             <a:ext cx="0" cy="3474720"/>
           </a:xfrm>
           <a:prstGeom prst="line">
@@ -19151,13 +19105,13 @@
       </p:sp>
       <p:sp>
         <p:nvSpPr>
-          <p:cNvPr id="9" name="S07-mark229"/>
+          <p:cNvPr id="9" name="S07-mark228"/>
           <p:cNvSpPr/>
           <p:nvPr/>
         </p:nvSpPr>
         <p:spPr>
           <a:xfrm flipV="1">
-            <a:off x="3230118" y="2377440"/>
+            <a:off x="3447288" y="2377440"/>
             <a:ext cx="0" cy="3474720"/>
           </a:xfrm>
           <a:prstGeom prst="line">
@@ -19174,13 +19128,13 @@
       </p:sp>
       <p:sp>
         <p:nvSpPr>
-          <p:cNvPr id="10" name="S07-mark230"/>
+          <p:cNvPr id="10" name="S07-mark229"/>
           <p:cNvSpPr/>
           <p:nvPr/>
         </p:nvSpPr>
         <p:spPr>
           <a:xfrm flipV="1">
-            <a:off x="3577590" y="2377440"/>
+            <a:off x="3881628" y="2377440"/>
             <a:ext cx="0" cy="3474720"/>
           </a:xfrm>
           <a:prstGeom prst="line">
@@ -19197,13 +19151,13 @@
       </p:sp>
       <p:sp>
         <p:nvSpPr>
-          <p:cNvPr id="11" name="S07-mark231"/>
+          <p:cNvPr id="11" name="S07-mark230"/>
           <p:cNvSpPr/>
           <p:nvPr/>
         </p:nvSpPr>
         <p:spPr>
           <a:xfrm flipV="1">
-            <a:off x="3925062" y="2377440"/>
+            <a:off x="4315968" y="2377440"/>
             <a:ext cx="0" cy="3474720"/>
           </a:xfrm>
           <a:prstGeom prst="line">
@@ -19220,290 +19174,221 @@
       </p:sp>
       <p:sp>
         <p:nvSpPr>
-          <p:cNvPr id="12" name="S07-mark232"/>
-          <p:cNvSpPr/>
-          <p:nvPr/>
-        </p:nvSpPr>
-        <p:spPr>
-          <a:xfrm flipV="1">
-            <a:off x="4272534" y="2377440"/>
-            <a:ext cx="0" cy="3474720"/>
-          </a:xfrm>
-          <a:prstGeom prst="line">
-            <a:avLst/>
-          </a:prstGeom>
-          <a:noFill/>
-          <a:ln w="9525">
-            <a:solidFill>
-              <a:srgbClr val="B8C2CC"/>
-            </a:solidFill>
-            <a:prstDash val="solid"/>
-          </a:ln>
-        </p:spPr>
-      </p:sp>
-      <p:sp>
-        <p:nvSpPr>
-          <p:cNvPr id="13" name="S07-mark233"/>
-          <p:cNvSpPr/>
-          <p:nvPr/>
-        </p:nvSpPr>
-        <p:spPr>
-          <a:xfrm>
-            <a:off x="2187702" y="5852160"/>
-            <a:ext cx="2084832" cy="0"/>
-          </a:xfrm>
-          <a:prstGeom prst="line">
-            <a:avLst/>
-          </a:prstGeom>
-          <a:noFill/>
-          <a:ln w="9525">
-            <a:solidFill>
-              <a:srgbClr val="B8C2CC"/>
-            </a:solidFill>
-            <a:prstDash val="solid"/>
-          </a:ln>
-        </p:spPr>
-      </p:sp>
-      <p:sp>
-        <p:nvSpPr>
-          <p:cNvPr id="14" name="S07-mark234"/>
-          <p:cNvSpPr/>
-          <p:nvPr/>
-        </p:nvSpPr>
-        <p:spPr>
-          <a:xfrm>
-            <a:off x="2187702" y="5504688"/>
-            <a:ext cx="2084832" cy="0"/>
-          </a:xfrm>
-          <a:prstGeom prst="line">
-            <a:avLst/>
-          </a:prstGeom>
-          <a:noFill/>
-          <a:ln w="9525">
-            <a:solidFill>
-              <a:srgbClr val="B8C2CC"/>
-            </a:solidFill>
-            <a:prstDash val="solid"/>
-          </a:ln>
-        </p:spPr>
-      </p:sp>
-      <p:sp>
-        <p:nvSpPr>
-          <p:cNvPr id="15" name="S07-mark235"/>
-          <p:cNvSpPr/>
-          <p:nvPr/>
-        </p:nvSpPr>
-        <p:spPr>
-          <a:xfrm>
-            <a:off x="2187702" y="5157216"/>
-            <a:ext cx="2084832" cy="0"/>
-          </a:xfrm>
-          <a:prstGeom prst="line">
-            <a:avLst/>
-          </a:prstGeom>
-          <a:noFill/>
-          <a:ln w="9525">
-            <a:solidFill>
-              <a:srgbClr val="B8C2CC"/>
-            </a:solidFill>
-            <a:prstDash val="solid"/>
-          </a:ln>
-        </p:spPr>
-      </p:sp>
-      <p:sp>
-        <p:nvSpPr>
-          <p:cNvPr id="16" name="S07-mark236"/>
-          <p:cNvSpPr/>
-          <p:nvPr/>
-        </p:nvSpPr>
-        <p:spPr>
-          <a:xfrm>
-            <a:off x="2187702" y="4809744"/>
-            <a:ext cx="2084832" cy="0"/>
-          </a:xfrm>
-          <a:prstGeom prst="line">
-            <a:avLst/>
-          </a:prstGeom>
-          <a:noFill/>
-          <a:ln w="9525">
-            <a:solidFill>
-              <a:srgbClr val="B8C2CC"/>
-            </a:solidFill>
-            <a:prstDash val="solid"/>
-          </a:ln>
-        </p:spPr>
-      </p:sp>
-      <p:sp>
-        <p:nvSpPr>
-          <p:cNvPr id="17" name="S07-mark237"/>
-          <p:cNvSpPr/>
-          <p:nvPr/>
-        </p:nvSpPr>
-        <p:spPr>
-          <a:xfrm>
-            <a:off x="2187702" y="4462272"/>
-            <a:ext cx="2084832" cy="0"/>
-          </a:xfrm>
-          <a:prstGeom prst="line">
-            <a:avLst/>
-          </a:prstGeom>
-          <a:noFill/>
-          <a:ln w="9525">
-            <a:solidFill>
-              <a:srgbClr val="B8C2CC"/>
-            </a:solidFill>
-            <a:prstDash val="solid"/>
-          </a:ln>
-        </p:spPr>
-      </p:sp>
-      <p:sp>
-        <p:nvSpPr>
-          <p:cNvPr id="18" name="S07-mark238"/>
-          <p:cNvSpPr/>
-          <p:nvPr/>
-        </p:nvSpPr>
-        <p:spPr>
-          <a:xfrm>
-            <a:off x="2187702" y="4114800"/>
-            <a:ext cx="2084832" cy="0"/>
-          </a:xfrm>
-          <a:prstGeom prst="line">
-            <a:avLst/>
-          </a:prstGeom>
-          <a:noFill/>
-          <a:ln w="9525">
-            <a:solidFill>
-              <a:srgbClr val="B8C2CC"/>
-            </a:solidFill>
-            <a:prstDash val="solid"/>
-          </a:ln>
-        </p:spPr>
-      </p:sp>
-      <p:sp>
-        <p:nvSpPr>
-          <p:cNvPr id="19" name="S07-mark239"/>
-          <p:cNvSpPr/>
-          <p:nvPr/>
-        </p:nvSpPr>
-        <p:spPr>
-          <a:xfrm>
-            <a:off x="2187702" y="3767328"/>
-            <a:ext cx="2084832" cy="0"/>
-          </a:xfrm>
-          <a:prstGeom prst="line">
-            <a:avLst/>
-          </a:prstGeom>
-          <a:noFill/>
-          <a:ln w="9525">
-            <a:solidFill>
-              <a:srgbClr val="B8C2CC"/>
-            </a:solidFill>
-            <a:prstDash val="solid"/>
-          </a:ln>
-        </p:spPr>
-      </p:sp>
-      <p:sp>
-        <p:nvSpPr>
-          <p:cNvPr id="20" name="S07-mark240"/>
-          <p:cNvSpPr/>
-          <p:nvPr/>
-        </p:nvSpPr>
-        <p:spPr>
-          <a:xfrm>
-            <a:off x="2187702" y="3419856"/>
-            <a:ext cx="2084832" cy="0"/>
-          </a:xfrm>
-          <a:prstGeom prst="line">
-            <a:avLst/>
-          </a:prstGeom>
-          <a:noFill/>
-          <a:ln w="9525">
-            <a:solidFill>
-              <a:srgbClr val="B8C2CC"/>
-            </a:solidFill>
-            <a:prstDash val="solid"/>
-          </a:ln>
-        </p:spPr>
-      </p:sp>
-      <p:sp>
-        <p:nvSpPr>
-          <p:cNvPr id="21" name="S07-mark241"/>
-          <p:cNvSpPr/>
-          <p:nvPr/>
-        </p:nvSpPr>
-        <p:spPr>
-          <a:xfrm>
-            <a:off x="2187702" y="3072384"/>
-            <a:ext cx="2084832" cy="0"/>
-          </a:xfrm>
-          <a:prstGeom prst="line">
-            <a:avLst/>
-          </a:prstGeom>
-          <a:noFill/>
-          <a:ln w="9525">
-            <a:solidFill>
-              <a:srgbClr val="B8C2CC"/>
-            </a:solidFill>
-            <a:prstDash val="solid"/>
-          </a:ln>
-        </p:spPr>
-      </p:sp>
-      <p:sp>
-        <p:nvSpPr>
-          <p:cNvPr id="22" name="S07-mark242"/>
-          <p:cNvSpPr/>
-          <p:nvPr/>
-        </p:nvSpPr>
-        <p:spPr>
-          <a:xfrm>
-            <a:off x="2187702" y="2724912"/>
-            <a:ext cx="2084832" cy="0"/>
-          </a:xfrm>
-          <a:prstGeom prst="line">
-            <a:avLst/>
-          </a:prstGeom>
-          <a:noFill/>
-          <a:ln w="9525">
-            <a:solidFill>
-              <a:srgbClr val="B8C2CC"/>
-            </a:solidFill>
-            <a:prstDash val="solid"/>
-          </a:ln>
-        </p:spPr>
-      </p:sp>
-      <p:sp>
-        <p:nvSpPr>
-          <p:cNvPr id="23" name="S07-mark243"/>
-          <p:cNvSpPr/>
-          <p:nvPr/>
-        </p:nvSpPr>
-        <p:spPr>
-          <a:xfrm>
-            <a:off x="2187702" y="2377440"/>
-            <a:ext cx="2084832" cy="0"/>
-          </a:xfrm>
-          <a:prstGeom prst="line">
-            <a:avLst/>
-          </a:prstGeom>
-          <a:noFill/>
-          <a:ln w="9525">
-            <a:solidFill>
-              <a:srgbClr val="B8C2CC"/>
-            </a:solidFill>
-            <a:prstDash val="solid"/>
-          </a:ln>
-        </p:spPr>
-      </p:sp>
-      <p:sp>
-        <p:nvSpPr>
-          <p:cNvPr id="24" name="S07-figure244" descr="점 ㄱ을 중심으로 깃발을 시계 방향으로 90° 돌림: 위쪽을 향하던 깃대가 오른쪽을 향하고, 깃발이 아래쪽을 가리킴"/>
-          <p:cNvSpPr/>
-          <p:nvPr/>
-        </p:nvSpPr>
-        <p:spPr>
-          <a:xfrm>
-            <a:off x="2535174" y="3072384"/>
-            <a:ext cx="1042416" cy="1042416"/>
+          <p:cNvPr id="12" name="S07-mark231"/>
+          <p:cNvSpPr/>
+          <p:nvPr/>
+        </p:nvSpPr>
+        <p:spPr>
+          <a:xfrm>
+            <a:off x="2144268" y="5852160"/>
+            <a:ext cx="2171700" cy="0"/>
+          </a:xfrm>
+          <a:prstGeom prst="line">
+            <a:avLst/>
+          </a:prstGeom>
+          <a:noFill/>
+          <a:ln w="9525">
+            <a:solidFill>
+              <a:srgbClr val="B8C2CC"/>
+            </a:solidFill>
+            <a:prstDash val="solid"/>
+          </a:ln>
+        </p:spPr>
+      </p:sp>
+      <p:sp>
+        <p:nvSpPr>
+          <p:cNvPr id="13" name="S07-mark232"/>
+          <p:cNvSpPr/>
+          <p:nvPr/>
+        </p:nvSpPr>
+        <p:spPr>
+          <a:xfrm>
+            <a:off x="2144268" y="5417820"/>
+            <a:ext cx="2171700" cy="0"/>
+          </a:xfrm>
+          <a:prstGeom prst="line">
+            <a:avLst/>
+          </a:prstGeom>
+          <a:noFill/>
+          <a:ln w="9525">
+            <a:solidFill>
+              <a:srgbClr val="B8C2CC"/>
+            </a:solidFill>
+            <a:prstDash val="solid"/>
+          </a:ln>
+        </p:spPr>
+      </p:sp>
+      <p:sp>
+        <p:nvSpPr>
+          <p:cNvPr id="14" name="S07-mark233"/>
+          <p:cNvSpPr/>
+          <p:nvPr/>
+        </p:nvSpPr>
+        <p:spPr>
+          <a:xfrm>
+            <a:off x="2144268" y="4983480"/>
+            <a:ext cx="2171700" cy="0"/>
+          </a:xfrm>
+          <a:prstGeom prst="line">
+            <a:avLst/>
+          </a:prstGeom>
+          <a:noFill/>
+          <a:ln w="9525">
+            <a:solidFill>
+              <a:srgbClr val="B8C2CC"/>
+            </a:solidFill>
+            <a:prstDash val="solid"/>
+          </a:ln>
+        </p:spPr>
+      </p:sp>
+      <p:sp>
+        <p:nvSpPr>
+          <p:cNvPr id="15" name="S07-mark234"/>
+          <p:cNvSpPr/>
+          <p:nvPr/>
+        </p:nvSpPr>
+        <p:spPr>
+          <a:xfrm>
+            <a:off x="2144268" y="4549140"/>
+            <a:ext cx="2171700" cy="0"/>
+          </a:xfrm>
+          <a:prstGeom prst="line">
+            <a:avLst/>
+          </a:prstGeom>
+          <a:noFill/>
+          <a:ln w="9525">
+            <a:solidFill>
+              <a:srgbClr val="B8C2CC"/>
+            </a:solidFill>
+            <a:prstDash val="solid"/>
+          </a:ln>
+        </p:spPr>
+      </p:sp>
+      <p:sp>
+        <p:nvSpPr>
+          <p:cNvPr id="16" name="S07-mark235"/>
+          <p:cNvSpPr/>
+          <p:nvPr/>
+        </p:nvSpPr>
+        <p:spPr>
+          <a:xfrm>
+            <a:off x="2144268" y="4114800"/>
+            <a:ext cx="2171700" cy="0"/>
+          </a:xfrm>
+          <a:prstGeom prst="line">
+            <a:avLst/>
+          </a:prstGeom>
+          <a:noFill/>
+          <a:ln w="9525">
+            <a:solidFill>
+              <a:srgbClr val="B8C2CC"/>
+            </a:solidFill>
+            <a:prstDash val="solid"/>
+          </a:ln>
+        </p:spPr>
+      </p:sp>
+      <p:sp>
+        <p:nvSpPr>
+          <p:cNvPr id="17" name="S07-mark236"/>
+          <p:cNvSpPr/>
+          <p:nvPr/>
+        </p:nvSpPr>
+        <p:spPr>
+          <a:xfrm>
+            <a:off x="2144268" y="3680460"/>
+            <a:ext cx="2171700" cy="0"/>
+          </a:xfrm>
+          <a:prstGeom prst="line">
+            <a:avLst/>
+          </a:prstGeom>
+          <a:noFill/>
+          <a:ln w="9525">
+            <a:solidFill>
+              <a:srgbClr val="B8C2CC"/>
+            </a:solidFill>
+            <a:prstDash val="solid"/>
+          </a:ln>
+        </p:spPr>
+      </p:sp>
+      <p:sp>
+        <p:nvSpPr>
+          <p:cNvPr id="18" name="S07-mark237"/>
+          <p:cNvSpPr/>
+          <p:nvPr/>
+        </p:nvSpPr>
+        <p:spPr>
+          <a:xfrm>
+            <a:off x="2144268" y="3246120"/>
+            <a:ext cx="2171700" cy="0"/>
+          </a:xfrm>
+          <a:prstGeom prst="line">
+            <a:avLst/>
+          </a:prstGeom>
+          <a:noFill/>
+          <a:ln w="9525">
+            <a:solidFill>
+              <a:srgbClr val="B8C2CC"/>
+            </a:solidFill>
+            <a:prstDash val="solid"/>
+          </a:ln>
+        </p:spPr>
+      </p:sp>
+      <p:sp>
+        <p:nvSpPr>
+          <p:cNvPr id="19" name="S07-mark238"/>
+          <p:cNvSpPr/>
+          <p:nvPr/>
+        </p:nvSpPr>
+        <p:spPr>
+          <a:xfrm>
+            <a:off x="2144268" y="2811780"/>
+            <a:ext cx="2171700" cy="0"/>
+          </a:xfrm>
+          <a:prstGeom prst="line">
+            <a:avLst/>
+          </a:prstGeom>
+          <a:noFill/>
+          <a:ln w="9525">
+            <a:solidFill>
+              <a:srgbClr val="B8C2CC"/>
+            </a:solidFill>
+            <a:prstDash val="solid"/>
+          </a:ln>
+        </p:spPr>
+      </p:sp>
+      <p:sp>
+        <p:nvSpPr>
+          <p:cNvPr id="20" name="S07-mark239"/>
+          <p:cNvSpPr/>
+          <p:nvPr/>
+        </p:nvSpPr>
+        <p:spPr>
+          <a:xfrm>
+            <a:off x="2144268" y="2377440"/>
+            <a:ext cx="2171700" cy="0"/>
+          </a:xfrm>
+          <a:prstGeom prst="line">
+            <a:avLst/>
+          </a:prstGeom>
+          <a:noFill/>
+          <a:ln w="9525">
+            <a:solidFill>
+              <a:srgbClr val="B8C2CC"/>
+            </a:solidFill>
+            <a:prstDash val="solid"/>
+          </a:ln>
+        </p:spPr>
+      </p:sp>
+      <p:sp>
+        <p:nvSpPr>
+          <p:cNvPr id="21" name="S07-figure240" descr="점 ㄱ을 중심으로 깃발을 시계 방향으로 90° 돌림: 위쪽을 향하던 깃대가 오른쪽을 향하고, 깃발이 아래쪽을 가리킴"/>
+          <p:cNvSpPr/>
+          <p:nvPr/>
+        </p:nvSpPr>
+        <p:spPr>
+          <a:xfrm>
+            <a:off x="2578608" y="2811780"/>
+            <a:ext cx="1303020" cy="1303020"/>
           </a:xfrm>
           <a:custGeom>
             <a:avLst/>
@@ -19512,21 +19397,21 @@
             <a:cxnLst/>
             <a:rect l="l" t="t" r="r" b="b"/>
             <a:pathLst>
-              <a:path w="1042416" h="1042416">
+              <a:path w="1303020" h="1303020">
                 <a:moveTo>
-                  <a:pt x="0" y="1042416"/>
+                  <a:pt x="0" y="1303020"/>
                 </a:moveTo>
                 <a:lnTo>
-                  <a:pt x="347472" y="1042416"/>
-                </a:lnTo>
-                <a:lnTo>
-                  <a:pt x="347472" y="694944"/>
-                </a:lnTo>
-                <a:lnTo>
-                  <a:pt x="1042416" y="347472"/>
-                </a:lnTo>
-                <a:lnTo>
-                  <a:pt x="347472" y="0"/>
+                  <a:pt x="434340" y="1303020"/>
+                </a:lnTo>
+                <a:lnTo>
+                  <a:pt x="434340" y="868680"/>
+                </a:lnTo>
+                <a:lnTo>
+                  <a:pt x="1303020" y="434340"/>
+                </a:lnTo>
+                <a:lnTo>
+                  <a:pt x="434340" y="0"/>
                 </a:lnTo>
                 <a:lnTo>
                   <a:pt x="0" y="0"/>
@@ -19546,14 +19431,14 @@
       </p:sp>
       <p:sp>
         <p:nvSpPr>
-          <p:cNvPr id="25" name="S07-mark245"/>
-          <p:cNvSpPr/>
-          <p:nvPr/>
-        </p:nvSpPr>
-        <p:spPr>
-          <a:xfrm>
-            <a:off x="2535174" y="4114800"/>
-            <a:ext cx="1042416" cy="1042416"/>
+          <p:cNvPr id="22" name="S07-mark241"/>
+          <p:cNvSpPr/>
+          <p:nvPr/>
+        </p:nvSpPr>
+        <p:spPr>
+          <a:xfrm>
+            <a:off x="2578608" y="4114800"/>
+            <a:ext cx="1303020" cy="1303020"/>
           </a:xfrm>
           <a:custGeom>
             <a:avLst/>
@@ -19562,24 +19447,24 @@
             <a:cxnLst/>
             <a:rect l="l" t="t" r="r" b="b"/>
             <a:pathLst>
-              <a:path w="1042416" h="1042416">
+              <a:path w="1303020" h="1303020">
                 <a:moveTo>
                   <a:pt x="0" y="0"/>
                 </a:moveTo>
                 <a:lnTo>
-                  <a:pt x="0" y="347472"/>
-                </a:lnTo>
-                <a:lnTo>
-                  <a:pt x="347472" y="347472"/>
-                </a:lnTo>
-                <a:lnTo>
-                  <a:pt x="694944" y="1042416"/>
-                </a:lnTo>
-                <a:lnTo>
-                  <a:pt x="1042416" y="347472"/>
-                </a:lnTo>
-                <a:lnTo>
-                  <a:pt x="1042416" y="0"/>
+                  <a:pt x="0" y="434340"/>
+                </a:lnTo>
+                <a:lnTo>
+                  <a:pt x="434340" y="434340"/>
+                </a:lnTo>
+                <a:lnTo>
+                  <a:pt x="868680" y="1303020"/>
+                </a:lnTo>
+                <a:lnTo>
+                  <a:pt x="1303020" y="434340"/>
+                </a:lnTo>
+                <a:lnTo>
+                  <a:pt x="1303020" y="0"/>
                 </a:lnTo>
                 <a:close/>
               </a:path>
@@ -19596,14 +19481,14 @@
       </p:sp>
       <p:sp>
         <p:nvSpPr>
-          <p:cNvPr id="26" name="S07-mark246"/>
-          <p:cNvSpPr/>
-          <p:nvPr/>
-        </p:nvSpPr>
-        <p:spPr>
-          <a:xfrm>
-            <a:off x="2535174" y="3836822"/>
-            <a:ext cx="277978" cy="277978"/>
+          <p:cNvPr id="23" name="S07-mark242"/>
+          <p:cNvSpPr/>
+          <p:nvPr/>
+        </p:nvSpPr>
+        <p:spPr>
+          <a:xfrm>
+            <a:off x="2578608" y="3767328"/>
+            <a:ext cx="347472" cy="347472"/>
           </a:xfrm>
           <a:custGeom>
             <a:avLst/>
@@ -19612,81 +19497,81 @@
             <a:cxnLst/>
             <a:rect l="l" t="t" r="r" b="b"/>
             <a:pathLst>
-              <a:path w="277978" h="277978">
+              <a:path w="347472" h="347472">
                 <a:moveTo>
-                  <a:pt x="0" y="277978"/>
+                  <a:pt x="0" y="347472"/>
                 </a:moveTo>
                 <a:lnTo>
-                  <a:pt x="277978" y="277978"/>
-                </a:lnTo>
-                <a:lnTo>
-                  <a:pt x="277382" y="259797"/>
-                </a:lnTo>
-                <a:lnTo>
-                  <a:pt x="275599" y="241694"/>
-                </a:lnTo>
-                <a:lnTo>
-                  <a:pt x="272636" y="223747"/>
-                </a:lnTo>
-                <a:lnTo>
-                  <a:pt x="268506" y="206032"/>
-                </a:lnTo>
-                <a:lnTo>
-                  <a:pt x="263225" y="188625"/>
-                </a:lnTo>
-                <a:lnTo>
-                  <a:pt x="256818" y="171600"/>
-                </a:lnTo>
-                <a:lnTo>
-                  <a:pt x="249311" y="155031"/>
-                </a:lnTo>
-                <a:lnTo>
-                  <a:pt x="240736" y="138989"/>
-                </a:lnTo>
-                <a:lnTo>
-                  <a:pt x="231130" y="123542"/>
-                </a:lnTo>
-                <a:lnTo>
-                  <a:pt x="220534" y="108756"/>
-                </a:lnTo>
-                <a:lnTo>
-                  <a:pt x="208995" y="94694"/>
-                </a:lnTo>
-                <a:lnTo>
-                  <a:pt x="196560" y="81418"/>
-                </a:lnTo>
-                <a:lnTo>
-                  <a:pt x="183283" y="68983"/>
-                </a:lnTo>
-                <a:lnTo>
-                  <a:pt x="169222" y="57443"/>
-                </a:lnTo>
-                <a:lnTo>
-                  <a:pt x="154436" y="46848"/>
-                </a:lnTo>
-                <a:lnTo>
-                  <a:pt x="138989" y="37242"/>
-                </a:lnTo>
-                <a:lnTo>
-                  <a:pt x="122946" y="28667"/>
-                </a:lnTo>
-                <a:lnTo>
-                  <a:pt x="106377" y="21160"/>
-                </a:lnTo>
-                <a:lnTo>
-                  <a:pt x="89353" y="14752"/>
-                </a:lnTo>
-                <a:lnTo>
-                  <a:pt x="71946" y="9472"/>
-                </a:lnTo>
-                <a:lnTo>
-                  <a:pt x="54231" y="5341"/>
-                </a:lnTo>
-                <a:lnTo>
-                  <a:pt x="36283" y="2378"/>
-                </a:lnTo>
-                <a:lnTo>
-                  <a:pt x="18181" y="595"/>
+                  <a:pt x="347472" y="347472"/>
+                </a:lnTo>
+                <a:lnTo>
+                  <a:pt x="346728" y="324746"/>
+                </a:lnTo>
+                <a:lnTo>
+                  <a:pt x="344499" y="302118"/>
+                </a:lnTo>
+                <a:lnTo>
+                  <a:pt x="340795" y="279684"/>
+                </a:lnTo>
+                <a:lnTo>
+                  <a:pt x="335632" y="257540"/>
+                </a:lnTo>
+                <a:lnTo>
+                  <a:pt x="329032" y="235781"/>
+                </a:lnTo>
+                <a:lnTo>
+                  <a:pt x="321022" y="214500"/>
+                </a:lnTo>
+                <a:lnTo>
+                  <a:pt x="311638" y="193789"/>
+                </a:lnTo>
+                <a:lnTo>
+                  <a:pt x="300920" y="173736"/>
+                </a:lnTo>
+                <a:lnTo>
+                  <a:pt x="288912" y="154427"/>
+                </a:lnTo>
+                <a:lnTo>
+                  <a:pt x="275668" y="135944"/>
+                </a:lnTo>
+                <a:lnTo>
+                  <a:pt x="261243" y="118368"/>
+                </a:lnTo>
+                <a:lnTo>
+                  <a:pt x="245700" y="101772"/>
+                </a:lnTo>
+                <a:lnTo>
+                  <a:pt x="229104" y="86229"/>
+                </a:lnTo>
+                <a:lnTo>
+                  <a:pt x="211528" y="71804"/>
+                </a:lnTo>
+                <a:lnTo>
+                  <a:pt x="193045" y="58560"/>
+                </a:lnTo>
+                <a:lnTo>
+                  <a:pt x="173736" y="46552"/>
+                </a:lnTo>
+                <a:lnTo>
+                  <a:pt x="153683" y="35834"/>
+                </a:lnTo>
+                <a:lnTo>
+                  <a:pt x="132972" y="26450"/>
+                </a:lnTo>
+                <a:lnTo>
+                  <a:pt x="111691" y="18440"/>
+                </a:lnTo>
+                <a:lnTo>
+                  <a:pt x="89932" y="11840"/>
+                </a:lnTo>
+                <a:lnTo>
+                  <a:pt x="67788" y="6677"/>
+                </a:lnTo>
+                <a:lnTo>
+                  <a:pt x="45354" y="2973"/>
+                </a:lnTo>
+                <a:lnTo>
+                  <a:pt x="22726" y="744"/>
                 </a:lnTo>
                 <a:lnTo>
                   <a:pt x="0" y="0"/>
@@ -19703,13 +19588,13 @@
       </p:sp>
       <p:sp>
         <p:nvSpPr>
-          <p:cNvPr id="27" name="S07-mark247"/>
-          <p:cNvSpPr/>
-          <p:nvPr/>
-        </p:nvSpPr>
-        <p:spPr>
-          <a:xfrm>
-            <a:off x="2475738" y="4055364"/>
+          <p:cNvPr id="24" name="S07-mark243"/>
+          <p:cNvSpPr/>
+          <p:nvPr/>
+        </p:nvSpPr>
+        <p:spPr>
+          <a:xfrm>
+            <a:off x="2519172" y="4055364"/>
             <a:ext cx="118872" cy="118872"/>
           </a:xfrm>
           <a:prstGeom prst="ellipse">
@@ -19728,13 +19613,13 @@
       </p:sp>
       <p:sp>
         <p:nvSpPr>
-          <p:cNvPr id="28" name="S07-label249"/>
+          <p:cNvPr id="25" name="S07-label245"/>
           <p:cNvSpPr txBox="1"/>
           <p:nvPr/>
         </p:nvSpPr>
         <p:spPr>
           <a:xfrm>
-            <a:off x="2108753" y="4033221"/>
+            <a:off x="2152187" y="4033221"/>
             <a:ext cx="508000" cy="508000"/>
           </a:xfrm>
           <a:prstGeom prst="rect">
@@ -19767,13 +19652,13 @@
       </p:sp>
       <p:sp>
         <p:nvSpPr>
-          <p:cNvPr id="29" name="S07-label251"/>
+          <p:cNvPr id="26" name="S07-label247"/>
           <p:cNvSpPr txBox="1"/>
           <p:nvPr/>
         </p:nvSpPr>
         <p:spPr>
           <a:xfrm>
-            <a:off x="2737561" y="2638654"/>
+            <a:off x="2919984" y="2317242"/>
             <a:ext cx="707136" cy="381000"/>
           </a:xfrm>
           <a:prstGeom prst="rect">
@@ -19806,13 +19691,13 @@
       </p:sp>
       <p:sp>
         <p:nvSpPr>
-          <p:cNvPr id="30" name="S07-label253"/>
+          <p:cNvPr id="27" name="S07-label249"/>
           <p:cNvSpPr txBox="1"/>
           <p:nvPr/>
         </p:nvSpPr>
         <p:spPr>
           <a:xfrm>
-            <a:off x="3133192" y="5209946"/>
+            <a:off x="3463290" y="5531358"/>
             <a:ext cx="1097280" cy="381000"/>
           </a:xfrm>
           <a:prstGeom prst="rect">
@@ -19845,7 +19730,7 @@
       </p:sp>
       <p:sp>
         <p:nvSpPr>
-          <p:cNvPr id="31" name="S07-card254"/>
+          <p:cNvPr id="28" name="S07-card250"/>
           <p:cNvSpPr/>
           <p:nvPr/>
         </p:nvSpPr>
@@ -19872,7 +19757,7 @@
       </p:sp>
       <p:sp>
         <p:nvSpPr>
-          <p:cNvPr id="32" name="S07-cardtext255"/>
+          <p:cNvPr id="29" name="S07-cardtext251"/>
           <p:cNvSpPr txBox="1"/>
           <p:nvPr/>
         </p:nvSpPr>
@@ -19934,7 +19819,7 @@
       </p:sp>
       <p:sp>
         <p:nvSpPr>
-          <p:cNvPr id="33" name="S07-card256"/>
+          <p:cNvPr id="30" name="S07-card252"/>
           <p:cNvSpPr/>
           <p:nvPr/>
         </p:nvSpPr>
@@ -19961,7 +19846,7 @@
       </p:sp>
       <p:sp>
         <p:nvSpPr>
-          <p:cNvPr id="34" name="S07-cardtext257"/>
+          <p:cNvPr id="31" name="S07-cardtext253"/>
           <p:cNvSpPr txBox="1"/>
           <p:nvPr/>
         </p:nvSpPr>
@@ -20137,7 +20022,7 @@
       </p:sp>
       <p:sp>
         <p:nvSpPr>
-          <p:cNvPr id="3" name="S08-card258"/>
+          <p:cNvPr id="3" name="S08-card254"/>
           <p:cNvSpPr/>
           <p:nvPr/>
         </p:nvSpPr>
@@ -20164,7 +20049,7 @@
       </p:sp>
       <p:sp>
         <p:nvSpPr>
-          <p:cNvPr id="4" name="S08-cardtext259"/>
+          <p:cNvPr id="4" name="S08-cardtext255"/>
           <p:cNvSpPr txBox="1"/>
           <p:nvPr/>
         </p:nvSpPr>
@@ -20226,7 +20111,7 @@
       </p:sp>
       <p:sp>
         <p:nvSpPr>
-          <p:cNvPr id="5" name="S08-card260"/>
+          <p:cNvPr id="5" name="S08-card256"/>
           <p:cNvSpPr/>
           <p:nvPr/>
         </p:nvSpPr>
@@ -20253,7 +20138,7 @@
       </p:sp>
       <p:sp>
         <p:nvSpPr>
-          <p:cNvPr id="6" name="S08-cardtext261"/>
+          <p:cNvPr id="6" name="S08-cardtext257"/>
           <p:cNvSpPr txBox="1"/>
           <p:nvPr/>
         </p:nvSpPr>
@@ -20315,7 +20200,7 @@
       </p:sp>
       <p:sp>
         <p:nvSpPr>
-          <p:cNvPr id="7" name="S08-mark262"/>
+          <p:cNvPr id="7" name="S08-mark258"/>
           <p:cNvSpPr/>
           <p:nvPr/>
         </p:nvSpPr>
@@ -20362,7 +20247,7 @@
       </p:sp>
       <p:sp>
         <p:nvSpPr>
-          <p:cNvPr id="8" name="S08-mark263"/>
+          <p:cNvPr id="8" name="S08-mark259"/>
           <p:cNvSpPr/>
           <p:nvPr/>
         </p:nvSpPr>
@@ -20409,7 +20294,7 @@
       </p:sp>
       <p:sp>
         <p:nvSpPr>
-          <p:cNvPr id="9" name="S08-mark264"/>
+          <p:cNvPr id="9" name="S08-mark260"/>
           <p:cNvSpPr/>
           <p:nvPr/>
         </p:nvSpPr>
@@ -20432,7 +20317,7 @@
       </p:sp>
       <p:sp>
         <p:nvSpPr>
-          <p:cNvPr id="10" name="S08-mark265"/>
+          <p:cNvPr id="10" name="S08-mark261"/>
           <p:cNvSpPr/>
           <p:nvPr/>
         </p:nvSpPr>
@@ -20455,7 +20340,7 @@
       </p:sp>
       <p:sp>
         <p:nvSpPr>
-          <p:cNvPr id="11" name="S08-mark266"/>
+          <p:cNvPr id="11" name="S08-mark262"/>
           <p:cNvSpPr/>
           <p:nvPr/>
         </p:nvSpPr>
@@ -20478,7 +20363,7 @@
       </p:sp>
       <p:sp>
         <p:nvSpPr>
-          <p:cNvPr id="12" name="S08-mark267"/>
+          <p:cNvPr id="12" name="S08-mark263"/>
           <p:cNvSpPr/>
           <p:nvPr/>
         </p:nvSpPr>
@@ -20501,7 +20386,7 @@
       </p:sp>
       <p:sp>
         <p:nvSpPr>
-          <p:cNvPr id="13" name="S08-mark268"/>
+          <p:cNvPr id="13" name="S08-mark264"/>
           <p:cNvSpPr/>
           <p:nvPr/>
         </p:nvSpPr>
@@ -20524,7 +20409,7 @@
       </p:sp>
       <p:sp>
         <p:nvSpPr>
-          <p:cNvPr id="14" name="S08-mark269"/>
+          <p:cNvPr id="14" name="S08-mark265"/>
           <p:cNvSpPr/>
           <p:nvPr/>
         </p:nvSpPr>
@@ -20547,7 +20432,7 @@
       </p:sp>
       <p:sp>
         <p:nvSpPr>
-          <p:cNvPr id="15" name="S08-mark270"/>
+          <p:cNvPr id="15" name="S08-mark266"/>
           <p:cNvSpPr/>
           <p:nvPr/>
         </p:nvSpPr>
@@ -20570,7 +20455,7 @@
       </p:sp>
       <p:sp>
         <p:nvSpPr>
-          <p:cNvPr id="16" name="S08-mark271"/>
+          <p:cNvPr id="16" name="S08-mark267"/>
           <p:cNvSpPr/>
           <p:nvPr/>
         </p:nvSpPr>
@@ -20593,7 +20478,7 @@
       </p:sp>
       <p:sp>
         <p:nvSpPr>
-          <p:cNvPr id="17" name="S08-mark272"/>
+          <p:cNvPr id="17" name="S08-mark268"/>
           <p:cNvSpPr/>
           <p:nvPr/>
         </p:nvSpPr>
@@ -20616,7 +20501,7 @@
       </p:sp>
       <p:sp>
         <p:nvSpPr>
-          <p:cNvPr id="18" name="S08-mark273"/>
+          <p:cNvPr id="18" name="S08-mark269"/>
           <p:cNvSpPr/>
           <p:nvPr/>
         </p:nvSpPr>
@@ -20639,7 +20524,7 @@
       </p:sp>
       <p:sp>
         <p:nvSpPr>
-          <p:cNvPr id="19" name="S08-mark274"/>
+          <p:cNvPr id="19" name="S08-mark270"/>
           <p:cNvSpPr/>
           <p:nvPr/>
         </p:nvSpPr>
@@ -20662,7 +20547,7 @@
       </p:sp>
       <p:sp>
         <p:nvSpPr>
-          <p:cNvPr id="20" name="S08-mark275"/>
+          <p:cNvPr id="20" name="S08-mark271"/>
           <p:cNvSpPr/>
           <p:nvPr/>
         </p:nvSpPr>
@@ -20685,7 +20570,7 @@
       </p:sp>
       <p:sp>
         <p:nvSpPr>
-          <p:cNvPr id="21" name="S08-mark276"/>
+          <p:cNvPr id="21" name="S08-mark272"/>
           <p:cNvSpPr/>
           <p:nvPr/>
         </p:nvSpPr>
@@ -20708,7 +20593,7 @@
       </p:sp>
       <p:sp>
         <p:nvSpPr>
-          <p:cNvPr id="22" name="S08-mark277"/>
+          <p:cNvPr id="22" name="S08-mark273"/>
           <p:cNvSpPr/>
           <p:nvPr/>
         </p:nvSpPr>
@@ -20731,7 +20616,7 @@
       </p:sp>
       <p:sp>
         <p:nvSpPr>
-          <p:cNvPr id="23" name="S08-mark278"/>
+          <p:cNvPr id="23" name="S08-mark274"/>
           <p:cNvSpPr/>
           <p:nvPr/>
         </p:nvSpPr>
@@ -20754,7 +20639,7 @@
       </p:sp>
       <p:sp>
         <p:nvSpPr>
-          <p:cNvPr id="24" name="S08-mark279"/>
+          <p:cNvPr id="24" name="S08-mark275"/>
           <p:cNvSpPr/>
           <p:nvPr/>
         </p:nvSpPr>
@@ -20777,7 +20662,7 @@
       </p:sp>
       <p:sp>
         <p:nvSpPr>
-          <p:cNvPr id="25" name="S08-mark280"/>
+          <p:cNvPr id="25" name="S08-mark276"/>
           <p:cNvSpPr/>
           <p:nvPr/>
         </p:nvSpPr>
@@ -20800,7 +20685,7 @@
       </p:sp>
       <p:sp>
         <p:nvSpPr>
-          <p:cNvPr id="26" name="S08-mark281"/>
+          <p:cNvPr id="26" name="S08-mark277"/>
           <p:cNvSpPr/>
           <p:nvPr/>
         </p:nvSpPr>
@@ -20823,7 +20708,7 @@
       </p:sp>
       <p:sp>
         <p:nvSpPr>
-          <p:cNvPr id="27" name="S08-figure282" descr="점 ㄱ을 중심으로 깃발을 시계 방향으로 180° 돌림: 깃대가 아래를 향하고 깃발이 왼쪽을 가리킴"/>
+          <p:cNvPr id="27" name="S08-figure278" descr="점 ㄱ을 중심으로 깃발을 시계 방향으로 180° 돌림: 깃대가 아래를 향하고 깃발이 왼쪽을 가리킴"/>
           <p:cNvSpPr/>
           <p:nvPr/>
         </p:nvSpPr>
@@ -20873,7 +20758,7 @@
       </p:sp>
       <p:sp>
         <p:nvSpPr>
-          <p:cNvPr id="28" name="S08-mark283"/>
+          <p:cNvPr id="28" name="S08-mark279"/>
           <p:cNvSpPr/>
           <p:nvPr/>
         </p:nvSpPr>
@@ -20923,7 +20808,7 @@
       </p:sp>
       <p:sp>
         <p:nvSpPr>
-          <p:cNvPr id="29" name="S08-mark284"/>
+          <p:cNvPr id="29" name="S08-mark280"/>
           <p:cNvSpPr/>
           <p:nvPr/>
         </p:nvSpPr>
@@ -20948,7 +20833,7 @@
       </p:sp>
       <p:sp>
         <p:nvSpPr>
-          <p:cNvPr id="30" name="S08-label286"/>
+          <p:cNvPr id="30" name="S08-label282"/>
           <p:cNvSpPr txBox="1"/>
           <p:nvPr/>
         </p:nvSpPr>
@@ -20987,7 +20872,7 @@
       </p:sp>
       <p:sp>
         <p:nvSpPr>
-          <p:cNvPr id="31" name="S08-label287"/>
+          <p:cNvPr id="31" name="S08-label283"/>
           <p:cNvSpPr txBox="1"/>
           <p:nvPr/>
         </p:nvSpPr>
@@ -21026,7 +20911,7 @@
       </p:sp>
       <p:sp>
         <p:nvSpPr>
-          <p:cNvPr id="32" name="S08-mark288"/>
+          <p:cNvPr id="32" name="S08-mark284"/>
           <p:cNvSpPr/>
           <p:nvPr/>
         </p:nvSpPr>
@@ -21073,7 +20958,7 @@
       </p:sp>
       <p:sp>
         <p:nvSpPr>
-          <p:cNvPr id="33" name="S08-mark289"/>
+          <p:cNvPr id="33" name="S08-mark285"/>
           <p:cNvSpPr/>
           <p:nvPr/>
         </p:nvSpPr>
@@ -21120,7 +21005,7 @@
       </p:sp>
       <p:sp>
         <p:nvSpPr>
-          <p:cNvPr id="34" name="S08-mark290"/>
+          <p:cNvPr id="34" name="S08-mark286"/>
           <p:cNvSpPr/>
           <p:nvPr/>
         </p:nvSpPr>
@@ -21143,7 +21028,7 @@
       </p:sp>
       <p:sp>
         <p:nvSpPr>
-          <p:cNvPr id="35" name="S08-mark291"/>
+          <p:cNvPr id="35" name="S08-mark287"/>
           <p:cNvSpPr/>
           <p:nvPr/>
         </p:nvSpPr>
@@ -21166,7 +21051,7 @@
       </p:sp>
       <p:sp>
         <p:nvSpPr>
-          <p:cNvPr id="36" name="S08-mark292"/>
+          <p:cNvPr id="36" name="S08-mark288"/>
           <p:cNvSpPr/>
           <p:nvPr/>
         </p:nvSpPr>
@@ -21189,7 +21074,7 @@
       </p:sp>
       <p:sp>
         <p:nvSpPr>
-          <p:cNvPr id="37" name="S08-mark293"/>
+          <p:cNvPr id="37" name="S08-mark289"/>
           <p:cNvSpPr/>
           <p:nvPr/>
         </p:nvSpPr>
@@ -21212,7 +21097,7 @@
       </p:sp>
       <p:sp>
         <p:nvSpPr>
-          <p:cNvPr id="38" name="S08-mark294"/>
+          <p:cNvPr id="38" name="S08-mark290"/>
           <p:cNvSpPr/>
           <p:nvPr/>
         </p:nvSpPr>
@@ -21235,7 +21120,7 @@
       </p:sp>
       <p:sp>
         <p:nvSpPr>
-          <p:cNvPr id="39" name="S08-mark295"/>
+          <p:cNvPr id="39" name="S08-mark291"/>
           <p:cNvSpPr/>
           <p:nvPr/>
         </p:nvSpPr>
@@ -21258,7 +21143,7 @@
       </p:sp>
       <p:sp>
         <p:nvSpPr>
-          <p:cNvPr id="40" name="S08-mark296"/>
+          <p:cNvPr id="40" name="S08-mark292"/>
           <p:cNvSpPr/>
           <p:nvPr/>
         </p:nvSpPr>
@@ -21281,7 +21166,7 @@
       </p:sp>
       <p:sp>
         <p:nvSpPr>
-          <p:cNvPr id="41" name="S08-mark297"/>
+          <p:cNvPr id="41" name="S08-mark293"/>
           <p:cNvSpPr/>
           <p:nvPr/>
         </p:nvSpPr>
@@ -21304,7 +21189,7 @@
       </p:sp>
       <p:sp>
         <p:nvSpPr>
-          <p:cNvPr id="42" name="S08-mark298"/>
+          <p:cNvPr id="42" name="S08-mark294"/>
           <p:cNvSpPr/>
           <p:nvPr/>
         </p:nvSpPr>
@@ -21327,7 +21212,7 @@
       </p:sp>
       <p:sp>
         <p:nvSpPr>
-          <p:cNvPr id="43" name="S08-mark299"/>
+          <p:cNvPr id="43" name="S08-mark295"/>
           <p:cNvSpPr/>
           <p:nvPr/>
         </p:nvSpPr>
@@ -21350,7 +21235,7 @@
       </p:sp>
       <p:sp>
         <p:nvSpPr>
-          <p:cNvPr id="44" name="S08-mark300"/>
+          <p:cNvPr id="44" name="S08-mark296"/>
           <p:cNvSpPr/>
           <p:nvPr/>
         </p:nvSpPr>
@@ -21373,7 +21258,7 @@
       </p:sp>
       <p:sp>
         <p:nvSpPr>
-          <p:cNvPr id="45" name="S08-mark301"/>
+          <p:cNvPr id="45" name="S08-mark297"/>
           <p:cNvSpPr/>
           <p:nvPr/>
         </p:nvSpPr>
@@ -21396,7 +21281,7 @@
       </p:sp>
       <p:sp>
         <p:nvSpPr>
-          <p:cNvPr id="46" name="S08-mark302"/>
+          <p:cNvPr id="46" name="S08-mark298"/>
           <p:cNvSpPr/>
           <p:nvPr/>
         </p:nvSpPr>
@@ -21419,7 +21304,7 @@
       </p:sp>
       <p:sp>
         <p:nvSpPr>
-          <p:cNvPr id="47" name="S08-mark303"/>
+          <p:cNvPr id="47" name="S08-mark299"/>
           <p:cNvSpPr/>
           <p:nvPr/>
         </p:nvSpPr>
@@ -21442,7 +21327,7 @@
       </p:sp>
       <p:sp>
         <p:nvSpPr>
-          <p:cNvPr id="48" name="S08-mark304"/>
+          <p:cNvPr id="48" name="S08-mark300"/>
           <p:cNvSpPr/>
           <p:nvPr/>
         </p:nvSpPr>
@@ -21465,7 +21350,7 @@
       </p:sp>
       <p:sp>
         <p:nvSpPr>
-          <p:cNvPr id="49" name="S08-figure305" descr="점 ㄱ을 중심으로 깃발을 시계 반대 방향으로 90° 돌림: 깃대가 왼쪽을 향하고 깃발이 위쪽을 가리킴"/>
+          <p:cNvPr id="49" name="S08-figure301" descr="점 ㄱ을 중심으로 깃발을 시계 반대 방향으로 90° 돌림: 깃대가 왼쪽을 향하고 깃발이 위쪽을 가리킴"/>
           <p:cNvSpPr/>
           <p:nvPr/>
         </p:nvSpPr>
@@ -21515,7 +21400,7 @@
       </p:sp>
       <p:sp>
         <p:nvSpPr>
-          <p:cNvPr id="50" name="S08-mark306"/>
+          <p:cNvPr id="50" name="S08-mark302"/>
           <p:cNvSpPr/>
           <p:nvPr/>
         </p:nvSpPr>
@@ -21565,7 +21450,7 @@
       </p:sp>
       <p:sp>
         <p:nvSpPr>
-          <p:cNvPr id="51" name="S08-mark307"/>
+          <p:cNvPr id="51" name="S08-mark303"/>
           <p:cNvSpPr/>
           <p:nvPr/>
         </p:nvSpPr>
@@ -21590,7 +21475,7 @@
       </p:sp>
       <p:sp>
         <p:nvSpPr>
-          <p:cNvPr id="52" name="S08-label309"/>
+          <p:cNvPr id="52" name="S08-label305"/>
           <p:cNvSpPr txBox="1"/>
           <p:nvPr/>
         </p:nvSpPr>
@@ -21629,7 +21514,7 @@
       </p:sp>
       <p:sp>
         <p:nvSpPr>
-          <p:cNvPr id="53" name="S08-label310"/>
+          <p:cNvPr id="53" name="S08-label306"/>
           <p:cNvSpPr txBox="1"/>
           <p:nvPr/>
         </p:nvSpPr>
@@ -21782,7 +21667,7 @@
       </p:sp>
       <p:sp>
         <p:nvSpPr>
-          <p:cNvPr id="3" name="S09-card311"/>
+          <p:cNvPr id="3" name="S09-card307"/>
           <p:cNvSpPr/>
           <p:nvPr/>
         </p:nvSpPr>
@@ -21809,7 +21694,7 @@
       </p:sp>
       <p:sp>
         <p:nvSpPr>
-          <p:cNvPr id="4" name="S09-cardtext312"/>
+          <p:cNvPr id="4" name="S09-cardtext308"/>
           <p:cNvSpPr txBox="1"/>
           <p:nvPr/>
         </p:nvSpPr>
@@ -21851,7 +21736,7 @@
       </p:sp>
       <p:sp>
         <p:nvSpPr>
-          <p:cNvPr id="5" name="S09-card313"/>
+          <p:cNvPr id="5" name="S09-card309"/>
           <p:cNvSpPr/>
           <p:nvPr/>
         </p:nvSpPr>
@@ -21878,7 +21763,7 @@
       </p:sp>
       <p:sp>
         <p:nvSpPr>
-          <p:cNvPr id="6" name="S09-cardtext314"/>
+          <p:cNvPr id="6" name="S09-cardtext310"/>
           <p:cNvSpPr txBox="1"/>
           <p:nvPr/>
         </p:nvSpPr>
@@ -21920,7 +21805,7 @@
       </p:sp>
       <p:sp>
         <p:nvSpPr>
-          <p:cNvPr id="7" name="S09-chip315"/>
+          <p:cNvPr id="7" name="S09-chip311"/>
           <p:cNvSpPr txBox="1"/>
           <p:nvPr/>
         </p:nvSpPr>
@@ -21967,7 +21852,7 @@
       </p:sp>
       <p:sp>
         <p:nvSpPr>
-          <p:cNvPr id="8" name="S09-mark316"/>
+          <p:cNvPr id="8" name="S09-mark312"/>
           <p:cNvSpPr/>
           <p:nvPr/>
         </p:nvSpPr>
@@ -22014,7 +21899,7 @@
       </p:sp>
       <p:sp>
         <p:nvSpPr>
-          <p:cNvPr id="9" name="S09-mark317"/>
+          <p:cNvPr id="9" name="S09-mark313"/>
           <p:cNvSpPr/>
           <p:nvPr/>
         </p:nvSpPr>
@@ -22037,7 +21922,7 @@
       </p:sp>
       <p:sp>
         <p:nvSpPr>
-          <p:cNvPr id="10" name="S09-mark318"/>
+          <p:cNvPr id="10" name="S09-mark314"/>
           <p:cNvSpPr/>
           <p:nvPr/>
         </p:nvSpPr>
@@ -22060,7 +21945,7 @@
       </p:sp>
       <p:sp>
         <p:nvSpPr>
-          <p:cNvPr id="11" name="S09-mark319"/>
+          <p:cNvPr id="11" name="S09-mark315"/>
           <p:cNvSpPr/>
           <p:nvPr/>
         </p:nvSpPr>
@@ -22083,7 +21968,7 @@
       </p:sp>
       <p:sp>
         <p:nvSpPr>
-          <p:cNvPr id="12" name="S09-mark320"/>
+          <p:cNvPr id="12" name="S09-mark316"/>
           <p:cNvSpPr/>
           <p:nvPr/>
         </p:nvSpPr>
@@ -22106,7 +21991,7 @@
       </p:sp>
       <p:sp>
         <p:nvSpPr>
-          <p:cNvPr id="13" name="S09-mark321"/>
+          <p:cNvPr id="13" name="S09-mark317"/>
           <p:cNvSpPr/>
           <p:nvPr/>
         </p:nvSpPr>
@@ -22129,7 +22014,7 @@
       </p:sp>
       <p:sp>
         <p:nvSpPr>
-          <p:cNvPr id="14" name="S09-mark322"/>
+          <p:cNvPr id="14" name="S09-mark318"/>
           <p:cNvSpPr/>
           <p:nvPr/>
         </p:nvSpPr>
@@ -22152,7 +22037,7 @@
       </p:sp>
       <p:sp>
         <p:nvSpPr>
-          <p:cNvPr id="15" name="S09-mark323"/>
+          <p:cNvPr id="15" name="S09-mark319"/>
           <p:cNvSpPr/>
           <p:nvPr/>
         </p:nvSpPr>
@@ -22175,7 +22060,7 @@
       </p:sp>
       <p:sp>
         <p:nvSpPr>
-          <p:cNvPr id="16" name="S09-mark324"/>
+          <p:cNvPr id="16" name="S09-mark320"/>
           <p:cNvSpPr/>
           <p:nvPr/>
         </p:nvSpPr>
@@ -22198,7 +22083,7 @@
       </p:sp>
       <p:sp>
         <p:nvSpPr>
-          <p:cNvPr id="17" name="S09-figure325" descr="아래쪽으로 뒤집은 깃발: 깃발이 아래쪽에서 오른쪽을 향함"/>
+          <p:cNvPr id="17" name="S09-figure321" descr="아래쪽으로 뒤집은 깃발: 깃발이 아래쪽에서 오른쪽을 향함"/>
           <p:cNvSpPr/>
           <p:nvPr/>
         </p:nvSpPr>
@@ -22248,7 +22133,7 @@
       </p:sp>
       <p:sp>
         <p:nvSpPr>
-          <p:cNvPr id="18" name="S09-text326"/>
+          <p:cNvPr id="18" name="S09-text322"/>
           <p:cNvSpPr txBox="1"/>
           <p:nvPr/>
         </p:nvSpPr>
@@ -22287,7 +22172,7 @@
       </p:sp>
       <p:sp>
         <p:nvSpPr>
-          <p:cNvPr id="19" name="S09-chip327"/>
+          <p:cNvPr id="19" name="S09-chip323"/>
           <p:cNvSpPr txBox="1"/>
           <p:nvPr/>
         </p:nvSpPr>
@@ -22334,7 +22219,7 @@
       </p:sp>
       <p:sp>
         <p:nvSpPr>
-          <p:cNvPr id="20" name="S09-mark328"/>
+          <p:cNvPr id="20" name="S09-mark324"/>
           <p:cNvSpPr/>
           <p:nvPr/>
         </p:nvSpPr>
@@ -22381,7 +22266,7 @@
       </p:sp>
       <p:sp>
         <p:nvSpPr>
-          <p:cNvPr id="21" name="S09-mark329"/>
+          <p:cNvPr id="21" name="S09-mark325"/>
           <p:cNvSpPr/>
           <p:nvPr/>
         </p:nvSpPr>
@@ -22404,7 +22289,7 @@
       </p:sp>
       <p:sp>
         <p:nvSpPr>
-          <p:cNvPr id="22" name="S09-mark330"/>
+          <p:cNvPr id="22" name="S09-mark326"/>
           <p:cNvSpPr/>
           <p:nvPr/>
         </p:nvSpPr>
@@ -22427,7 +22312,7 @@
       </p:sp>
       <p:sp>
         <p:nvSpPr>
-          <p:cNvPr id="23" name="S09-mark331"/>
+          <p:cNvPr id="23" name="S09-mark327"/>
           <p:cNvSpPr/>
           <p:nvPr/>
         </p:nvSpPr>
@@ -22450,7 +22335,7 @@
       </p:sp>
       <p:sp>
         <p:nvSpPr>
-          <p:cNvPr id="24" name="S09-mark332"/>
+          <p:cNvPr id="24" name="S09-mark328"/>
           <p:cNvSpPr/>
           <p:nvPr/>
         </p:nvSpPr>
@@ -22473,7 +22358,7 @@
       </p:sp>
       <p:sp>
         <p:nvSpPr>
-          <p:cNvPr id="25" name="S09-mark333"/>
+          <p:cNvPr id="25" name="S09-mark329"/>
           <p:cNvSpPr/>
           <p:nvPr/>
         </p:nvSpPr>
@@ -22496,7 +22381,7 @@
       </p:sp>
       <p:sp>
         <p:nvSpPr>
-          <p:cNvPr id="26" name="S09-mark334"/>
+          <p:cNvPr id="26" name="S09-mark330"/>
           <p:cNvSpPr/>
           <p:nvPr/>
         </p:nvSpPr>
@@ -22519,7 +22404,7 @@
       </p:sp>
       <p:sp>
         <p:nvSpPr>
-          <p:cNvPr id="27" name="S09-mark335"/>
+          <p:cNvPr id="27" name="S09-mark331"/>
           <p:cNvSpPr/>
           <p:nvPr/>
         </p:nvSpPr>
@@ -22542,7 +22427,7 @@
       </p:sp>
       <p:sp>
         <p:nvSpPr>
-          <p:cNvPr id="28" name="S09-mark336"/>
+          <p:cNvPr id="28" name="S09-mark332"/>
           <p:cNvSpPr/>
           <p:nvPr/>
         </p:nvSpPr>
@@ -22565,7 +22450,7 @@
       </p:sp>
       <p:sp>
         <p:nvSpPr>
-          <p:cNvPr id="29" name="S09-figure337" descr="180° 돌린 깃발: 깃발이 아래쪽에서 왼쪽을 향함"/>
+          <p:cNvPr id="29" name="S09-figure333" descr="180° 돌린 깃발: 깃발이 아래쪽에서 왼쪽을 향함"/>
           <p:cNvSpPr/>
           <p:nvPr/>
         </p:nvSpPr>
@@ -22615,7 +22500,7 @@
       </p:sp>
       <p:sp>
         <p:nvSpPr>
-          <p:cNvPr id="30" name="S09-text338"/>
+          <p:cNvPr id="30" name="S09-text334"/>
           <p:cNvSpPr txBox="1"/>
           <p:nvPr/>
         </p:nvSpPr>
